--- a/docs/SlayVT_Deliverable3.pptx
+++ b/docs/SlayVT_Deliverable3.pptx
@@ -2,21 +2,21 @@
 <file path=ppt/presentation.xml><?xml version="1.0" encoding="utf-8"?>
 <p:presentation xmlns:p="http://schemas.openxmlformats.org/presentationml/2006/main">
   <p:sldMasterIdLst>
-    <p:sldMasterId xmlns:r="http://schemas.openxmlformats.org/officeDocument/2006/relationships" id="2147483648" r:id="R9182c2916ccb4c2d"/>
+    <p:sldMasterId xmlns:r="http://schemas.openxmlformats.org/officeDocument/2006/relationships" id="2147483648" r:id="Rb03b6d548a594414"/>
   </p:sldMasterIdLst>
   <p:notesMasterIdLst>
-    <p:notesMasterId xmlns:r="http://schemas.openxmlformats.org/officeDocument/2006/relationships" r:id="R970077a70e7f4d1c"/>
+    <p:notesMasterId xmlns:r="http://schemas.openxmlformats.org/officeDocument/2006/relationships" r:id="R9aad21d630cf4dfc"/>
   </p:notesMasterIdLst>
   <p:sldIdLst>
-    <p:sldId xmlns:r="http://schemas.openxmlformats.org/officeDocument/2006/relationships" id="256" r:id="R0fa26c5356884b7b"/>
-    <p:sldId xmlns:r="http://schemas.openxmlformats.org/officeDocument/2006/relationships" id="257" r:id="Rdfc2fbfb0fbe4e7d"/>
-    <p:sldId xmlns:r="http://schemas.openxmlformats.org/officeDocument/2006/relationships" id="258" r:id="R9b79f342660544bc"/>
-    <p:sldId xmlns:r="http://schemas.openxmlformats.org/officeDocument/2006/relationships" id="259" r:id="R194212f6c8d24070"/>
-    <p:sldId xmlns:r="http://schemas.openxmlformats.org/officeDocument/2006/relationships" id="260" r:id="R1c06e32400444ad0"/>
-    <p:sldId xmlns:r="http://schemas.openxmlformats.org/officeDocument/2006/relationships" id="261" r:id="Re1f473be34164682"/>
-    <p:sldId xmlns:r="http://schemas.openxmlformats.org/officeDocument/2006/relationships" id="262" r:id="R47b17a5e7e6545a4"/>
-    <p:sldId xmlns:r="http://schemas.openxmlformats.org/officeDocument/2006/relationships" id="263" r:id="R4f6b98c9c15c429d"/>
-    <p:sldId xmlns:r="http://schemas.openxmlformats.org/officeDocument/2006/relationships" id="264" r:id="R0e1c272b05024928"/>
+    <p:sldId xmlns:r="http://schemas.openxmlformats.org/officeDocument/2006/relationships" id="256" r:id="R69264ac1b8fc4d08"/>
+    <p:sldId xmlns:r="http://schemas.openxmlformats.org/officeDocument/2006/relationships" id="257" r:id="R6588f0ca8f7943b2"/>
+    <p:sldId xmlns:r="http://schemas.openxmlformats.org/officeDocument/2006/relationships" id="258" r:id="R4163ca020ce24c48"/>
+    <p:sldId xmlns:r="http://schemas.openxmlformats.org/officeDocument/2006/relationships" id="259" r:id="R094e29e011b0472d"/>
+    <p:sldId xmlns:r="http://schemas.openxmlformats.org/officeDocument/2006/relationships" id="260" r:id="R5772674fcf4d442d"/>
+    <p:sldId xmlns:r="http://schemas.openxmlformats.org/officeDocument/2006/relationships" id="261" r:id="R0d87e87c592e48f2"/>
+    <p:sldId xmlns:r="http://schemas.openxmlformats.org/officeDocument/2006/relationships" id="262" r:id="R8fbe9641b20c40ed"/>
+    <p:sldId xmlns:r="http://schemas.openxmlformats.org/officeDocument/2006/relationships" id="263" r:id="R4e77c0d4fe874c64"/>
+    <p:sldId xmlns:r="http://schemas.openxmlformats.org/officeDocument/2006/relationships" id="264" r:id="R199562a316c6480e"/>
   </p:sldIdLst>
   <p:sldSz cx="12192000" cy="6858000"/>
   <p:notesSz cx="6858000" cy="9144000"/>
@@ -450,7 +450,12 @@
           <a:lstStyle xmlns:a="http://schemas.openxmlformats.org/drawingml/2006/main"/>
           <a:p xmlns:a="http://schemas.openxmlformats.org/drawingml/2006/main">
             <a:r>
-              <a:t>SlayVT is our Virginia Tech-themed, turn-based deck-building game. This deck condenses the team presentation script. Repository: https://github.com/ultra-dog/SlayVT</a:t>
+              <a:t>SlayVT is our Virginia Tech-themed, turn-based deck-building strategy game inspired by Slay the Spire. Repository: https://github.com/ultra-dog/SlayVT</a:t>
+            </a:r>
+          </a:p>
+          <a:p xmlns:a="http://schemas.openxmlformats.org/drawingml/2006/main">
+            <a:r>
+              <a:t>Visual sources: conceptual cover illustration generated for this presentation; Virginia Tech palette reference: https://brand.vt.edu/identity/color.html</a:t>
             </a:r>
           </a:p>
         </p:txBody>
@@ -730,7 +735,7 @@
           <a:lstStyle xmlns:a="http://schemas.openxmlformats.org/drawingml/2006/main"/>
           <a:p xmlns:a="http://schemas.openxmlformats.org/drawingml/2006/main">
             <a:r>
-              <a:t>Demonstrate a short run in Test Mode. Show the room choice, a battle with enemy intent, Heat/Cold card play, a Rest Site or event, and one intentionally invalid menu input. Do not claim an invalid-input case is safe unless it is demonstrated successfully.</a:t>
+              <a:t>Live demonstration, about two minutes. Start a short run in Test Mode. Show a battle with enemy intent and limited Energy, trigger a temperature reversal, visit an event or Rest Site, and demonstrate recovery from an invalid menu choice.</a:t>
             </a:r>
           </a:p>
         </p:txBody>
@@ -940,7 +945,7 @@
           <a:lstStyle xmlns:a="http://schemas.openxmlformats.org/drawingml/2006/main"/>
           <a:p xmlns:a="http://schemas.openxmlformats.org/drawingml/2006/main">
             <a:r>
-              <a:t>Based on the team account: GenAI helped scope the initial structure, produce many tests, propose enemy and event names, refine UI, and suggest BattleContext as a way to group battle state. Team-designed work includes cards, the temperature mechanic, and core combat and balance decisions. In the talk, show one actual prompt and its output if the team has it; do not invent a prompt.</a:t>
+              <a:t>Our team used GenAI to help scope the initial structure, write tests, propose enemy and event names, refine UI, and suggest BattleContext. We designed the cards, temperature mechanic, and core combat decisions. The example on this slide is a real fields excerpt from SlayVT/src/SlayVTGame/BattleContext.java. The attribution of the original suggestion follows our team account.</a:t>
             </a:r>
           </a:p>
         </p:txBody>
@@ -1010,7 +1015,7 @@
           <a:lstStyle xmlns:a="http://schemas.openxmlformats.org/drawingml/2006/main"/>
           <a:p xmlns:a="http://schemas.openxmlformats.org/drawingml/2006/main">
             <a:r>
-              <a:t>AI was useful for rapid drafting and refactoring, but its visual designs were often generic, it sometimes produced unnecessary code, and prompting consumed substantial time and tokens. We also used AI as a bridge into unfamiliar C# for a separate, playable mod prototype. In future work we would use AI for technical acceleration while retaining design and review ownership.</a:t>
+              <a:t>GenAI accelerated drafting and refactoring, but generic designs, unnecessary code, and token use added costs. A separate C# mod experiment already produced a playable character prototype, according to our team account. This is separate from the Java class project. In future projects, we plan to use AI to bridge technical gaps while reviewing its output and keeping ownership of game design.</a:t>
             </a:r>
           </a:p>
         </p:txBody>
@@ -1078,7 +1083,7 @@
   </p:cSld>
   <p:clrMap bg1="lt1" tx1="dk1" bg2="lt2" tx2="dk2" accent1="accent1" accent2="accent2" accent3="accent3" accent4="accent4" accent5="accent5" accent6="accent6" hlink="hlink" folHlink="folHlink"/>
   <p:sldLayoutIdLst>
-    <p:sldLayoutId xmlns:r="http://schemas.openxmlformats.org/officeDocument/2006/relationships" id="2147483649" r:id="R1403f47f356a4764"/>
+    <p:sldLayoutId xmlns:r="http://schemas.openxmlformats.org/officeDocument/2006/relationships" id="2147483649" r:id="R3a559f39bc8549a5"/>
   </p:sldLayoutIdLst>
   <p:txStyles>
     <p:titleStyle>
@@ -1611,7 +1616,7 @@
     <p:bg>
       <p:bgPr>
         <a:solidFill xmlns:a="http://schemas.openxmlformats.org/drawingml/2006/main">
-          <a:srgbClr val="FFFFFF"/>
+          <a:srgbClr val="10151D"/>
         </a:solidFill>
       </p:bgPr>
     </p:bg>
@@ -1624,24 +1629,49 @@
       <p:grpSpPr>
         <a:xfrm xmlns:a="http://schemas.openxmlformats.org/drawingml/2006/main"/>
       </p:grpSpPr>
-      <p:sp>
-        <p:nvSpPr>
-          <p:cNvPr id="7" name="">
-            <a:extLst xmlns:a="http://schemas.openxmlformats.org/drawingml/2006/main">
-              <a:ext uri="{FF2B5EF4-FFF2-40B4-BE49-F238E27FC236}">
-                <a16:creationId xmlns:a16="http://schemas.microsoft.com/office/drawing/2014/main" id="{80CF5428-43C3-4CF7-B338-059B9FE629F4}"/>
-              </a:ext>
-            </a:extLst>
-          </p:cNvPr>
-          <p:cNvSpPr>
-            <a:spLocks xmlns:a="http://schemas.openxmlformats.org/drawingml/2006/main" noGrp="1"/>
-          </p:cNvSpPr>
-          <p:nvPr/>
-        </p:nvSpPr>
-        <p:spPr>
-          <a:xfrm xmlns:a="http://schemas.openxmlformats.org/drawingml/2006/main">
-            <a:off x="666750" y="266700"/>
-            <a:ext cx="10668000" cy="304800"/>
+      <p:pic>
+        <p:nvPicPr>
+          <p:cNvPr id="17" name=""/>
+          <p:cNvPicPr>
+            <a:picLocks xmlns:a="http://schemas.openxmlformats.org/drawingml/2006/main" noChangeAspect="1"/>
+          </p:cNvPicPr>
+          <p:nvPr/>
+        </p:nvPicPr>
+        <p:blipFill>
+          <a:blip xmlns:r="http://schemas.openxmlformats.org/officeDocument/2006/relationships" xmlns:a="http://schemas.openxmlformats.org/drawingml/2006/main" r:embed="R952488f9ffbd47bc"/>
+          <a:srcRect xmlns:a="http://schemas.openxmlformats.org/drawingml/2006/main" l="0" t="27" r="0" b="27"/>
+          <a:stretch xmlns:a="http://schemas.openxmlformats.org/drawingml/2006/main">
+            <a:fillRect l="0" t="0" r="0" b="0"/>
+          </a:stretch>
+        </p:blipFill>
+        <p:spPr>
+          <a:xfrm xmlns:a="http://schemas.openxmlformats.org/drawingml/2006/main">
+            <a:off x="0" y="0"/>
+            <a:ext cx="12192000" cy="6858000"/>
+          </a:xfrm>
+          <a:prstGeom xmlns:a="http://schemas.openxmlformats.org/drawingml/2006/main" prst="rect">
+            <a:avLst/>
+          </a:prstGeom>
+        </p:spPr>
+      </p:pic>
+      <p:sp>
+        <p:nvSpPr>
+          <p:cNvPr id="10" name="">
+            <a:extLst xmlns:a="http://schemas.openxmlformats.org/drawingml/2006/main">
+              <a:ext uri="{FF2B5EF4-FFF2-40B4-BE49-F238E27FC236}">
+                <a16:creationId xmlns:a16="http://schemas.microsoft.com/office/drawing/2014/main" id="{56177F2C-3EB1-4088-9AE8-353068C762BD}"/>
+              </a:ext>
+            </a:extLst>
+          </p:cNvPr>
+          <p:cNvSpPr>
+            <a:spLocks xmlns:a="http://schemas.openxmlformats.org/drawingml/2006/main" noGrp="1"/>
+          </p:cNvSpPr>
+          <p:nvPr/>
+        </p:nvSpPr>
+        <p:spPr>
+          <a:xfrm xmlns:a="http://schemas.openxmlformats.org/drawingml/2006/main">
+            <a:off x="609600" y="304800"/>
+            <a:ext cx="10096500" cy="285750"/>
           </a:xfrm>
           <a:prstGeom xmlns:a="http://schemas.openxmlformats.org/drawingml/2006/main" prst="rect">
             <a:avLst/>
@@ -1660,74 +1690,74 @@
             <a:pPr>
               <a:defRPr sz="1275" b="1">
                 <a:solidFill>
-                  <a:srgbClr val="555555"/>
-                </a:solidFill>
-                <a:latin typeface="Arial"/>
-                <a:ea typeface="Arial"/>
-                <a:cs typeface="Arial"/>
+                  <a:srgbClr val="E5751F"/>
+                </a:solidFill>
+                <a:latin typeface="Consolas"/>
+                <a:ea typeface="Consolas"/>
+                <a:cs typeface="Consolas"/>
               </a:defRPr>
             </a:pPr>
             <a:r>
               <a:rPr sz="1275" b="1">
                 <a:solidFill>
-                  <a:srgbClr val="555555"/>
-                </a:solidFill>
-                <a:latin typeface="Arial"/>
-                <a:ea typeface="Arial"/>
-                <a:cs typeface="Arial"/>
-              </a:rPr>
-              <a:t>CS 2114 · FINAL BUILD AND PRESENTATION</a:t>
-            </a:r>
-          </a:p>
-        </p:txBody>
-      </p:sp>
-      <p:sp>
-        <p:nvSpPr>
-          <p:cNvPr id="2" name="">
-            <a:extLst xmlns:a="http://schemas.openxmlformats.org/drawingml/2006/main">
-              <a:ext uri="{FF2B5EF4-FFF2-40B4-BE49-F238E27FC236}">
-                <a16:creationId xmlns:a16="http://schemas.microsoft.com/office/drawing/2014/main" id="{11DE602E-E58E-4B7D-A776-160A640386AF}"/>
-              </a:ext>
-            </a:extLst>
-          </p:cNvPr>
-          <p:cNvSpPr>
-            <a:spLocks xmlns:a="http://schemas.openxmlformats.org/drawingml/2006/main" noGrp="1"/>
-          </p:cNvSpPr>
-          <p:nvPr/>
-        </p:nvSpPr>
-        <p:spPr>
-          <a:xfrm xmlns:a="http://schemas.openxmlformats.org/drawingml/2006/main">
-            <a:off x="666750" y="685800"/>
-            <a:ext cx="10763250" cy="714375"/>
-          </a:xfrm>
-          <a:prstGeom xmlns:a="http://schemas.openxmlformats.org/drawingml/2006/main" prst="rect">
-            <a:avLst/>
-          </a:prstGeom>
-          <a:noFill xmlns:a="http://schemas.openxmlformats.org/drawingml/2006/main"/>
-          <a:ln xmlns:a="http://schemas.openxmlformats.org/drawingml/2006/main" w="0">
-            <a:noFill/>
-          </a:ln>
-        </p:spPr>
-        <p:txBody>
-          <a:bodyPr xmlns:a="http://schemas.openxmlformats.org/drawingml/2006/main">
-            <a:noAutofit/>
-          </a:bodyPr>
-          <a:lstStyle xmlns:a="http://schemas.openxmlformats.org/drawingml/2006/main"/>
-          <a:p xmlns:a="http://schemas.openxmlformats.org/drawingml/2006/main">
-            <a:pPr>
-              <a:defRPr sz="3150" b="1">
-                <a:solidFill>
-                  <a:srgbClr val="151515"/>
-                </a:solidFill>
-                <a:latin typeface="Arial"/>
-                <a:ea typeface="Arial"/>
-                <a:cs typeface="Arial"/>
-              </a:defRPr>
-            </a:pPr>
-            <a:r>
-              <a:rPr sz="3150" b="1">
-                <a:solidFill>
-                  <a:srgbClr val="151515"/>
+                  <a:srgbClr val="E5751F"/>
+                </a:solidFill>
+                <a:latin typeface="Consolas"/>
+                <a:ea typeface="Consolas"/>
+                <a:cs typeface="Consolas"/>
+              </a:rPr>
+              <a:t>CS 2114  /  FINAL PRESENTATION</a:t>
+            </a:r>
+          </a:p>
+        </p:txBody>
+      </p:sp>
+      <p:sp>
+        <p:nvSpPr>
+          <p:cNvPr id="11" name="">
+            <a:extLst xmlns:a="http://schemas.openxmlformats.org/drawingml/2006/main">
+              <a:ext uri="{FF2B5EF4-FFF2-40B4-BE49-F238E27FC236}">
+                <a16:creationId xmlns:a16="http://schemas.microsoft.com/office/drawing/2014/main" id="{760D76EE-7313-4C94-88B9-5F951B8F7374}"/>
+              </a:ext>
+            </a:extLst>
+          </p:cNvPr>
+          <p:cNvSpPr>
+            <a:spLocks xmlns:a="http://schemas.openxmlformats.org/drawingml/2006/main" noGrp="1"/>
+          </p:cNvSpPr>
+          <p:nvPr/>
+        </p:nvSpPr>
+        <p:spPr>
+          <a:xfrm xmlns:a="http://schemas.openxmlformats.org/drawingml/2006/main">
+            <a:off x="609600" y="2047875"/>
+            <a:ext cx="6667500" cy="1238250"/>
+          </a:xfrm>
+          <a:prstGeom xmlns:a="http://schemas.openxmlformats.org/drawingml/2006/main" prst="rect">
+            <a:avLst/>
+          </a:prstGeom>
+          <a:noFill xmlns:a="http://schemas.openxmlformats.org/drawingml/2006/main"/>
+          <a:ln xmlns:a="http://schemas.openxmlformats.org/drawingml/2006/main" w="0">
+            <a:noFill/>
+          </a:ln>
+        </p:spPr>
+        <p:txBody>
+          <a:bodyPr xmlns:a="http://schemas.openxmlformats.org/drawingml/2006/main">
+            <a:noAutofit/>
+          </a:bodyPr>
+          <a:lstStyle xmlns:a="http://schemas.openxmlformats.org/drawingml/2006/main"/>
+          <a:p xmlns:a="http://schemas.openxmlformats.org/drawingml/2006/main">
+            <a:pPr>
+              <a:defRPr sz="7050" b="1">
+                <a:solidFill>
+                  <a:srgbClr val="F7F7F4"/>
+                </a:solidFill>
+                <a:latin typeface="Arial"/>
+                <a:ea typeface="Arial"/>
+                <a:cs typeface="Arial"/>
+              </a:defRPr>
+            </a:pPr>
+            <a:r>
+              <a:rPr sz="7050" b="1">
+                <a:solidFill>
+                  <a:srgbClr val="F7F7F4"/>
                 </a:solidFill>
                 <a:latin typeface="Arial"/>
                 <a:ea typeface="Arial"/>
@@ -1740,22 +1770,274 @@
       </p:sp>
       <p:sp>
         <p:nvSpPr>
-          <p:cNvPr id="3" name="">
-            <a:extLst xmlns:a="http://schemas.openxmlformats.org/drawingml/2006/main">
-              <a:ext uri="{FF2B5EF4-FFF2-40B4-BE49-F238E27FC236}">
-                <a16:creationId xmlns:a16="http://schemas.microsoft.com/office/drawing/2014/main" id="{AC3442B5-BA56-4861-B3A6-E06A3DA68701}"/>
-              </a:ext>
-            </a:extLst>
-          </p:cNvPr>
-          <p:cNvSpPr>
-            <a:spLocks xmlns:a="http://schemas.openxmlformats.org/drawingml/2006/main" noGrp="1"/>
-          </p:cNvSpPr>
-          <p:nvPr/>
-        </p:nvSpPr>
-        <p:spPr>
-          <a:xfrm xmlns:a="http://schemas.openxmlformats.org/drawingml/2006/main">
-            <a:off x="11049000" y="6343650"/>
-            <a:ext cx="476250" cy="238125"/>
+          <p:cNvPr id="12" name="">
+            <a:extLst xmlns:a="http://schemas.openxmlformats.org/drawingml/2006/main">
+              <a:ext uri="{FF2B5EF4-FFF2-40B4-BE49-F238E27FC236}">
+                <a16:creationId xmlns:a16="http://schemas.microsoft.com/office/drawing/2014/main" id="{101705DF-0337-4EDB-B3A5-12037CB6375D}"/>
+              </a:ext>
+            </a:extLst>
+          </p:cNvPr>
+          <p:cNvSpPr>
+            <a:spLocks xmlns:a="http://schemas.openxmlformats.org/drawingml/2006/main" noGrp="1"/>
+          </p:cNvSpPr>
+          <p:nvPr/>
+        </p:nvSpPr>
+        <p:spPr>
+          <a:xfrm xmlns:a="http://schemas.openxmlformats.org/drawingml/2006/main">
+            <a:off x="647700" y="3429000"/>
+            <a:ext cx="6191250" cy="1047750"/>
+          </a:xfrm>
+          <a:prstGeom xmlns:a="http://schemas.openxmlformats.org/drawingml/2006/main" prst="rect">
+            <a:avLst/>
+          </a:prstGeom>
+          <a:noFill xmlns:a="http://schemas.openxmlformats.org/drawingml/2006/main"/>
+          <a:ln xmlns:a="http://schemas.openxmlformats.org/drawingml/2006/main" w="0">
+            <a:noFill/>
+          </a:ln>
+        </p:spPr>
+        <p:txBody>
+          <a:bodyPr xmlns:a="http://schemas.openxmlformats.org/drawingml/2006/main">
+            <a:noAutofit/>
+          </a:bodyPr>
+          <a:lstStyle xmlns:a="http://schemas.openxmlformats.org/drawingml/2006/main"/>
+          <a:p xmlns:a="http://schemas.openxmlformats.org/drawingml/2006/main">
+            <a:pPr>
+              <a:defRPr sz="2625" b="0">
+                <a:solidFill>
+                  <a:srgbClr val="F7F7F4"/>
+                </a:solidFill>
+                <a:latin typeface="Arial"/>
+                <a:ea typeface="Arial"/>
+                <a:cs typeface="Arial"/>
+              </a:defRPr>
+            </a:pPr>
+            <a:r>
+              <a:rPr sz="2625" b="0">
+                <a:solidFill>
+                  <a:srgbClr val="F7F7F4"/>
+                </a:solidFill>
+                <a:latin typeface="Arial"/>
+                <a:ea typeface="Arial"/>
+                <a:cs typeface="Arial"/>
+              </a:rPr>
+              <a:t>Deck-building strategy</a:t>
+            </a:r>
+          </a:p>
+          <a:p xmlns:a="http://schemas.openxmlformats.org/drawingml/2006/main">
+            <a:pPr>
+              <a:defRPr sz="2625" b="0">
+                <a:solidFill>
+                  <a:srgbClr val="F7F7F4"/>
+                </a:solidFill>
+                <a:latin typeface="Arial"/>
+                <a:ea typeface="Arial"/>
+                <a:cs typeface="Arial"/>
+              </a:defRPr>
+            </a:pPr>
+            <a:r>
+              <a:rPr sz="2625" b="0">
+                <a:solidFill>
+                  <a:srgbClr val="F7F7F4"/>
+                </a:solidFill>
+                <a:latin typeface="Arial"/>
+                <a:ea typeface="Arial"/>
+                <a:cs typeface="Arial"/>
+              </a:rPr>
+              <a:t>at Virginia Tech</a:t>
+            </a:r>
+          </a:p>
+        </p:txBody>
+      </p:sp>
+      <p:sp>
+        <p:nvSpPr>
+          <p:cNvPr id="13" name="">
+            <a:extLst xmlns:a="http://schemas.openxmlformats.org/drawingml/2006/main">
+              <a:ext uri="{FF2B5EF4-FFF2-40B4-BE49-F238E27FC236}">
+                <a16:creationId xmlns:a16="http://schemas.microsoft.com/office/drawing/2014/main" id="{1E2741A3-C34B-4BBE-98B4-C58B30ED6479}"/>
+              </a:ext>
+            </a:extLst>
+          </p:cNvPr>
+          <p:cNvSpPr>
+            <a:spLocks xmlns:a="http://schemas.openxmlformats.org/drawingml/2006/main" noGrp="1"/>
+          </p:cNvSpPr>
+          <p:nvPr/>
+        </p:nvSpPr>
+        <p:spPr>
+          <a:xfrm xmlns:a="http://schemas.openxmlformats.org/drawingml/2006/main">
+            <a:off x="647700" y="4638675"/>
+            <a:ext cx="6096000" cy="428625"/>
+          </a:xfrm>
+          <a:prstGeom xmlns:a="http://schemas.openxmlformats.org/drawingml/2006/main" prst="rect">
+            <a:avLst/>
+          </a:prstGeom>
+          <a:noFill xmlns:a="http://schemas.openxmlformats.org/drawingml/2006/main"/>
+          <a:ln xmlns:a="http://schemas.openxmlformats.org/drawingml/2006/main" w="0">
+            <a:noFill/>
+          </a:ln>
+        </p:spPr>
+        <p:txBody>
+          <a:bodyPr xmlns:a="http://schemas.openxmlformats.org/drawingml/2006/main">
+            <a:noAutofit/>
+          </a:bodyPr>
+          <a:lstStyle xmlns:a="http://schemas.openxmlformats.org/drawingml/2006/main"/>
+          <a:p xmlns:a="http://schemas.openxmlformats.org/drawingml/2006/main">
+            <a:pPr>
+              <a:defRPr sz="1725" b="0">
+                <a:solidFill>
+                  <a:srgbClr val="B7C1CB"/>
+                </a:solidFill>
+                <a:latin typeface="Arial"/>
+                <a:ea typeface="Arial"/>
+                <a:cs typeface="Arial"/>
+              </a:defRPr>
+            </a:pPr>
+            <a:r>
+              <a:rPr sz="1725" b="0">
+                <a:solidFill>
+                  <a:srgbClr val="B7C1CB"/>
+                </a:solidFill>
+                <a:latin typeface="Arial"/>
+                <a:ea typeface="Arial"/>
+                <a:cs typeface="Arial"/>
+              </a:rPr>
+              <a:t>Inspired by Slay the Spire</a:t>
+            </a:r>
+          </a:p>
+        </p:txBody>
+      </p:sp>
+      <p:sp>
+        <p:nvSpPr>
+          <p:cNvPr id="14" name="">
+            <a:extLst xmlns:a="http://schemas.openxmlformats.org/drawingml/2006/main">
+              <a:ext uri="{FF2B5EF4-FFF2-40B4-BE49-F238E27FC236}">
+                <a16:creationId xmlns:a16="http://schemas.microsoft.com/office/drawing/2014/main" id="{875A2BE9-256A-4E9B-B78E-EA43816CF8F4}"/>
+              </a:ext>
+            </a:extLst>
+          </p:cNvPr>
+          <p:cNvSpPr>
+            <a:spLocks xmlns:a="http://schemas.openxmlformats.org/drawingml/2006/main" noGrp="1"/>
+          </p:cNvSpPr>
+          <p:nvPr/>
+        </p:nvSpPr>
+        <p:spPr>
+          <a:xfrm xmlns:a="http://schemas.openxmlformats.org/drawingml/2006/main">
+            <a:off x="647700" y="5629275"/>
+            <a:ext cx="7620000" cy="361950"/>
+          </a:xfrm>
+          <a:prstGeom xmlns:a="http://schemas.openxmlformats.org/drawingml/2006/main" prst="rect">
+            <a:avLst/>
+          </a:prstGeom>
+          <a:noFill xmlns:a="http://schemas.openxmlformats.org/drawingml/2006/main"/>
+          <a:ln xmlns:a="http://schemas.openxmlformats.org/drawingml/2006/main" w="0">
+            <a:noFill/>
+          </a:ln>
+        </p:spPr>
+        <p:txBody>
+          <a:bodyPr xmlns:a="http://schemas.openxmlformats.org/drawingml/2006/main">
+            <a:noAutofit/>
+          </a:bodyPr>
+          <a:lstStyle xmlns:a="http://schemas.openxmlformats.org/drawingml/2006/main"/>
+          <a:p xmlns:a="http://schemas.openxmlformats.org/drawingml/2006/main">
+            <a:pPr>
+              <a:defRPr sz="1500" b="0">
+                <a:solidFill>
+                  <a:srgbClr val="B7C1CB"/>
+                </a:solidFill>
+                <a:latin typeface="Consolas"/>
+                <a:ea typeface="Consolas"/>
+                <a:cs typeface="Consolas"/>
+              </a:defRPr>
+            </a:pPr>
+            <a:r>
+              <a:rPr sz="1500" b="0">
+                <a:solidFill>
+                  <a:srgbClr val="B7C1CB"/>
+                </a:solidFill>
+                <a:latin typeface="Consolas"/>
+                <a:ea typeface="Consolas"/>
+                <a:cs typeface="Consolas"/>
+                <a:hlinkClick xmlns:r="http://schemas.openxmlformats.org/officeDocument/2006/relationships" r:id="R9029fb83e8864524"/>
+              </a:rPr>
+              <a:t>https://github.com/ultra-dog/SlayVT</a:t>
+            </a:r>
+          </a:p>
+        </p:txBody>
+      </p:sp>
+      <p:sp>
+        <p:nvSpPr>
+          <p:cNvPr id="15" name="">
+            <a:extLst xmlns:a="http://schemas.openxmlformats.org/drawingml/2006/main">
+              <a:ext uri="{FF2B5EF4-FFF2-40B4-BE49-F238E27FC236}">
+                <a16:creationId xmlns:a16="http://schemas.microsoft.com/office/drawing/2014/main" id="{A30AB39A-4DF4-4183-AEEE-867A59068E47}"/>
+              </a:ext>
+            </a:extLst>
+          </p:cNvPr>
+          <p:cNvSpPr>
+            <a:spLocks xmlns:a="http://schemas.openxmlformats.org/drawingml/2006/main" noGrp="1"/>
+          </p:cNvSpPr>
+          <p:nvPr/>
+        </p:nvSpPr>
+        <p:spPr>
+          <a:xfrm xmlns:a="http://schemas.openxmlformats.org/drawingml/2006/main">
+            <a:off x="609600" y="6305550"/>
+            <a:ext cx="5715000" cy="285750"/>
+          </a:xfrm>
+          <a:prstGeom xmlns:a="http://schemas.openxmlformats.org/drawingml/2006/main" prst="rect">
+            <a:avLst/>
+          </a:prstGeom>
+          <a:noFill xmlns:a="http://schemas.openxmlformats.org/drawingml/2006/main"/>
+          <a:ln xmlns:a="http://schemas.openxmlformats.org/drawingml/2006/main" w="0">
+            <a:noFill/>
+          </a:ln>
+        </p:spPr>
+        <p:txBody>
+          <a:bodyPr xmlns:a="http://schemas.openxmlformats.org/drawingml/2006/main">
+            <a:noAutofit/>
+          </a:bodyPr>
+          <a:lstStyle xmlns:a="http://schemas.openxmlformats.org/drawingml/2006/main"/>
+          <a:p xmlns:a="http://schemas.openxmlformats.org/drawingml/2006/main">
+            <a:pPr>
+              <a:defRPr sz="1125" b="0">
+                <a:solidFill>
+                  <a:srgbClr val="B7C1CB"/>
+                </a:solidFill>
+                <a:latin typeface="Consolas"/>
+                <a:ea typeface="Consolas"/>
+                <a:cs typeface="Consolas"/>
+              </a:defRPr>
+            </a:pPr>
+            <a:r>
+              <a:rPr sz="1125" b="0">
+                <a:solidFill>
+                  <a:srgbClr val="B7C1CB"/>
+                </a:solidFill>
+                <a:latin typeface="Consolas"/>
+                <a:ea typeface="Consolas"/>
+                <a:cs typeface="Consolas"/>
+              </a:rPr>
+              <a:t>SLAYVT  /  VIRGINIA TECH</a:t>
+            </a:r>
+          </a:p>
+        </p:txBody>
+      </p:sp>
+      <p:sp>
+        <p:nvSpPr>
+          <p:cNvPr id="16" name="">
+            <a:extLst xmlns:a="http://schemas.openxmlformats.org/drawingml/2006/main">
+              <a:ext uri="{FF2B5EF4-FFF2-40B4-BE49-F238E27FC236}">
+                <a16:creationId xmlns:a16="http://schemas.microsoft.com/office/drawing/2014/main" id="{A350670C-D9DE-494C-BE90-F9DA2D1B2DA0}"/>
+              </a:ext>
+            </a:extLst>
+          </p:cNvPr>
+          <p:cNvSpPr>
+            <a:spLocks xmlns:a="http://schemas.openxmlformats.org/drawingml/2006/main" noGrp="1"/>
+          </p:cNvSpPr>
+          <p:nvPr/>
+        </p:nvSpPr>
+        <p:spPr>
+          <a:xfrm xmlns:a="http://schemas.openxmlformats.org/drawingml/2006/main">
+            <a:off x="10610850" y="6305550"/>
+            <a:ext cx="1095375" cy="276225"/>
           </a:xfrm>
           <a:prstGeom xmlns:a="http://schemas.openxmlformats.org/drawingml/2006/main" prst="rect">
             <a:avLst/>
@@ -1774,194 +2056,23 @@
             <a:pPr>
               <a:defRPr sz="1200" b="0">
                 <a:solidFill>
-                  <a:srgbClr val="555555"/>
-                </a:solidFill>
-                <a:latin typeface="Arial"/>
-                <a:ea typeface="Arial"/>
-                <a:cs typeface="Arial"/>
+                  <a:srgbClr val="B7C1CB"/>
+                </a:solidFill>
+                <a:latin typeface="Consolas"/>
+                <a:ea typeface="Consolas"/>
+                <a:cs typeface="Consolas"/>
               </a:defRPr>
             </a:pPr>
             <a:r>
               <a:rPr sz="1200" b="0">
                 <a:solidFill>
-                  <a:srgbClr val="555555"/>
-                </a:solidFill>
-                <a:latin typeface="Arial"/>
-                <a:ea typeface="Arial"/>
-                <a:cs typeface="Arial"/>
-              </a:rPr>
-              <a:t>01</a:t>
-            </a:r>
-          </a:p>
-        </p:txBody>
-      </p:sp>
-      <p:sp>
-        <p:nvSpPr>
-          <p:cNvPr id="4" name="">
-            <a:extLst xmlns:a="http://schemas.openxmlformats.org/drawingml/2006/main">
-              <a:ext uri="{FF2B5EF4-FFF2-40B4-BE49-F238E27FC236}">
-                <a16:creationId xmlns:a16="http://schemas.microsoft.com/office/drawing/2014/main" id="{006BDE25-8E25-40BF-8FCB-52E92073D047}"/>
-              </a:ext>
-            </a:extLst>
-          </p:cNvPr>
-          <p:cNvSpPr>
-            <a:spLocks xmlns:a="http://schemas.openxmlformats.org/drawingml/2006/main" noGrp="1"/>
-          </p:cNvSpPr>
-          <p:nvPr/>
-        </p:nvSpPr>
-        <p:spPr>
-          <a:xfrm xmlns:a="http://schemas.openxmlformats.org/drawingml/2006/main">
-            <a:off x="695325" y="2095500"/>
-            <a:ext cx="10287000" cy="762000"/>
-          </a:xfrm>
-          <a:prstGeom xmlns:a="http://schemas.openxmlformats.org/drawingml/2006/main" prst="rect">
-            <a:avLst/>
-          </a:prstGeom>
-          <a:noFill xmlns:a="http://schemas.openxmlformats.org/drawingml/2006/main"/>
-          <a:ln xmlns:a="http://schemas.openxmlformats.org/drawingml/2006/main" w="0">
-            <a:noFill/>
-          </a:ln>
-        </p:spPr>
-        <p:txBody>
-          <a:bodyPr xmlns:a="http://schemas.openxmlformats.org/drawingml/2006/main">
-            <a:noAutofit/>
-          </a:bodyPr>
-          <a:lstStyle xmlns:a="http://schemas.openxmlformats.org/drawingml/2006/main"/>
-          <a:p xmlns:a="http://schemas.openxmlformats.org/drawingml/2006/main">
-            <a:pPr>
-              <a:defRPr sz="2550" b="0">
-                <a:solidFill>
-                  <a:srgbClr val="151515"/>
-                </a:solidFill>
-                <a:latin typeface="Arial"/>
-                <a:ea typeface="Arial"/>
-                <a:cs typeface="Arial"/>
-              </a:defRPr>
-            </a:pPr>
-            <a:r>
-              <a:rPr sz="2550" b="0">
-                <a:solidFill>
-                  <a:srgbClr val="151515"/>
-                </a:solidFill>
-                <a:latin typeface="Arial"/>
-                <a:ea typeface="Arial"/>
-                <a:cs typeface="Arial"/>
-              </a:rPr>
-              <a:t>A VT-themed deck-building strategy game</a:t>
-            </a:r>
-          </a:p>
-        </p:txBody>
-      </p:sp>
-      <p:sp>
-        <p:nvSpPr>
-          <p:cNvPr id="5" name="">
-            <a:extLst xmlns:a="http://schemas.openxmlformats.org/drawingml/2006/main">
-              <a:ext uri="{FF2B5EF4-FFF2-40B4-BE49-F238E27FC236}">
-                <a16:creationId xmlns:a16="http://schemas.microsoft.com/office/drawing/2014/main" id="{6E2BD981-393A-49AD-87E5-9E2F222B66F9}"/>
-              </a:ext>
-            </a:extLst>
-          </p:cNvPr>
-          <p:cNvSpPr>
-            <a:spLocks xmlns:a="http://schemas.openxmlformats.org/drawingml/2006/main" noGrp="1"/>
-          </p:cNvSpPr>
-          <p:nvPr/>
-        </p:nvSpPr>
-        <p:spPr>
-          <a:xfrm xmlns:a="http://schemas.openxmlformats.org/drawingml/2006/main">
-            <a:off x="695325" y="3048000"/>
-            <a:ext cx="10287000" cy="552450"/>
-          </a:xfrm>
-          <a:prstGeom xmlns:a="http://schemas.openxmlformats.org/drawingml/2006/main" prst="rect">
-            <a:avLst/>
-          </a:prstGeom>
-          <a:noFill xmlns:a="http://schemas.openxmlformats.org/drawingml/2006/main"/>
-          <a:ln xmlns:a="http://schemas.openxmlformats.org/drawingml/2006/main" w="0">
-            <a:noFill/>
-          </a:ln>
-        </p:spPr>
-        <p:txBody>
-          <a:bodyPr xmlns:a="http://schemas.openxmlformats.org/drawingml/2006/main">
-            <a:noAutofit/>
-          </a:bodyPr>
-          <a:lstStyle xmlns:a="http://schemas.openxmlformats.org/drawingml/2006/main"/>
-          <a:p xmlns:a="http://schemas.openxmlformats.org/drawingml/2006/main">
-            <a:pPr>
-              <a:defRPr sz="2025" b="0">
-                <a:solidFill>
-                  <a:srgbClr val="555555"/>
-                </a:solidFill>
-                <a:latin typeface="Arial"/>
-                <a:ea typeface="Arial"/>
-                <a:cs typeface="Arial"/>
-              </a:defRPr>
-            </a:pPr>
-            <a:r>
-              <a:rPr sz="2025" b="0">
-                <a:solidFill>
-                  <a:srgbClr val="555555"/>
-                </a:solidFill>
-                <a:latin typeface="Arial"/>
-                <a:ea typeface="Arial"/>
-                <a:cs typeface="Arial"/>
-              </a:rPr>
-              <a:t>Team presentation · 10-minute live demo</a:t>
-            </a:r>
-          </a:p>
-        </p:txBody>
-      </p:sp>
-      <p:sp>
-        <p:nvSpPr>
-          <p:cNvPr id="6" name="">
-            <a:extLst xmlns:a="http://schemas.openxmlformats.org/drawingml/2006/main">
-              <a:ext uri="{FF2B5EF4-FFF2-40B4-BE49-F238E27FC236}">
-                <a16:creationId xmlns:a16="http://schemas.microsoft.com/office/drawing/2014/main" id="{D54CF774-863E-4492-B5F7-9AABE7BDDF6A}"/>
-              </a:ext>
-            </a:extLst>
-          </p:cNvPr>
-          <p:cNvSpPr>
-            <a:spLocks xmlns:a="http://schemas.openxmlformats.org/drawingml/2006/main" noGrp="1"/>
-          </p:cNvSpPr>
-          <p:nvPr/>
-        </p:nvSpPr>
-        <p:spPr>
-          <a:xfrm xmlns:a="http://schemas.openxmlformats.org/drawingml/2006/main">
-            <a:off x="695325" y="5162550"/>
-            <a:ext cx="10287000" cy="419100"/>
-          </a:xfrm>
-          <a:prstGeom xmlns:a="http://schemas.openxmlformats.org/drawingml/2006/main" prst="rect">
-            <a:avLst/>
-          </a:prstGeom>
-          <a:noFill xmlns:a="http://schemas.openxmlformats.org/drawingml/2006/main"/>
-          <a:ln xmlns:a="http://schemas.openxmlformats.org/drawingml/2006/main" w="0">
-            <a:noFill/>
-          </a:ln>
-        </p:spPr>
-        <p:txBody>
-          <a:bodyPr xmlns:a="http://schemas.openxmlformats.org/drawingml/2006/main">
-            <a:noAutofit/>
-          </a:bodyPr>
-          <a:lstStyle xmlns:a="http://schemas.openxmlformats.org/drawingml/2006/main"/>
-          <a:p xmlns:a="http://schemas.openxmlformats.org/drawingml/2006/main">
-            <a:pPr>
-              <a:defRPr sz="1800" b="0">
-                <a:solidFill>
-                  <a:srgbClr val="151515"/>
-                </a:solidFill>
-                <a:latin typeface="Arial"/>
-                <a:ea typeface="Arial"/>
-                <a:cs typeface="Arial"/>
-              </a:defRPr>
-            </a:pPr>
-            <a:r>
-              <a:rPr sz="1800" b="0">
-                <a:solidFill>
-                  <a:srgbClr val="151515"/>
-                </a:solidFill>
-                <a:latin typeface="Arial"/>
-                <a:ea typeface="Arial"/>
-                <a:cs typeface="Arial"/>
-              </a:rPr>
-              <a:t>github.com/ultra-dog/SlayVT</a:t>
+                  <a:srgbClr val="B7C1CB"/>
+                </a:solidFill>
+                <a:latin typeface="Consolas"/>
+                <a:ea typeface="Consolas"/>
+                <a:cs typeface="Consolas"/>
+              </a:rPr>
+              <a:t>01 / 09</a:t>
             </a:r>
           </a:p>
         </p:txBody>
@@ -2011,43 +2122,44 @@
         </p:nvSpPr>
         <p:spPr>
           <a:xfrm xmlns:a="http://schemas.openxmlformats.org/drawingml/2006/main">
-            <a:off x="666750" y="266700"/>
-            <a:ext cx="10668000" cy="304800"/>
-          </a:xfrm>
-          <a:prstGeom xmlns:a="http://schemas.openxmlformats.org/drawingml/2006/main" prst="rect">
-            <a:avLst/>
-          </a:prstGeom>
-          <a:noFill xmlns:a="http://schemas.openxmlformats.org/drawingml/2006/main"/>
-          <a:ln xmlns:a="http://schemas.openxmlformats.org/drawingml/2006/main" w="0">
-            <a:noFill/>
-          </a:ln>
-        </p:spPr>
-        <p:txBody>
-          <a:bodyPr xmlns:a="http://schemas.openxmlformats.org/drawingml/2006/main">
-            <a:noAutofit/>
-          </a:bodyPr>
-          <a:lstStyle xmlns:a="http://schemas.openxmlformats.org/drawingml/2006/main"/>
-          <a:p xmlns:a="http://schemas.openxmlformats.org/drawingml/2006/main">
-            <a:pPr>
+            <a:off x="609600" y="304800"/>
+            <a:ext cx="10096500" cy="285750"/>
+          </a:xfrm>
+          <a:prstGeom xmlns:a="http://schemas.openxmlformats.org/drawingml/2006/main" prst="rect">
+            <a:avLst/>
+          </a:prstGeom>
+          <a:noFill xmlns:a="http://schemas.openxmlformats.org/drawingml/2006/main"/>
+          <a:ln xmlns:a="http://schemas.openxmlformats.org/drawingml/2006/main" w="0">
+            <a:noFill/>
+          </a:ln>
+        </p:spPr>
+        <p:txBody>
+          <a:bodyPr xmlns:a="http://schemas.openxmlformats.org/drawingml/2006/main">
+            <a:noAutofit/>
+          </a:bodyPr>
+          <a:lstStyle xmlns:a="http://schemas.openxmlformats.org/drawingml/2006/main"/>
+          <a:p xmlns:a="http://schemas.openxmlformats.org/drawingml/2006/main">
+            <a:pPr>
+              <a:buNone/>
               <a:defRPr sz="1275" b="1">
                 <a:solidFill>
-                  <a:srgbClr val="555555"/>
-                </a:solidFill>
-                <a:latin typeface="Arial"/>
-                <a:ea typeface="Arial"/>
-                <a:cs typeface="Arial"/>
+                  <a:srgbClr val="C64600"/>
+                </a:solidFill>
+                <a:latin typeface="Consolas"/>
+                <a:ea typeface="Consolas"/>
+                <a:cs typeface="Consolas"/>
               </a:defRPr>
             </a:pPr>
             <a:r>
               <a:rPr sz="1275" b="1">
                 <a:solidFill>
-                  <a:srgbClr val="555555"/>
-                </a:solidFill>
-                <a:latin typeface="Arial"/>
-                <a:ea typeface="Arial"/>
-                <a:cs typeface="Arial"/>
-              </a:rPr>
-              <a:t>1 · MVP</a:t>
+                  <a:srgbClr val="C64600"/>
+                </a:solidFill>
+                <a:latin typeface="Consolas"/>
+                <a:ea typeface="Consolas"/>
+                <a:cs typeface="Consolas"/>
+              </a:rPr>
+              <a:t>01  /  MVP</a:t>
             </a:r>
           </a:p>
         </p:txBody>
@@ -2068,37 +2180,38 @@
         </p:nvSpPr>
         <p:spPr>
           <a:xfrm xmlns:a="http://schemas.openxmlformats.org/drawingml/2006/main">
-            <a:off x="666750" y="685800"/>
-            <a:ext cx="10763250" cy="714375"/>
-          </a:xfrm>
-          <a:prstGeom xmlns:a="http://schemas.openxmlformats.org/drawingml/2006/main" prst="rect">
-            <a:avLst/>
-          </a:prstGeom>
-          <a:noFill xmlns:a="http://schemas.openxmlformats.org/drawingml/2006/main"/>
-          <a:ln xmlns:a="http://schemas.openxmlformats.org/drawingml/2006/main" w="0">
-            <a:noFill/>
-          </a:ln>
-        </p:spPr>
-        <p:txBody>
-          <a:bodyPr xmlns:a="http://schemas.openxmlformats.org/drawingml/2006/main">
-            <a:noAutofit/>
-          </a:bodyPr>
-          <a:lstStyle xmlns:a="http://schemas.openxmlformats.org/drawingml/2006/main"/>
-          <a:p xmlns:a="http://schemas.openxmlformats.org/drawingml/2006/main">
-            <a:pPr>
-              <a:defRPr sz="3150" b="1">
-                <a:solidFill>
-                  <a:srgbClr val="151515"/>
-                </a:solidFill>
-                <a:latin typeface="Arial"/>
-                <a:ea typeface="Arial"/>
-                <a:cs typeface="Arial"/>
-              </a:defRPr>
-            </a:pPr>
-            <a:r>
-              <a:rPr sz="3150" b="1">
-                <a:solidFill>
-                  <a:srgbClr val="151515"/>
+            <a:off x="609600" y="781050"/>
+            <a:ext cx="10906125" cy="809625"/>
+          </a:xfrm>
+          <a:prstGeom xmlns:a="http://schemas.openxmlformats.org/drawingml/2006/main" prst="rect">
+            <a:avLst/>
+          </a:prstGeom>
+          <a:noFill xmlns:a="http://schemas.openxmlformats.org/drawingml/2006/main"/>
+          <a:ln xmlns:a="http://schemas.openxmlformats.org/drawingml/2006/main" w="0">
+            <a:noFill/>
+          </a:ln>
+        </p:spPr>
+        <p:txBody>
+          <a:bodyPr xmlns:a="http://schemas.openxmlformats.org/drawingml/2006/main">
+            <a:noAutofit/>
+          </a:bodyPr>
+          <a:lstStyle xmlns:a="http://schemas.openxmlformats.org/drawingml/2006/main"/>
+          <a:p xmlns:a="http://schemas.openxmlformats.org/drawingml/2006/main">
+            <a:pPr>
+              <a:buNone/>
+              <a:defRPr sz="3450" b="1">
+                <a:solidFill>
+                  <a:srgbClr val="17212B"/>
+                </a:solidFill>
+                <a:latin typeface="Arial"/>
+                <a:ea typeface="Arial"/>
+                <a:cs typeface="Arial"/>
+              </a:defRPr>
+            </a:pPr>
+            <a:r>
+              <a:rPr sz="3450" b="1">
+                <a:solidFill>
+                  <a:srgbClr val="17212B"/>
                 </a:solidFill>
                 <a:latin typeface="Arial"/>
                 <a:ea typeface="Arial"/>
@@ -2125,98 +2238,156 @@
         </p:nvSpPr>
         <p:spPr>
           <a:xfrm xmlns:a="http://schemas.openxmlformats.org/drawingml/2006/main">
-            <a:off x="11049000" y="6343650"/>
-            <a:ext cx="476250" cy="238125"/>
-          </a:xfrm>
-          <a:prstGeom xmlns:a="http://schemas.openxmlformats.org/drawingml/2006/main" prst="rect">
-            <a:avLst/>
-          </a:prstGeom>
-          <a:noFill xmlns:a="http://schemas.openxmlformats.org/drawingml/2006/main"/>
-          <a:ln xmlns:a="http://schemas.openxmlformats.org/drawingml/2006/main" w="0">
-            <a:noFill/>
-          </a:ln>
-        </p:spPr>
-        <p:txBody>
-          <a:bodyPr xmlns:a="http://schemas.openxmlformats.org/drawingml/2006/main">
-            <a:noAutofit/>
-          </a:bodyPr>
-          <a:lstStyle xmlns:a="http://schemas.openxmlformats.org/drawingml/2006/main"/>
-          <a:p xmlns:a="http://schemas.openxmlformats.org/drawingml/2006/main">
-            <a:pPr>
+            <a:off x="10610850" y="6305550"/>
+            <a:ext cx="1095375" cy="276225"/>
+          </a:xfrm>
+          <a:prstGeom xmlns:a="http://schemas.openxmlformats.org/drawingml/2006/main" prst="rect">
+            <a:avLst/>
+          </a:prstGeom>
+          <a:noFill xmlns:a="http://schemas.openxmlformats.org/drawingml/2006/main"/>
+          <a:ln xmlns:a="http://schemas.openxmlformats.org/drawingml/2006/main" w="0">
+            <a:noFill/>
+          </a:ln>
+        </p:spPr>
+        <p:txBody>
+          <a:bodyPr xmlns:a="http://schemas.openxmlformats.org/drawingml/2006/main">
+            <a:noAutofit/>
+          </a:bodyPr>
+          <a:lstStyle xmlns:a="http://schemas.openxmlformats.org/drawingml/2006/main"/>
+          <a:p xmlns:a="http://schemas.openxmlformats.org/drawingml/2006/main">
+            <a:pPr>
+              <a:buNone/>
               <a:defRPr sz="1200" b="0">
                 <a:solidFill>
-                  <a:srgbClr val="555555"/>
-                </a:solidFill>
-                <a:latin typeface="Arial"/>
-                <a:ea typeface="Arial"/>
-                <a:cs typeface="Arial"/>
+                  <a:srgbClr val="59616B"/>
+                </a:solidFill>
+                <a:latin typeface="Consolas"/>
+                <a:ea typeface="Consolas"/>
+                <a:cs typeface="Consolas"/>
               </a:defRPr>
             </a:pPr>
             <a:r>
               <a:rPr sz="1200" b="0">
                 <a:solidFill>
-                  <a:srgbClr val="555555"/>
-                </a:solidFill>
-                <a:latin typeface="Arial"/>
-                <a:ea typeface="Arial"/>
-                <a:cs typeface="Arial"/>
-              </a:rPr>
-              <a:t>02</a:t>
-            </a:r>
-          </a:p>
-        </p:txBody>
-      </p:sp>
-      <p:sp>
-        <p:nvSpPr>
-          <p:cNvPr id="4" name="">
-            <a:extLst xmlns:a="http://schemas.openxmlformats.org/drawingml/2006/main">
-              <a:ext uri="{FF2B5EF4-FFF2-40B4-BE49-F238E27FC236}">
-                <a16:creationId xmlns:a16="http://schemas.microsoft.com/office/drawing/2014/main" id="{74AD29C8-0F8C-424B-8B35-1069EA6EA90B}"/>
-              </a:ext>
-            </a:extLst>
-          </p:cNvPr>
-          <p:cNvSpPr>
-            <a:spLocks xmlns:a="http://schemas.openxmlformats.org/drawingml/2006/main" noGrp="1"/>
-          </p:cNvSpPr>
-          <p:nvPr/>
-        </p:nvSpPr>
-        <p:spPr>
-          <a:xfrm xmlns:a="http://schemas.openxmlformats.org/drawingml/2006/main">
-            <a:off x="857250" y="1609725"/>
-            <a:ext cx="10477500" cy="4286250"/>
-          </a:xfrm>
-          <a:prstGeom xmlns:a="http://schemas.openxmlformats.org/drawingml/2006/main" prst="rect">
-            <a:avLst/>
-          </a:prstGeom>
-          <a:noFill xmlns:a="http://schemas.openxmlformats.org/drawingml/2006/main"/>
-          <a:ln xmlns:a="http://schemas.openxmlformats.org/drawingml/2006/main" w="0">
-            <a:noFill/>
-          </a:ln>
-        </p:spPr>
-        <p:txBody>
-          <a:bodyPr xmlns:a="http://schemas.openxmlformats.org/drawingml/2006/main">
-            <a:noAutofit/>
-          </a:bodyPr>
-          <a:lstStyle xmlns:a="http://schemas.openxmlformats.org/drawingml/2006/main"/>
-          <a:p xmlns:a="http://schemas.openxmlformats.org/drawingml/2006/main">
-            <a:pPr marL="292100" indent="-127000">
+                  <a:srgbClr val="59616B"/>
+                </a:solidFill>
+                <a:latin typeface="Consolas"/>
+                <a:ea typeface="Consolas"/>
+                <a:cs typeface="Consolas"/>
+              </a:rPr>
+              <a:t>02 / 09</a:t>
+            </a:r>
+          </a:p>
+        </p:txBody>
+      </p:sp>
+      <p:sp>
+        <p:nvSpPr>
+          <p:cNvPr id="6" name="">
+            <a:extLst xmlns:a="http://schemas.openxmlformats.org/drawingml/2006/main">
+              <a:ext uri="{FF2B5EF4-FFF2-40B4-BE49-F238E27FC236}">
+                <a16:creationId xmlns:a16="http://schemas.microsoft.com/office/drawing/2014/main" id="{916F513D-C403-4C09-8FB7-BB922886E5A6}"/>
+              </a:ext>
+            </a:extLst>
+          </p:cNvPr>
+          <p:cNvSpPr>
+            <a:spLocks xmlns:a="http://schemas.openxmlformats.org/drawingml/2006/main" noGrp="1"/>
+          </p:cNvSpPr>
+          <p:nvPr/>
+        </p:nvSpPr>
+        <p:spPr>
+          <a:xfrm xmlns:a="http://schemas.openxmlformats.org/drawingml/2006/main">
+            <a:off x="609600" y="6305550"/>
+            <a:ext cx="5715000" cy="285750"/>
+          </a:xfrm>
+          <a:prstGeom xmlns:a="http://schemas.openxmlformats.org/drawingml/2006/main" prst="rect">
+            <a:avLst/>
+          </a:prstGeom>
+          <a:noFill xmlns:a="http://schemas.openxmlformats.org/drawingml/2006/main"/>
+          <a:ln xmlns:a="http://schemas.openxmlformats.org/drawingml/2006/main" w="0">
+            <a:noFill/>
+          </a:ln>
+        </p:spPr>
+        <p:txBody>
+          <a:bodyPr xmlns:a="http://schemas.openxmlformats.org/drawingml/2006/main">
+            <a:noAutofit/>
+          </a:bodyPr>
+          <a:lstStyle xmlns:a="http://schemas.openxmlformats.org/drawingml/2006/main"/>
+          <a:p xmlns:a="http://schemas.openxmlformats.org/drawingml/2006/main">
+            <a:pPr>
+              <a:defRPr sz="1125" b="0">
+                <a:solidFill>
+                  <a:srgbClr val="59616B"/>
+                </a:solidFill>
+                <a:latin typeface="Consolas"/>
+                <a:ea typeface="Consolas"/>
+                <a:cs typeface="Consolas"/>
+              </a:defRPr>
+            </a:pPr>
+            <a:r>
+              <a:rPr sz="1125" b="0">
+                <a:solidFill>
+                  <a:srgbClr val="59616B"/>
+                </a:solidFill>
+                <a:latin typeface="Consolas"/>
+                <a:ea typeface="Consolas"/>
+                <a:cs typeface="Consolas"/>
+              </a:rPr>
+              <a:t>SLAYVT  /  VIRGINIA TECH</a:t>
+            </a:r>
+          </a:p>
+        </p:txBody>
+      </p:sp>
+      <p:sp>
+        <p:nvSpPr>
+          <p:cNvPr id="7" name="">
+            <a:extLst xmlns:a="http://schemas.openxmlformats.org/drawingml/2006/main">
+              <a:ext uri="{FF2B5EF4-FFF2-40B4-BE49-F238E27FC236}">
+                <a16:creationId xmlns:a16="http://schemas.microsoft.com/office/drawing/2014/main" id="{24928DF3-1221-4C23-AF1C-B3811DE6179D}"/>
+              </a:ext>
+            </a:extLst>
+          </p:cNvPr>
+          <p:cNvSpPr>
+            <a:spLocks xmlns:a="http://schemas.openxmlformats.org/drawingml/2006/main" noGrp="1"/>
+          </p:cNvSpPr>
+          <p:nvPr/>
+        </p:nvSpPr>
+        <p:spPr>
+          <a:xfrm xmlns:a="http://schemas.openxmlformats.org/drawingml/2006/main">
+            <a:off x="647700" y="2028825"/>
+            <a:ext cx="6381750" cy="3457575"/>
+          </a:xfrm>
+          <a:prstGeom xmlns:a="http://schemas.openxmlformats.org/drawingml/2006/main" prst="rect">
+            <a:avLst/>
+          </a:prstGeom>
+          <a:noFill xmlns:a="http://schemas.openxmlformats.org/drawingml/2006/main"/>
+          <a:ln xmlns:a="http://schemas.openxmlformats.org/drawingml/2006/main" w="0">
+            <a:noFill/>
+          </a:ln>
+        </p:spPr>
+        <p:txBody>
+          <a:bodyPr xmlns:a="http://schemas.openxmlformats.org/drawingml/2006/main">
+            <a:noAutofit/>
+          </a:bodyPr>
+          <a:lstStyle xmlns:a="http://schemas.openxmlformats.org/drawingml/2006/main"/>
+          <a:p xmlns:a="http://schemas.openxmlformats.org/drawingml/2006/main">
+            <a:pPr marL="241300" indent="-114300">
               <a:spcAft>
-                <a:spcPts val="1900"/>
+                <a:spcPts val="1800"/>
               </a:spcAft>
               <a:buChar char="•"/>
-              <a:defRPr sz="2025" b="0">
-                <a:solidFill>
-                  <a:srgbClr val="151515"/>
-                </a:solidFill>
-                <a:latin typeface="Arial"/>
-                <a:ea typeface="Arial"/>
-                <a:cs typeface="Arial"/>
-              </a:defRPr>
-            </a:pPr>
-            <a:r>
-              <a:rPr sz="2025" b="0">
-                <a:solidFill>
-                  <a:srgbClr val="151515"/>
+              <a:defRPr sz="2100" b="0">
+                <a:solidFill>
+                  <a:srgbClr val="17212B"/>
+                </a:solidFill>
+                <a:latin typeface="Arial"/>
+                <a:ea typeface="Arial"/>
+                <a:cs typeface="Arial"/>
+              </a:defRPr>
+            </a:pPr>
+            <a:r>
+              <a:rPr sz="2100" b="0">
+                <a:solidFill>
+                  <a:srgbClr val="17212B"/>
                 </a:solidFill>
                 <a:latin typeface="Arial"/>
                 <a:ea typeface="Arial"/>
@@ -2226,111 +2397,335 @@
             </a:r>
           </a:p>
           <a:p xmlns:a="http://schemas.openxmlformats.org/drawingml/2006/main">
-            <a:pPr marL="292100" indent="-127000">
+            <a:pPr marL="241300" indent="-114300">
               <a:spcAft>
-                <a:spcPts val="1900"/>
+                <a:spcPts val="1800"/>
               </a:spcAft>
               <a:buChar char="•"/>
-              <a:defRPr sz="2025" b="0">
-                <a:solidFill>
-                  <a:srgbClr val="151515"/>
-                </a:solidFill>
-                <a:latin typeface="Arial"/>
-                <a:ea typeface="Arial"/>
-                <a:cs typeface="Arial"/>
-              </a:defRPr>
-            </a:pPr>
-            <a:r>
-              <a:rPr sz="2025" b="0">
-                <a:solidFill>
-                  <a:srgbClr val="151515"/>
-                </a:solidFill>
-                <a:latin typeface="Arial"/>
-                <a:ea typeface="Arial"/>
-                <a:cs typeface="Arial"/>
-              </a:rPr>
-              <a:t>Spend limited Energy while reading enemy intent</a:t>
-            </a:r>
-          </a:p>
-          <a:p xmlns:a="http://schemas.openxmlformats.org/drawingml/2006/main">
-            <a:pPr marL="292100" indent="-127000">
+              <a:defRPr sz="2100" b="0">
+                <a:solidFill>
+                  <a:srgbClr val="17212B"/>
+                </a:solidFill>
+                <a:latin typeface="Arial"/>
+                <a:ea typeface="Arial"/>
+                <a:cs typeface="Arial"/>
+              </a:defRPr>
+            </a:pPr>
+            <a:r>
+              <a:rPr sz="2100" b="0">
+                <a:solidFill>
+                  <a:srgbClr val="17212B"/>
+                </a:solidFill>
+                <a:latin typeface="Arial"/>
+                <a:ea typeface="Arial"/>
+                <a:cs typeface="Arial"/>
+              </a:rPr>
+              <a:t>Read enemy intent and spend limited Energy</a:t>
+            </a:r>
+          </a:p>
+          <a:p xmlns:a="http://schemas.openxmlformats.org/drawingml/2006/main">
+            <a:pPr marL="241300" indent="-114300">
               <a:spcAft>
-                <a:spcPts val="1900"/>
+                <a:spcPts val="1800"/>
               </a:spcAft>
               <a:buChar char="•"/>
-              <a:defRPr sz="2025" b="0">
-                <a:solidFill>
-                  <a:srgbClr val="151515"/>
-                </a:solidFill>
-                <a:latin typeface="Arial"/>
-                <a:ea typeface="Arial"/>
-                <a:cs typeface="Arial"/>
-              </a:defRPr>
-            </a:pPr>
-            <a:r>
-              <a:rPr sz="2025" b="0">
-                <a:solidFill>
-                  <a:srgbClr val="151515"/>
-                </a:solidFill>
-                <a:latin typeface="Arial"/>
-                <a:ea typeface="Arial"/>
-                <a:cs typeface="Arial"/>
-              </a:rPr>
-              <a:t>Use Heat, Cold, and temperature reversal in combat</a:t>
-            </a:r>
-          </a:p>
-          <a:p xmlns:a="http://schemas.openxmlformats.org/drawingml/2006/main">
-            <a:pPr marL="292100" indent="-127000">
+              <a:defRPr sz="2100" b="0">
+                <a:solidFill>
+                  <a:srgbClr val="17212B"/>
+                </a:solidFill>
+                <a:latin typeface="Arial"/>
+                <a:ea typeface="Arial"/>
+                <a:cs typeface="Arial"/>
+              </a:defRPr>
+            </a:pPr>
+            <a:r>
+              <a:rPr sz="2100" b="0">
+                <a:solidFill>
+                  <a:srgbClr val="17212B"/>
+                </a:solidFill>
+                <a:latin typeface="Arial"/>
+                <a:ea typeface="Arial"/>
+                <a:cs typeface="Arial"/>
+              </a:rPr>
+              <a:t>Choose events, shops, and Rest Sites</a:t>
+            </a:r>
+          </a:p>
+          <a:p xmlns:a="http://schemas.openxmlformats.org/drawingml/2006/main">
+            <a:pPr marL="241300" indent="-114300">
               <a:spcAft>
-                <a:spcPts val="1900"/>
+                <a:spcPts val="1800"/>
               </a:spcAft>
               <a:buChar char="•"/>
-              <a:defRPr sz="2025" b="0">
-                <a:solidFill>
-                  <a:srgbClr val="151515"/>
-                </a:solidFill>
-                <a:latin typeface="Arial"/>
-                <a:ea typeface="Arial"/>
-                <a:cs typeface="Arial"/>
-              </a:defRPr>
-            </a:pPr>
-            <a:r>
-              <a:rPr sz="2025" b="0">
-                <a:solidFill>
-                  <a:srgbClr val="151515"/>
-                </a:solidFill>
-                <a:latin typeface="Arial"/>
-                <a:ea typeface="Arial"/>
-                <a:cs typeface="Arial"/>
-              </a:rPr>
-              <a:t>Choose events, shop purchases, and Rest Site upgrades</a:t>
-            </a:r>
-          </a:p>
-          <a:p xmlns:a="http://schemas.openxmlformats.org/drawingml/2006/main">
-            <a:pPr marL="292100" indent="-127000">
-              <a:spcAft>
-                <a:spcPts val="1900"/>
-              </a:spcAft>
-              <a:buChar char="•"/>
-              <a:defRPr sz="2025" b="0">
-                <a:solidFill>
-                  <a:srgbClr val="151515"/>
-                </a:solidFill>
-                <a:latin typeface="Arial"/>
-                <a:ea typeface="Arial"/>
-                <a:cs typeface="Arial"/>
-              </a:defRPr>
-            </a:pPr>
-            <a:r>
-              <a:rPr sz="2025" b="0">
-                <a:solidFill>
-                  <a:srgbClr val="151515"/>
+              <a:defRPr sz="2100" b="0">
+                <a:solidFill>
+                  <a:srgbClr val="17212B"/>
+                </a:solidFill>
+                <a:latin typeface="Arial"/>
+                <a:ea typeface="Arial"/>
+                <a:cs typeface="Arial"/>
+              </a:defRPr>
+            </a:pPr>
+            <a:r>
+              <a:rPr sz="2100" b="0">
+                <a:solidFill>
+                  <a:srgbClr val="17212B"/>
                 </a:solidFill>
                 <a:latin typeface="Arial"/>
                 <a:ea typeface="Arial"/>
                 <a:cs typeface="Arial"/>
               </a:rPr>
               <a:t>Defeat the final boss to finish the run</a:t>
+            </a:r>
+          </a:p>
+        </p:txBody>
+      </p:sp>
+      <p:sp>
+        <p:nvSpPr>
+          <p:cNvPr id="8" name="">
+            <a:extLst xmlns:a="http://schemas.openxmlformats.org/drawingml/2006/main">
+              <a:ext uri="{FF2B5EF4-FFF2-40B4-BE49-F238E27FC236}">
+                <a16:creationId xmlns:a16="http://schemas.microsoft.com/office/drawing/2014/main" id="{BDDF7498-AEDE-4480-90F6-F133030CB6C8}"/>
+              </a:ext>
+            </a:extLst>
+          </p:cNvPr>
+          <p:cNvSpPr>
+            <a:spLocks xmlns:a="http://schemas.openxmlformats.org/drawingml/2006/main" noGrp="1"/>
+          </p:cNvSpPr>
+          <p:nvPr/>
+        </p:nvSpPr>
+        <p:spPr>
+          <a:xfrm xmlns:a="http://schemas.openxmlformats.org/drawingml/2006/main">
+            <a:off x="7848600" y="1952625"/>
+            <a:ext cx="3476625" cy="361950"/>
+          </a:xfrm>
+          <a:prstGeom xmlns:a="http://schemas.openxmlformats.org/drawingml/2006/main" prst="rect">
+            <a:avLst/>
+          </a:prstGeom>
+          <a:noFill xmlns:a="http://schemas.openxmlformats.org/drawingml/2006/main"/>
+          <a:ln xmlns:a="http://schemas.openxmlformats.org/drawingml/2006/main" w="0">
+            <a:noFill/>
+          </a:ln>
+        </p:spPr>
+        <p:txBody>
+          <a:bodyPr xmlns:a="http://schemas.openxmlformats.org/drawingml/2006/main">
+            <a:noAutofit/>
+          </a:bodyPr>
+          <a:lstStyle xmlns:a="http://schemas.openxmlformats.org/drawingml/2006/main"/>
+          <a:p xmlns:a="http://schemas.openxmlformats.org/drawingml/2006/main">
+            <a:pPr>
+              <a:defRPr sz="1350" b="1">
+                <a:solidFill>
+                  <a:srgbClr val="861F41"/>
+                </a:solidFill>
+                <a:latin typeface="Consolas"/>
+                <a:ea typeface="Consolas"/>
+                <a:cs typeface="Consolas"/>
+              </a:defRPr>
+            </a:pPr>
+            <a:r>
+              <a:rPr sz="1350" b="1">
+                <a:solidFill>
+                  <a:srgbClr val="861F41"/>
+                </a:solidFill>
+                <a:latin typeface="Consolas"/>
+                <a:ea typeface="Consolas"/>
+                <a:cs typeface="Consolas"/>
+              </a:rPr>
+              <a:t>THE METEOROLOGIST</a:t>
+            </a:r>
+          </a:p>
+        </p:txBody>
+      </p:sp>
+      <p:sp>
+        <p:nvSpPr>
+          <p:cNvPr id="9" name="">
+            <a:extLst xmlns:a="http://schemas.openxmlformats.org/drawingml/2006/main">
+              <a:ext uri="{FF2B5EF4-FFF2-40B4-BE49-F238E27FC236}">
+                <a16:creationId xmlns:a16="http://schemas.microsoft.com/office/drawing/2014/main" id="{CC78297C-8224-4415-88EA-559E07A49524}"/>
+              </a:ext>
+            </a:extLst>
+          </p:cNvPr>
+          <p:cNvSpPr>
+            <a:spLocks xmlns:a="http://schemas.openxmlformats.org/drawingml/2006/main" noGrp="1"/>
+          </p:cNvSpPr>
+          <p:nvPr/>
+        </p:nvSpPr>
+        <p:spPr>
+          <a:xfrm xmlns:a="http://schemas.openxmlformats.org/drawingml/2006/main">
+            <a:off x="7839075" y="2590800"/>
+            <a:ext cx="3429000" cy="628650"/>
+          </a:xfrm>
+          <a:prstGeom xmlns:a="http://schemas.openxmlformats.org/drawingml/2006/main" prst="rect">
+            <a:avLst/>
+          </a:prstGeom>
+          <a:noFill xmlns:a="http://schemas.openxmlformats.org/drawingml/2006/main"/>
+          <a:ln xmlns:a="http://schemas.openxmlformats.org/drawingml/2006/main" w="0">
+            <a:noFill/>
+          </a:ln>
+        </p:spPr>
+        <p:txBody>
+          <a:bodyPr xmlns:a="http://schemas.openxmlformats.org/drawingml/2006/main">
+            <a:noAutofit/>
+          </a:bodyPr>
+          <a:lstStyle xmlns:a="http://schemas.openxmlformats.org/drawingml/2006/main"/>
+          <a:p xmlns:a="http://schemas.openxmlformats.org/drawingml/2006/main">
+            <a:pPr>
+              <a:defRPr sz="3225" b="1">
+                <a:solidFill>
+                  <a:srgbClr val="C64600"/>
+                </a:solidFill>
+                <a:latin typeface="Arial"/>
+                <a:ea typeface="Arial"/>
+                <a:cs typeface="Arial"/>
+              </a:defRPr>
+            </a:pPr>
+            <a:r>
+              <a:rPr sz="3225" b="1">
+                <a:solidFill>
+                  <a:srgbClr val="C64600"/>
+                </a:solidFill>
+                <a:latin typeface="Arial"/>
+                <a:ea typeface="Arial"/>
+                <a:cs typeface="Arial"/>
+              </a:rPr>
+              <a:t>HEAT +</a:t>
+            </a:r>
+          </a:p>
+        </p:txBody>
+      </p:sp>
+      <p:sp>
+        <p:nvSpPr>
+          <p:cNvPr id="10" name="">
+            <a:extLst xmlns:a="http://schemas.openxmlformats.org/drawingml/2006/main">
+              <a:ext uri="{FF2B5EF4-FFF2-40B4-BE49-F238E27FC236}">
+                <a16:creationId xmlns:a16="http://schemas.microsoft.com/office/drawing/2014/main" id="{1581806F-C271-4E9F-AD54-4D7035F00AC8}"/>
+              </a:ext>
+            </a:extLst>
+          </p:cNvPr>
+          <p:cNvSpPr>
+            <a:spLocks xmlns:a="http://schemas.openxmlformats.org/drawingml/2006/main" noGrp="1"/>
+          </p:cNvSpPr>
+          <p:nvPr/>
+        </p:nvSpPr>
+        <p:spPr>
+          <a:xfrm xmlns:a="http://schemas.openxmlformats.org/drawingml/2006/main">
+            <a:off x="7839075" y="3324225"/>
+            <a:ext cx="3429000" cy="628650"/>
+          </a:xfrm>
+          <a:prstGeom xmlns:a="http://schemas.openxmlformats.org/drawingml/2006/main" prst="rect">
+            <a:avLst/>
+          </a:prstGeom>
+          <a:noFill xmlns:a="http://schemas.openxmlformats.org/drawingml/2006/main"/>
+          <a:ln xmlns:a="http://schemas.openxmlformats.org/drawingml/2006/main" w="0">
+            <a:noFill/>
+          </a:ln>
+        </p:spPr>
+        <p:txBody>
+          <a:bodyPr xmlns:a="http://schemas.openxmlformats.org/drawingml/2006/main">
+            <a:noAutofit/>
+          </a:bodyPr>
+          <a:lstStyle xmlns:a="http://schemas.openxmlformats.org/drawingml/2006/main"/>
+          <a:p xmlns:a="http://schemas.openxmlformats.org/drawingml/2006/main">
+            <a:pPr>
+              <a:defRPr sz="3225" b="1">
+                <a:solidFill>
+                  <a:srgbClr val="216C8C"/>
+                </a:solidFill>
+                <a:latin typeface="Arial"/>
+                <a:ea typeface="Arial"/>
+                <a:cs typeface="Arial"/>
+              </a:defRPr>
+            </a:pPr>
+            <a:r>
+              <a:rPr sz="3225" b="1">
+                <a:solidFill>
+                  <a:srgbClr val="216C8C"/>
+                </a:solidFill>
+                <a:latin typeface="Arial"/>
+                <a:ea typeface="Arial"/>
+                <a:cs typeface="Arial"/>
+              </a:rPr>
+              <a:t>COLD −</a:t>
+            </a:r>
+          </a:p>
+        </p:txBody>
+      </p:sp>
+      <p:sp>
+        <p:nvSpPr>
+          <p:cNvPr id="11" name="">
+            <a:extLst xmlns:a="http://schemas.openxmlformats.org/drawingml/2006/main">
+              <a:ext uri="{FF2B5EF4-FFF2-40B4-BE49-F238E27FC236}">
+                <a16:creationId xmlns:a16="http://schemas.microsoft.com/office/drawing/2014/main" id="{D9CB862A-001B-41BA-849B-718FAEEA8A45}"/>
+              </a:ext>
+            </a:extLst>
+          </p:cNvPr>
+          <p:cNvSpPr>
+            <a:spLocks xmlns:a="http://schemas.openxmlformats.org/drawingml/2006/main" noGrp="1"/>
+          </p:cNvSpPr>
+          <p:nvPr/>
+        </p:nvSpPr>
+        <p:spPr>
+          <a:xfrm xmlns:a="http://schemas.openxmlformats.org/drawingml/2006/main">
+            <a:off x="7858125" y="4352925"/>
+            <a:ext cx="3286125" cy="1123950"/>
+          </a:xfrm>
+          <a:prstGeom xmlns:a="http://schemas.openxmlformats.org/drawingml/2006/main" prst="rect">
+            <a:avLst/>
+          </a:prstGeom>
+          <a:noFill xmlns:a="http://schemas.openxmlformats.org/drawingml/2006/main"/>
+          <a:ln xmlns:a="http://schemas.openxmlformats.org/drawingml/2006/main" w="0">
+            <a:noFill/>
+          </a:ln>
+        </p:spPr>
+        <p:txBody>
+          <a:bodyPr xmlns:a="http://schemas.openxmlformats.org/drawingml/2006/main">
+            <a:noAutofit/>
+          </a:bodyPr>
+          <a:lstStyle xmlns:a="http://schemas.openxmlformats.org/drawingml/2006/main"/>
+          <a:p xmlns:a="http://schemas.openxmlformats.org/drawingml/2006/main">
+            <a:pPr>
+              <a:defRPr sz="2100" b="0">
+                <a:solidFill>
+                  <a:srgbClr val="17212B"/>
+                </a:solidFill>
+                <a:latin typeface="Arial"/>
+                <a:ea typeface="Arial"/>
+                <a:cs typeface="Arial"/>
+              </a:defRPr>
+            </a:pPr>
+            <a:r>
+              <a:rPr sz="2100" b="0">
+                <a:solidFill>
+                  <a:srgbClr val="17212B"/>
+                </a:solidFill>
+                <a:latin typeface="Arial"/>
+                <a:ea typeface="Arial"/>
+                <a:cs typeface="Arial"/>
+              </a:rPr>
+              <a:t>Reverse temperature</a:t>
+            </a:r>
+          </a:p>
+          <a:p xmlns:a="http://schemas.openxmlformats.org/drawingml/2006/main">
+            <a:pPr>
+              <a:defRPr sz="2100" b="0">
+                <a:solidFill>
+                  <a:srgbClr val="17212B"/>
+                </a:solidFill>
+                <a:latin typeface="Arial"/>
+                <a:ea typeface="Arial"/>
+                <a:cs typeface="Arial"/>
+              </a:defRPr>
+            </a:pPr>
+            <a:r>
+              <a:rPr sz="2100" b="0">
+                <a:solidFill>
+                  <a:srgbClr val="17212B"/>
+                </a:solidFill>
+                <a:latin typeface="Arial"/>
+                <a:ea typeface="Arial"/>
+                <a:cs typeface="Arial"/>
+              </a:rPr>
+              <a:t>for bonus damage</a:t>
             </a:r>
           </a:p>
         </p:txBody>
@@ -2380,43 +2775,44 @@
         </p:nvSpPr>
         <p:spPr>
           <a:xfrm xmlns:a="http://schemas.openxmlformats.org/drawingml/2006/main">
-            <a:off x="666750" y="266700"/>
-            <a:ext cx="10668000" cy="304800"/>
-          </a:xfrm>
-          <a:prstGeom xmlns:a="http://schemas.openxmlformats.org/drawingml/2006/main" prst="rect">
-            <a:avLst/>
-          </a:prstGeom>
-          <a:noFill xmlns:a="http://schemas.openxmlformats.org/drawingml/2006/main"/>
-          <a:ln xmlns:a="http://schemas.openxmlformats.org/drawingml/2006/main" w="0">
-            <a:noFill/>
-          </a:ln>
-        </p:spPr>
-        <p:txBody>
-          <a:bodyPr xmlns:a="http://schemas.openxmlformats.org/drawingml/2006/main">
-            <a:noAutofit/>
-          </a:bodyPr>
-          <a:lstStyle xmlns:a="http://schemas.openxmlformats.org/drawingml/2006/main"/>
-          <a:p xmlns:a="http://schemas.openxmlformats.org/drawingml/2006/main">
-            <a:pPr>
+            <a:off x="609600" y="304800"/>
+            <a:ext cx="10096500" cy="285750"/>
+          </a:xfrm>
+          <a:prstGeom xmlns:a="http://schemas.openxmlformats.org/drawingml/2006/main" prst="rect">
+            <a:avLst/>
+          </a:prstGeom>
+          <a:noFill xmlns:a="http://schemas.openxmlformats.org/drawingml/2006/main"/>
+          <a:ln xmlns:a="http://schemas.openxmlformats.org/drawingml/2006/main" w="0">
+            <a:noFill/>
+          </a:ln>
+        </p:spPr>
+        <p:txBody>
+          <a:bodyPr xmlns:a="http://schemas.openxmlformats.org/drawingml/2006/main">
+            <a:noAutofit/>
+          </a:bodyPr>
+          <a:lstStyle xmlns:a="http://schemas.openxmlformats.org/drawingml/2006/main"/>
+          <a:p xmlns:a="http://schemas.openxmlformats.org/drawingml/2006/main">
+            <a:pPr>
+              <a:buNone/>
               <a:defRPr sz="1275" b="1">
                 <a:solidFill>
-                  <a:srgbClr val="555555"/>
-                </a:solidFill>
-                <a:latin typeface="Arial"/>
-                <a:ea typeface="Arial"/>
-                <a:cs typeface="Arial"/>
+                  <a:srgbClr val="C64600"/>
+                </a:solidFill>
+                <a:latin typeface="Consolas"/>
+                <a:ea typeface="Consolas"/>
+                <a:cs typeface="Consolas"/>
               </a:defRPr>
             </a:pPr>
             <a:r>
               <a:rPr sz="1275" b="1">
                 <a:solidFill>
-                  <a:srgbClr val="555555"/>
-                </a:solidFill>
-                <a:latin typeface="Arial"/>
-                <a:ea typeface="Arial"/>
-                <a:cs typeface="Arial"/>
-              </a:rPr>
-              <a:t>1 · MVP</a:t>
+                  <a:srgbClr val="C64600"/>
+                </a:solidFill>
+                <a:latin typeface="Consolas"/>
+                <a:ea typeface="Consolas"/>
+                <a:cs typeface="Consolas"/>
+              </a:rPr>
+              <a:t>01  /  MVP</a:t>
             </a:r>
           </a:p>
         </p:txBody>
@@ -2437,43 +2833,68 @@
         </p:nvSpPr>
         <p:spPr>
           <a:xfrm xmlns:a="http://schemas.openxmlformats.org/drawingml/2006/main">
-            <a:off x="666750" y="685800"/>
-            <a:ext cx="10763250" cy="714375"/>
-          </a:xfrm>
-          <a:prstGeom xmlns:a="http://schemas.openxmlformats.org/drawingml/2006/main" prst="rect">
-            <a:avLst/>
-          </a:prstGeom>
-          <a:noFill xmlns:a="http://schemas.openxmlformats.org/drawingml/2006/main"/>
-          <a:ln xmlns:a="http://schemas.openxmlformats.org/drawingml/2006/main" w="0">
-            <a:noFill/>
-          </a:ln>
-        </p:spPr>
-        <p:txBody>
-          <a:bodyPr xmlns:a="http://schemas.openxmlformats.org/drawingml/2006/main">
-            <a:noAutofit/>
-          </a:bodyPr>
-          <a:lstStyle xmlns:a="http://schemas.openxmlformats.org/drawingml/2006/main"/>
-          <a:p xmlns:a="http://schemas.openxmlformats.org/drawingml/2006/main">
-            <a:pPr>
-              <a:defRPr sz="3150" b="1">
-                <a:solidFill>
-                  <a:srgbClr val="151515"/>
-                </a:solidFill>
-                <a:latin typeface="Arial"/>
-                <a:ea typeface="Arial"/>
-                <a:cs typeface="Arial"/>
-              </a:defRPr>
-            </a:pPr>
-            <a:r>
-              <a:rPr sz="3150" b="1">
-                <a:solidFill>
-                  <a:srgbClr val="151515"/>
-                </a:solidFill>
-                <a:latin typeface="Arial"/>
-                <a:ea typeface="Arial"/>
-                <a:cs typeface="Arial"/>
-              </a:rPr>
-              <a:t>System diagram</a:t>
+            <a:off x="514350" y="866775"/>
+            <a:ext cx="2952750" cy="1333500"/>
+          </a:xfrm>
+          <a:prstGeom xmlns:a="http://schemas.openxmlformats.org/drawingml/2006/main" prst="rect">
+            <a:avLst/>
+          </a:prstGeom>
+          <a:noFill xmlns:a="http://schemas.openxmlformats.org/drawingml/2006/main"/>
+          <a:ln xmlns:a="http://schemas.openxmlformats.org/drawingml/2006/main" w="0">
+            <a:noFill/>
+          </a:ln>
+        </p:spPr>
+        <p:txBody>
+          <a:bodyPr xmlns:a="http://schemas.openxmlformats.org/drawingml/2006/main">
+            <a:noAutofit/>
+          </a:bodyPr>
+          <a:lstStyle xmlns:a="http://schemas.openxmlformats.org/drawingml/2006/main"/>
+          <a:p xmlns:a="http://schemas.openxmlformats.org/drawingml/2006/main">
+            <a:pPr>
+              <a:buNone/>
+              <a:defRPr sz="3225" b="1">
+                <a:solidFill>
+                  <a:srgbClr val="17212B"/>
+                </a:solidFill>
+                <a:latin typeface="Arial"/>
+                <a:ea typeface="Arial"/>
+                <a:cs typeface="Arial"/>
+              </a:defRPr>
+            </a:pPr>
+            <a:r>
+              <a:rPr sz="3225" b="1">
+                <a:solidFill>
+                  <a:srgbClr val="17212B"/>
+                </a:solidFill>
+                <a:latin typeface="Arial"/>
+                <a:ea typeface="Arial"/>
+                <a:cs typeface="Arial"/>
+              </a:rPr>
+              <a:t>System</a:t>
+            </a:r>
+          </a:p>
+          <a:p xmlns:a="http://schemas.openxmlformats.org/drawingml/2006/main">
+            <a:pPr>
+              <a:buNone/>
+              <a:defRPr sz="3225" b="1">
+                <a:solidFill>
+                  <a:srgbClr val="17212B"/>
+                </a:solidFill>
+                <a:latin typeface="Arial"/>
+                <a:ea typeface="Arial"/>
+                <a:cs typeface="Arial"/>
+              </a:defRPr>
+            </a:pPr>
+            <a:r>
+              <a:rPr sz="3225" b="1">
+                <a:solidFill>
+                  <a:srgbClr val="17212B"/>
+                </a:solidFill>
+                <a:latin typeface="Arial"/>
+                <a:ea typeface="Arial"/>
+                <a:cs typeface="Arial"/>
+              </a:rPr>
+              <a:t>diagram</a:t>
             </a:r>
           </a:p>
         </p:txBody>
@@ -2494,69 +2915,310 @@
         </p:nvSpPr>
         <p:spPr>
           <a:xfrm xmlns:a="http://schemas.openxmlformats.org/drawingml/2006/main">
-            <a:off x="11049000" y="6343650"/>
-            <a:ext cx="476250" cy="238125"/>
-          </a:xfrm>
-          <a:prstGeom xmlns:a="http://schemas.openxmlformats.org/drawingml/2006/main" prst="rect">
-            <a:avLst/>
-          </a:prstGeom>
-          <a:noFill xmlns:a="http://schemas.openxmlformats.org/drawingml/2006/main"/>
-          <a:ln xmlns:a="http://schemas.openxmlformats.org/drawingml/2006/main" w="0">
-            <a:noFill/>
-          </a:ln>
-        </p:spPr>
-        <p:txBody>
-          <a:bodyPr xmlns:a="http://schemas.openxmlformats.org/drawingml/2006/main">
-            <a:noAutofit/>
-          </a:bodyPr>
-          <a:lstStyle xmlns:a="http://schemas.openxmlformats.org/drawingml/2006/main"/>
-          <a:p xmlns:a="http://schemas.openxmlformats.org/drawingml/2006/main">
-            <a:pPr>
+            <a:off x="10610850" y="6305550"/>
+            <a:ext cx="1095375" cy="276225"/>
+          </a:xfrm>
+          <a:prstGeom xmlns:a="http://schemas.openxmlformats.org/drawingml/2006/main" prst="rect">
+            <a:avLst/>
+          </a:prstGeom>
+          <a:noFill xmlns:a="http://schemas.openxmlformats.org/drawingml/2006/main"/>
+          <a:ln xmlns:a="http://schemas.openxmlformats.org/drawingml/2006/main" w="0">
+            <a:noFill/>
+          </a:ln>
+        </p:spPr>
+        <p:txBody>
+          <a:bodyPr xmlns:a="http://schemas.openxmlformats.org/drawingml/2006/main">
+            <a:noAutofit/>
+          </a:bodyPr>
+          <a:lstStyle xmlns:a="http://schemas.openxmlformats.org/drawingml/2006/main"/>
+          <a:p xmlns:a="http://schemas.openxmlformats.org/drawingml/2006/main">
+            <a:pPr>
+              <a:buNone/>
               <a:defRPr sz="1200" b="0">
                 <a:solidFill>
-                  <a:srgbClr val="555555"/>
-                </a:solidFill>
-                <a:latin typeface="Arial"/>
-                <a:ea typeface="Arial"/>
-                <a:cs typeface="Arial"/>
+                  <a:srgbClr val="59616B"/>
+                </a:solidFill>
+                <a:latin typeface="Consolas"/>
+                <a:ea typeface="Consolas"/>
+                <a:cs typeface="Consolas"/>
               </a:defRPr>
             </a:pPr>
             <a:r>
               <a:rPr sz="1200" b="0">
                 <a:solidFill>
-                  <a:srgbClr val="555555"/>
-                </a:solidFill>
-                <a:latin typeface="Arial"/>
-                <a:ea typeface="Arial"/>
-                <a:cs typeface="Arial"/>
-              </a:rPr>
-              <a:t>03</a:t>
+                  <a:srgbClr val="59616B"/>
+                </a:solidFill>
+                <a:latin typeface="Consolas"/>
+                <a:ea typeface="Consolas"/>
+                <a:cs typeface="Consolas"/>
+              </a:rPr>
+              <a:t>03 / 09</a:t>
             </a:r>
           </a:p>
         </p:txBody>
       </p:sp>
       <p:pic>
         <p:nvPicPr>
-          <p:cNvPr id="8" name=""/>
+          <p:cNvPr id="13" name=""/>
           <p:cNvPicPr>
             <a:picLocks xmlns:a="http://schemas.openxmlformats.org/drawingml/2006/main" noChangeAspect="1"/>
           </p:cNvPicPr>
           <p:nvPr/>
         </p:nvPicPr>
         <p:blipFill>
-          <a:blip xmlns:r="http://schemas.openxmlformats.org/officeDocument/2006/relationships" xmlns:a="http://schemas.openxmlformats.org/drawingml/2006/main" r:embed="R501cbc47d0c5445d"/>
+          <a:blip xmlns:r="http://schemas.openxmlformats.org/officeDocument/2006/relationships" xmlns:a="http://schemas.openxmlformats.org/drawingml/2006/main" r:embed="Re918a62ac7804627"/>
           <a:stretch xmlns:a="http://schemas.openxmlformats.org/drawingml/2006/main"/>
         </p:blipFill>
         <p:spPr>
           <a:xfrm xmlns:a="http://schemas.openxmlformats.org/drawingml/2006/main">
-            <a:off x="3077382" y="1381125"/>
-            <a:ext cx="6018186" cy="5048250"/>
+            <a:off x="3943350" y="209550"/>
+            <a:ext cx="7277100" cy="6096000"/>
           </a:xfrm>
           <a:prstGeom xmlns:a="http://schemas.openxmlformats.org/drawingml/2006/main" prst="rect">
             <a:avLst/>
           </a:prstGeom>
         </p:spPr>
       </p:pic>
+      <p:sp>
+        <p:nvSpPr>
+          <p:cNvPr id="7" name="">
+            <a:extLst xmlns:a="http://schemas.openxmlformats.org/drawingml/2006/main">
+              <a:ext uri="{FF2B5EF4-FFF2-40B4-BE49-F238E27FC236}">
+                <a16:creationId xmlns:a16="http://schemas.microsoft.com/office/drawing/2014/main" id="{493FAA0A-8667-49DB-BD36-40B24D7DFAB9}"/>
+              </a:ext>
+            </a:extLst>
+          </p:cNvPr>
+          <p:cNvSpPr>
+            <a:spLocks xmlns:a="http://schemas.openxmlformats.org/drawingml/2006/main" noGrp="1"/>
+          </p:cNvSpPr>
+          <p:nvPr/>
+        </p:nvSpPr>
+        <p:spPr>
+          <a:xfrm xmlns:a="http://schemas.openxmlformats.org/drawingml/2006/main">
+            <a:off x="609600" y="6305550"/>
+            <a:ext cx="5715000" cy="285750"/>
+          </a:xfrm>
+          <a:prstGeom xmlns:a="http://schemas.openxmlformats.org/drawingml/2006/main" prst="rect">
+            <a:avLst/>
+          </a:prstGeom>
+          <a:noFill xmlns:a="http://schemas.openxmlformats.org/drawingml/2006/main"/>
+          <a:ln xmlns:a="http://schemas.openxmlformats.org/drawingml/2006/main" w="0">
+            <a:noFill/>
+          </a:ln>
+        </p:spPr>
+        <p:txBody>
+          <a:bodyPr xmlns:a="http://schemas.openxmlformats.org/drawingml/2006/main">
+            <a:noAutofit/>
+          </a:bodyPr>
+          <a:lstStyle xmlns:a="http://schemas.openxmlformats.org/drawingml/2006/main"/>
+          <a:p xmlns:a="http://schemas.openxmlformats.org/drawingml/2006/main">
+            <a:pPr>
+              <a:defRPr sz="1125" b="0">
+                <a:solidFill>
+                  <a:srgbClr val="59616B"/>
+                </a:solidFill>
+                <a:latin typeface="Consolas"/>
+                <a:ea typeface="Consolas"/>
+                <a:cs typeface="Consolas"/>
+              </a:defRPr>
+            </a:pPr>
+            <a:r>
+              <a:rPr sz="1125" b="0">
+                <a:solidFill>
+                  <a:srgbClr val="59616B"/>
+                </a:solidFill>
+                <a:latin typeface="Consolas"/>
+                <a:ea typeface="Consolas"/>
+                <a:cs typeface="Consolas"/>
+              </a:rPr>
+              <a:t>SLAYVT  /  VIRGINIA TECH</a:t>
+            </a:r>
+          </a:p>
+        </p:txBody>
+      </p:sp>
+      <p:sp>
+        <p:nvSpPr>
+          <p:cNvPr id="8" name="">
+            <a:extLst xmlns:a="http://schemas.openxmlformats.org/drawingml/2006/main">
+              <a:ext uri="{FF2B5EF4-FFF2-40B4-BE49-F238E27FC236}">
+                <a16:creationId xmlns:a16="http://schemas.microsoft.com/office/drawing/2014/main" id="{3D96F1C9-CEB9-4C52-96A8-B6BD2F37FB3F}"/>
+              </a:ext>
+            </a:extLst>
+          </p:cNvPr>
+          <p:cNvSpPr>
+            <a:spLocks xmlns:a="http://schemas.openxmlformats.org/drawingml/2006/main" noGrp="1"/>
+          </p:cNvSpPr>
+          <p:nvPr/>
+        </p:nvSpPr>
+        <p:spPr>
+          <a:xfrm xmlns:a="http://schemas.openxmlformats.org/drawingml/2006/main">
+            <a:off x="552450" y="2628900"/>
+            <a:ext cx="2667000" cy="857250"/>
+          </a:xfrm>
+          <a:prstGeom xmlns:a="http://schemas.openxmlformats.org/drawingml/2006/main" prst="rect">
+            <a:avLst/>
+          </a:prstGeom>
+          <a:noFill xmlns:a="http://schemas.openxmlformats.org/drawingml/2006/main"/>
+          <a:ln xmlns:a="http://schemas.openxmlformats.org/drawingml/2006/main" w="0">
+            <a:noFill/>
+          </a:ln>
+        </p:spPr>
+        <p:txBody>
+          <a:bodyPr xmlns:a="http://schemas.openxmlformats.org/drawingml/2006/main">
+            <a:noAutofit/>
+          </a:bodyPr>
+          <a:lstStyle xmlns:a="http://schemas.openxmlformats.org/drawingml/2006/main"/>
+          <a:p xmlns:a="http://schemas.openxmlformats.org/drawingml/2006/main">
+            <a:pPr>
+              <a:defRPr sz="1875" b="0">
+                <a:solidFill>
+                  <a:srgbClr val="17212B"/>
+                </a:solidFill>
+                <a:latin typeface="Arial"/>
+                <a:ea typeface="Arial"/>
+                <a:cs typeface="Arial"/>
+              </a:defRPr>
+            </a:pPr>
+            <a:r>
+              <a:rPr sz="1875" b="0">
+                <a:solidFill>
+                  <a:srgbClr val="17212B"/>
+                </a:solidFill>
+                <a:latin typeface="Arial"/>
+                <a:ea typeface="Arial"/>
+                <a:cs typeface="Arial"/>
+              </a:rPr>
+              <a:t>Main coordinates</a:t>
+            </a:r>
+          </a:p>
+          <a:p xmlns:a="http://schemas.openxmlformats.org/drawingml/2006/main">
+            <a:pPr>
+              <a:defRPr sz="1875" b="0">
+                <a:solidFill>
+                  <a:srgbClr val="17212B"/>
+                </a:solidFill>
+                <a:latin typeface="Arial"/>
+                <a:ea typeface="Arial"/>
+                <a:cs typeface="Arial"/>
+              </a:defRPr>
+            </a:pPr>
+            <a:r>
+              <a:rPr sz="1875" b="0">
+                <a:solidFill>
+                  <a:srgbClr val="17212B"/>
+                </a:solidFill>
+                <a:latin typeface="Arial"/>
+                <a:ea typeface="Arial"/>
+                <a:cs typeface="Arial"/>
+              </a:rPr>
+              <a:t>rooms and battles.</a:t>
+            </a:r>
+          </a:p>
+        </p:txBody>
+      </p:sp>
+      <p:sp>
+        <p:nvSpPr>
+          <p:cNvPr id="9" name="">
+            <a:extLst xmlns:a="http://schemas.openxmlformats.org/drawingml/2006/main">
+              <a:ext uri="{FF2B5EF4-FFF2-40B4-BE49-F238E27FC236}">
+                <a16:creationId xmlns:a16="http://schemas.microsoft.com/office/drawing/2014/main" id="{875AB532-A72E-45BE-9E2A-5A446E6C3B42}"/>
+              </a:ext>
+            </a:extLst>
+          </p:cNvPr>
+          <p:cNvSpPr>
+            <a:spLocks xmlns:a="http://schemas.openxmlformats.org/drawingml/2006/main" noGrp="1"/>
+          </p:cNvSpPr>
+          <p:nvPr/>
+        </p:nvSpPr>
+        <p:spPr>
+          <a:xfrm xmlns:a="http://schemas.openxmlformats.org/drawingml/2006/main">
+            <a:off x="552450" y="3810000"/>
+            <a:ext cx="2762250" cy="1257300"/>
+          </a:xfrm>
+          <a:prstGeom xmlns:a="http://schemas.openxmlformats.org/drawingml/2006/main" prst="rect">
+            <a:avLst/>
+          </a:prstGeom>
+          <a:noFill xmlns:a="http://schemas.openxmlformats.org/drawingml/2006/main"/>
+          <a:ln xmlns:a="http://schemas.openxmlformats.org/drawingml/2006/main" w="0">
+            <a:noFill/>
+          </a:ln>
+        </p:spPr>
+        <p:txBody>
+          <a:bodyPr xmlns:a="http://schemas.openxmlformats.org/drawingml/2006/main">
+            <a:noAutofit/>
+          </a:bodyPr>
+          <a:lstStyle xmlns:a="http://schemas.openxmlformats.org/drawingml/2006/main"/>
+          <a:p xmlns:a="http://schemas.openxmlformats.org/drawingml/2006/main">
+            <a:pPr>
+              <a:defRPr sz="1875" b="0">
+                <a:solidFill>
+                  <a:srgbClr val="59616B"/>
+                </a:solidFill>
+                <a:latin typeface="Arial"/>
+                <a:ea typeface="Arial"/>
+                <a:cs typeface="Arial"/>
+              </a:defRPr>
+            </a:pPr>
+            <a:r>
+              <a:rPr sz="1875" b="0">
+                <a:solidFill>
+                  <a:srgbClr val="59616B"/>
+                </a:solidFill>
+                <a:latin typeface="Arial"/>
+                <a:ea typeface="Arial"/>
+                <a:cs typeface="Arial"/>
+              </a:rPr>
+              <a:t>BattleContext groups</a:t>
+            </a:r>
+          </a:p>
+          <a:p xmlns:a="http://schemas.openxmlformats.org/drawingml/2006/main">
+            <a:pPr>
+              <a:defRPr sz="1875" b="0">
+                <a:solidFill>
+                  <a:srgbClr val="59616B"/>
+                </a:solidFill>
+                <a:latin typeface="Arial"/>
+                <a:ea typeface="Arial"/>
+                <a:cs typeface="Arial"/>
+              </a:defRPr>
+            </a:pPr>
+            <a:r>
+              <a:rPr sz="1875" b="0">
+                <a:solidFill>
+                  <a:srgbClr val="59616B"/>
+                </a:solidFill>
+                <a:latin typeface="Arial"/>
+                <a:ea typeface="Arial"/>
+                <a:cs typeface="Arial"/>
+              </a:rPr>
+              <a:t>the player, enemies,</a:t>
+            </a:r>
+          </a:p>
+          <a:p xmlns:a="http://schemas.openxmlformats.org/drawingml/2006/main">
+            <a:pPr>
+              <a:defRPr sz="1875" b="0">
+                <a:solidFill>
+                  <a:srgbClr val="59616B"/>
+                </a:solidFill>
+                <a:latin typeface="Arial"/>
+                <a:ea typeface="Arial"/>
+                <a:cs typeface="Arial"/>
+              </a:defRPr>
+            </a:pPr>
+            <a:r>
+              <a:rPr sz="1875" b="0">
+                <a:solidFill>
+                  <a:srgbClr val="59616B"/>
+                </a:solidFill>
+                <a:latin typeface="Arial"/>
+                <a:ea typeface="Arial"/>
+                <a:cs typeface="Arial"/>
+              </a:rPr>
+              <a:t>and card piles.</a:t>
+            </a:r>
+          </a:p>
+        </p:txBody>
+      </p:sp>
     </p:spTree>
     <p:extLst>
       <p:ext uri="{BB962C8B-B14F-4D97-AF65-F5344CB8AC3E}">
@@ -2602,43 +3264,44 @@
         </p:nvSpPr>
         <p:spPr>
           <a:xfrm xmlns:a="http://schemas.openxmlformats.org/drawingml/2006/main">
-            <a:off x="666750" y="266700"/>
-            <a:ext cx="10668000" cy="304800"/>
-          </a:xfrm>
-          <a:prstGeom xmlns:a="http://schemas.openxmlformats.org/drawingml/2006/main" prst="rect">
-            <a:avLst/>
-          </a:prstGeom>
-          <a:noFill xmlns:a="http://schemas.openxmlformats.org/drawingml/2006/main"/>
-          <a:ln xmlns:a="http://schemas.openxmlformats.org/drawingml/2006/main" w="0">
-            <a:noFill/>
-          </a:ln>
-        </p:spPr>
-        <p:txBody>
-          <a:bodyPr xmlns:a="http://schemas.openxmlformats.org/drawingml/2006/main">
-            <a:noAutofit/>
-          </a:bodyPr>
-          <a:lstStyle xmlns:a="http://schemas.openxmlformats.org/drawingml/2006/main"/>
-          <a:p xmlns:a="http://schemas.openxmlformats.org/drawingml/2006/main">
-            <a:pPr>
+            <a:off x="609600" y="304800"/>
+            <a:ext cx="10096500" cy="285750"/>
+          </a:xfrm>
+          <a:prstGeom xmlns:a="http://schemas.openxmlformats.org/drawingml/2006/main" prst="rect">
+            <a:avLst/>
+          </a:prstGeom>
+          <a:noFill xmlns:a="http://schemas.openxmlformats.org/drawingml/2006/main"/>
+          <a:ln xmlns:a="http://schemas.openxmlformats.org/drawingml/2006/main" w="0">
+            <a:noFill/>
+          </a:ln>
+        </p:spPr>
+        <p:txBody>
+          <a:bodyPr xmlns:a="http://schemas.openxmlformats.org/drawingml/2006/main">
+            <a:noAutofit/>
+          </a:bodyPr>
+          <a:lstStyle xmlns:a="http://schemas.openxmlformats.org/drawingml/2006/main"/>
+          <a:p xmlns:a="http://schemas.openxmlformats.org/drawingml/2006/main">
+            <a:pPr>
+              <a:buNone/>
               <a:defRPr sz="1275" b="1">
                 <a:solidFill>
-                  <a:srgbClr val="555555"/>
-                </a:solidFill>
-                <a:latin typeface="Arial"/>
-                <a:ea typeface="Arial"/>
-                <a:cs typeface="Arial"/>
+                  <a:srgbClr val="C64600"/>
+                </a:solidFill>
+                <a:latin typeface="Consolas"/>
+                <a:ea typeface="Consolas"/>
+                <a:cs typeface="Consolas"/>
               </a:defRPr>
             </a:pPr>
             <a:r>
               <a:rPr sz="1275" b="1">
                 <a:solidFill>
-                  <a:srgbClr val="555555"/>
-                </a:solidFill>
-                <a:latin typeface="Arial"/>
-                <a:ea typeface="Arial"/>
-                <a:cs typeface="Arial"/>
-              </a:rPr>
-              <a:t>1 · MVP</a:t>
+                  <a:srgbClr val="C64600"/>
+                </a:solidFill>
+                <a:latin typeface="Consolas"/>
+                <a:ea typeface="Consolas"/>
+                <a:cs typeface="Consolas"/>
+              </a:rPr>
+              <a:t>01  /  MVP</a:t>
             </a:r>
           </a:p>
         </p:txBody>
@@ -2659,37 +3322,38 @@
         </p:nvSpPr>
         <p:spPr>
           <a:xfrm xmlns:a="http://schemas.openxmlformats.org/drawingml/2006/main">
-            <a:off x="666750" y="685800"/>
-            <a:ext cx="10763250" cy="714375"/>
-          </a:xfrm>
-          <a:prstGeom xmlns:a="http://schemas.openxmlformats.org/drawingml/2006/main" prst="rect">
-            <a:avLst/>
-          </a:prstGeom>
-          <a:noFill xmlns:a="http://schemas.openxmlformats.org/drawingml/2006/main"/>
-          <a:ln xmlns:a="http://schemas.openxmlformats.org/drawingml/2006/main" w="0">
-            <a:noFill/>
-          </a:ln>
-        </p:spPr>
-        <p:txBody>
-          <a:bodyPr xmlns:a="http://schemas.openxmlformats.org/drawingml/2006/main">
-            <a:noAutofit/>
-          </a:bodyPr>
-          <a:lstStyle xmlns:a="http://schemas.openxmlformats.org/drawingml/2006/main"/>
-          <a:p xmlns:a="http://schemas.openxmlformats.org/drawingml/2006/main">
-            <a:pPr>
-              <a:defRPr sz="3150" b="1">
-                <a:solidFill>
-                  <a:srgbClr val="151515"/>
-                </a:solidFill>
-                <a:latin typeface="Arial"/>
-                <a:ea typeface="Arial"/>
-                <a:cs typeface="Arial"/>
-              </a:defRPr>
-            </a:pPr>
-            <a:r>
-              <a:rPr sz="3150" b="1">
-                <a:solidFill>
-                  <a:srgbClr val="151515"/>
+            <a:off x="609600" y="781050"/>
+            <a:ext cx="10906125" cy="809625"/>
+          </a:xfrm>
+          <a:prstGeom xmlns:a="http://schemas.openxmlformats.org/drawingml/2006/main" prst="rect">
+            <a:avLst/>
+          </a:prstGeom>
+          <a:noFill xmlns:a="http://schemas.openxmlformats.org/drawingml/2006/main"/>
+          <a:ln xmlns:a="http://schemas.openxmlformats.org/drawingml/2006/main" w="0">
+            <a:noFill/>
+          </a:ln>
+        </p:spPr>
+        <p:txBody>
+          <a:bodyPr xmlns:a="http://schemas.openxmlformats.org/drawingml/2006/main">
+            <a:noAutofit/>
+          </a:bodyPr>
+          <a:lstStyle xmlns:a="http://schemas.openxmlformats.org/drawingml/2006/main"/>
+          <a:p xmlns:a="http://schemas.openxmlformats.org/drawingml/2006/main">
+            <a:pPr>
+              <a:buNone/>
+              <a:defRPr sz="3450" b="1">
+                <a:solidFill>
+                  <a:srgbClr val="17212B"/>
+                </a:solidFill>
+                <a:latin typeface="Arial"/>
+                <a:ea typeface="Arial"/>
+                <a:cs typeface="Arial"/>
+              </a:defRPr>
+            </a:pPr>
+            <a:r>
+              <a:rPr sz="3450" b="1">
+                <a:solidFill>
+                  <a:srgbClr val="17212B"/>
                 </a:solidFill>
                 <a:latin typeface="Arial"/>
                 <a:ea typeface="Arial"/>
@@ -2716,88 +3380,203 @@
         </p:nvSpPr>
         <p:spPr>
           <a:xfrm xmlns:a="http://schemas.openxmlformats.org/drawingml/2006/main">
-            <a:off x="11049000" y="6343650"/>
-            <a:ext cx="476250" cy="238125"/>
-          </a:xfrm>
-          <a:prstGeom xmlns:a="http://schemas.openxmlformats.org/drawingml/2006/main" prst="rect">
-            <a:avLst/>
-          </a:prstGeom>
-          <a:noFill xmlns:a="http://schemas.openxmlformats.org/drawingml/2006/main"/>
-          <a:ln xmlns:a="http://schemas.openxmlformats.org/drawingml/2006/main" w="0">
-            <a:noFill/>
-          </a:ln>
-        </p:spPr>
-        <p:txBody>
-          <a:bodyPr xmlns:a="http://schemas.openxmlformats.org/drawingml/2006/main">
-            <a:noAutofit/>
-          </a:bodyPr>
-          <a:lstStyle xmlns:a="http://schemas.openxmlformats.org/drawingml/2006/main"/>
-          <a:p xmlns:a="http://schemas.openxmlformats.org/drawingml/2006/main">
-            <a:pPr>
+            <a:off x="10610850" y="6305550"/>
+            <a:ext cx="1095375" cy="276225"/>
+          </a:xfrm>
+          <a:prstGeom xmlns:a="http://schemas.openxmlformats.org/drawingml/2006/main" prst="rect">
+            <a:avLst/>
+          </a:prstGeom>
+          <a:noFill xmlns:a="http://schemas.openxmlformats.org/drawingml/2006/main"/>
+          <a:ln xmlns:a="http://schemas.openxmlformats.org/drawingml/2006/main" w="0">
+            <a:noFill/>
+          </a:ln>
+        </p:spPr>
+        <p:txBody>
+          <a:bodyPr xmlns:a="http://schemas.openxmlformats.org/drawingml/2006/main">
+            <a:noAutofit/>
+          </a:bodyPr>
+          <a:lstStyle xmlns:a="http://schemas.openxmlformats.org/drawingml/2006/main"/>
+          <a:p xmlns:a="http://schemas.openxmlformats.org/drawingml/2006/main">
+            <a:pPr>
+              <a:buNone/>
               <a:defRPr sz="1200" b="0">
                 <a:solidFill>
-                  <a:srgbClr val="555555"/>
-                </a:solidFill>
-                <a:latin typeface="Arial"/>
-                <a:ea typeface="Arial"/>
-                <a:cs typeface="Arial"/>
+                  <a:srgbClr val="59616B"/>
+                </a:solidFill>
+                <a:latin typeface="Consolas"/>
+                <a:ea typeface="Consolas"/>
+                <a:cs typeface="Consolas"/>
               </a:defRPr>
             </a:pPr>
             <a:r>
               <a:rPr sz="1200" b="0">
                 <a:solidFill>
-                  <a:srgbClr val="555555"/>
-                </a:solidFill>
-                <a:latin typeface="Arial"/>
-                <a:ea typeface="Arial"/>
-                <a:cs typeface="Arial"/>
-              </a:rPr>
-              <a:t>04</a:t>
-            </a:r>
-          </a:p>
-        </p:txBody>
-      </p:sp>
-      <p:sp>
-        <p:nvSpPr>
-          <p:cNvPr id="4" name="">
-            <a:extLst xmlns:a="http://schemas.openxmlformats.org/drawingml/2006/main">
-              <a:ext uri="{FF2B5EF4-FFF2-40B4-BE49-F238E27FC236}">
-                <a16:creationId xmlns:a16="http://schemas.microsoft.com/office/drawing/2014/main" id="{CF52C2EF-23F2-4900-8253-2F6521BC9881}"/>
-              </a:ext>
-            </a:extLst>
-          </p:cNvPr>
-          <p:cNvSpPr>
-            <a:spLocks xmlns:a="http://schemas.openxmlformats.org/drawingml/2006/main" noGrp="1"/>
-          </p:cNvSpPr>
-          <p:nvPr/>
-        </p:nvSpPr>
-        <p:spPr>
-          <a:xfrm xmlns:a="http://schemas.openxmlformats.org/drawingml/2006/main">
-            <a:off x="857250" y="1752600"/>
-            <a:ext cx="10477500" cy="4286250"/>
-          </a:xfrm>
-          <a:prstGeom xmlns:a="http://schemas.openxmlformats.org/drawingml/2006/main" prst="rect">
-            <a:avLst/>
-          </a:prstGeom>
-          <a:noFill xmlns:a="http://schemas.openxmlformats.org/drawingml/2006/main"/>
-          <a:ln xmlns:a="http://schemas.openxmlformats.org/drawingml/2006/main" w="0">
-            <a:noFill/>
-          </a:ln>
-        </p:spPr>
-        <p:txBody>
-          <a:bodyPr xmlns:a="http://schemas.openxmlformats.org/drawingml/2006/main">
-            <a:noAutofit/>
-          </a:bodyPr>
-          <a:lstStyle xmlns:a="http://schemas.openxmlformats.org/drawingml/2006/main"/>
-          <a:p xmlns:a="http://schemas.openxmlformats.org/drawingml/2006/main">
-            <a:pPr marL="292100" indent="-127000">
+                  <a:srgbClr val="59616B"/>
+                </a:solidFill>
+                <a:latin typeface="Consolas"/>
+                <a:ea typeface="Consolas"/>
+                <a:cs typeface="Consolas"/>
+              </a:rPr>
+              <a:t>04 / 09</a:t>
+            </a:r>
+          </a:p>
+        </p:txBody>
+      </p:sp>
+      <p:sp>
+        <p:nvSpPr>
+          <p:cNvPr id="6" name="">
+            <a:extLst xmlns:a="http://schemas.openxmlformats.org/drawingml/2006/main">
+              <a:ext uri="{FF2B5EF4-FFF2-40B4-BE49-F238E27FC236}">
+                <a16:creationId xmlns:a16="http://schemas.microsoft.com/office/drawing/2014/main" id="{E52D46C2-109E-4E63-A9D3-B0E92BBC413D}"/>
+              </a:ext>
+            </a:extLst>
+          </p:cNvPr>
+          <p:cNvSpPr>
+            <a:spLocks xmlns:a="http://schemas.openxmlformats.org/drawingml/2006/main" noGrp="1"/>
+          </p:cNvSpPr>
+          <p:nvPr/>
+        </p:nvSpPr>
+        <p:spPr>
+          <a:xfrm xmlns:a="http://schemas.openxmlformats.org/drawingml/2006/main">
+            <a:off x="609600" y="6305550"/>
+            <a:ext cx="5715000" cy="285750"/>
+          </a:xfrm>
+          <a:prstGeom xmlns:a="http://schemas.openxmlformats.org/drawingml/2006/main" prst="rect">
+            <a:avLst/>
+          </a:prstGeom>
+          <a:noFill xmlns:a="http://schemas.openxmlformats.org/drawingml/2006/main"/>
+          <a:ln xmlns:a="http://schemas.openxmlformats.org/drawingml/2006/main" w="0">
+            <a:noFill/>
+          </a:ln>
+        </p:spPr>
+        <p:txBody>
+          <a:bodyPr xmlns:a="http://schemas.openxmlformats.org/drawingml/2006/main">
+            <a:noAutofit/>
+          </a:bodyPr>
+          <a:lstStyle xmlns:a="http://schemas.openxmlformats.org/drawingml/2006/main"/>
+          <a:p xmlns:a="http://schemas.openxmlformats.org/drawingml/2006/main">
+            <a:pPr>
+              <a:defRPr sz="1125" b="0">
+                <a:solidFill>
+                  <a:srgbClr val="59616B"/>
+                </a:solidFill>
+                <a:latin typeface="Consolas"/>
+                <a:ea typeface="Consolas"/>
+                <a:cs typeface="Consolas"/>
+              </a:defRPr>
+            </a:pPr>
+            <a:r>
+              <a:rPr sz="1125" b="0">
+                <a:solidFill>
+                  <a:srgbClr val="59616B"/>
+                </a:solidFill>
+                <a:latin typeface="Consolas"/>
+                <a:ea typeface="Consolas"/>
+                <a:cs typeface="Consolas"/>
+              </a:rPr>
+              <a:t>SLAYVT  /  VIRGINIA TECH</a:t>
+            </a:r>
+          </a:p>
+        </p:txBody>
+      </p:sp>
+      <p:sp>
+        <p:nvSpPr>
+          <p:cNvPr id="7" name="">
+            <a:extLst xmlns:a="http://schemas.openxmlformats.org/drawingml/2006/main">
+              <a:ext uri="{FF2B5EF4-FFF2-40B4-BE49-F238E27FC236}">
+                <a16:creationId xmlns:a16="http://schemas.microsoft.com/office/drawing/2014/main" id="{0B33550A-E183-435F-A7B8-083E0A8CE7CE}"/>
+              </a:ext>
+            </a:extLst>
+          </p:cNvPr>
+          <p:cNvSpPr>
+            <a:spLocks xmlns:a="http://schemas.openxmlformats.org/drawingml/2006/main" noGrp="1"/>
+          </p:cNvSpPr>
+          <p:nvPr/>
+        </p:nvSpPr>
+        <p:spPr>
+          <a:xfrm xmlns:a="http://schemas.openxmlformats.org/drawingml/2006/main">
+            <a:off x="666750" y="1990725"/>
+            <a:ext cx="4762500" cy="438150"/>
+          </a:xfrm>
+          <a:prstGeom xmlns:a="http://schemas.openxmlformats.org/drawingml/2006/main" prst="rect">
+            <a:avLst/>
+          </a:prstGeom>
+          <a:noFill xmlns:a="http://schemas.openxmlformats.org/drawingml/2006/main"/>
+          <a:ln xmlns:a="http://schemas.openxmlformats.org/drawingml/2006/main" w="0">
+            <a:noFill/>
+          </a:ln>
+        </p:spPr>
+        <p:txBody>
+          <a:bodyPr xmlns:a="http://schemas.openxmlformats.org/drawingml/2006/main">
+            <a:noAutofit/>
+          </a:bodyPr>
+          <a:lstStyle xmlns:a="http://schemas.openxmlformats.org/drawingml/2006/main"/>
+          <a:p xmlns:a="http://schemas.openxmlformats.org/drawingml/2006/main">
+            <a:pPr>
+              <a:defRPr sz="1650" b="1">
+                <a:solidFill>
+                  <a:srgbClr val="C64600"/>
+                </a:solidFill>
+                <a:latin typeface="Consolas"/>
+                <a:ea typeface="Consolas"/>
+                <a:cs typeface="Consolas"/>
+              </a:defRPr>
+            </a:pPr>
+            <a:r>
+              <a:rPr sz="1650" b="1">
+                <a:solidFill>
+                  <a:srgbClr val="C64600"/>
+                </a:solidFill>
+                <a:latin typeface="Consolas"/>
+                <a:ea typeface="Consolas"/>
+                <a:cs typeface="Consolas"/>
+              </a:rPr>
+              <a:t>CUT FOR TIME</a:t>
+            </a:r>
+          </a:p>
+        </p:txBody>
+      </p:sp>
+      <p:sp>
+        <p:nvSpPr>
+          <p:cNvPr id="8" name="">
+            <a:extLst xmlns:a="http://schemas.openxmlformats.org/drawingml/2006/main">
+              <a:ext uri="{FF2B5EF4-FFF2-40B4-BE49-F238E27FC236}">
+                <a16:creationId xmlns:a16="http://schemas.microsoft.com/office/drawing/2014/main" id="{84BC4E3F-63D4-40EA-8464-A819B8D3B590}"/>
+              </a:ext>
+            </a:extLst>
+          </p:cNvPr>
+          <p:cNvSpPr>
+            <a:spLocks xmlns:a="http://schemas.openxmlformats.org/drawingml/2006/main" noGrp="1"/>
+          </p:cNvSpPr>
+          <p:nvPr/>
+        </p:nvSpPr>
+        <p:spPr>
+          <a:xfrm xmlns:a="http://schemas.openxmlformats.org/drawingml/2006/main">
+            <a:off x="666750" y="2667000"/>
+            <a:ext cx="4762500" cy="2619375"/>
+          </a:xfrm>
+          <a:prstGeom xmlns:a="http://schemas.openxmlformats.org/drawingml/2006/main" prst="rect">
+            <a:avLst/>
+          </a:prstGeom>
+          <a:noFill xmlns:a="http://schemas.openxmlformats.org/drawingml/2006/main"/>
+          <a:ln xmlns:a="http://schemas.openxmlformats.org/drawingml/2006/main" w="0">
+            <a:noFill/>
+          </a:ln>
+        </p:spPr>
+        <p:txBody>
+          <a:bodyPr xmlns:a="http://schemas.openxmlformats.org/drawingml/2006/main">
+            <a:noAutofit/>
+          </a:bodyPr>
+          <a:lstStyle xmlns:a="http://schemas.openxmlformats.org/drawingml/2006/main"/>
+          <a:p xmlns:a="http://schemas.openxmlformats.org/drawingml/2006/main">
+            <a:pPr marL="241300" indent="-114300">
               <a:spcAft>
-                <a:spcPts val="1900"/>
+                <a:spcPts val="1800"/>
               </a:spcAft>
               <a:buChar char="•"/>
               <a:defRPr sz="2175" b="0">
                 <a:solidFill>
-                  <a:srgbClr val="151515"/>
+                  <a:srgbClr val="17212B"/>
                 </a:solidFill>
                 <a:latin typeface="Arial"/>
                 <a:ea typeface="Arial"/>
@@ -2807,24 +3586,24 @@
             <a:r>
               <a:rPr sz="2175" b="0">
                 <a:solidFill>
-                  <a:srgbClr val="151515"/>
-                </a:solidFill>
-                <a:latin typeface="Arial"/>
-                <a:ea typeface="Arial"/>
-                <a:cs typeface="Arial"/>
-              </a:rPr>
-              <a:t>Cut relics and potions to protect the core game loop</a:t>
-            </a:r>
-          </a:p>
-          <a:p xmlns:a="http://schemas.openxmlformats.org/drawingml/2006/main">
-            <a:pPr marL="292100" indent="-127000">
+                  <a:srgbClr val="17212B"/>
+                </a:solidFill>
+                <a:latin typeface="Arial"/>
+                <a:ea typeface="Arial"/>
+                <a:cs typeface="Arial"/>
+              </a:rPr>
+              <a:t>Relics and potions</a:t>
+            </a:r>
+          </a:p>
+          <a:p xmlns:a="http://schemas.openxmlformats.org/drawingml/2006/main">
+            <a:pPr marL="241300" indent="-114300">
               <a:spcAft>
-                <a:spcPts val="1900"/>
+                <a:spcPts val="1800"/>
               </a:spcAft>
               <a:buChar char="•"/>
               <a:defRPr sz="2175" b="0">
                 <a:solidFill>
-                  <a:srgbClr val="151515"/>
+                  <a:srgbClr val="17212B"/>
                 </a:solidFill>
                 <a:latin typeface="Arial"/>
                 <a:ea typeface="Arial"/>
@@ -2834,24 +3613,24 @@
             <a:r>
               <a:rPr sz="2175" b="0">
                 <a:solidFill>
-                  <a:srgbClr val="151515"/>
-                </a:solidFill>
-                <a:latin typeface="Arial"/>
-                <a:ea typeface="Arial"/>
-                <a:cs typeface="Arial"/>
-              </a:rPr>
-              <a:t>Shipped fewer cards and events than planned</a:t>
-            </a:r>
-          </a:p>
-          <a:p xmlns:a="http://schemas.openxmlformats.org/drawingml/2006/main">
-            <a:pPr marL="292100" indent="-127000">
+                  <a:srgbClr val="17212B"/>
+                </a:solidFill>
+                <a:latin typeface="Arial"/>
+                <a:ea typeface="Arial"/>
+                <a:cs typeface="Arial"/>
+              </a:rPr>
+              <a:t>Some planned cards and events</a:t>
+            </a:r>
+          </a:p>
+          <a:p xmlns:a="http://schemas.openxmlformats.org/drawingml/2006/main">
+            <a:pPr marL="241300" indent="-114300">
               <a:spcAft>
-                <a:spcPts val="1900"/>
+                <a:spcPts val="1800"/>
               </a:spcAft>
               <a:buChar char="•"/>
               <a:defRPr sz="2175" b="0">
                 <a:solidFill>
-                  <a:srgbClr val="151515"/>
+                  <a:srgbClr val="17212B"/>
                 </a:solidFill>
                 <a:latin typeface="Arial"/>
                 <a:ea typeface="Arial"/>
@@ -2861,24 +3640,115 @@
             <a:r>
               <a:rPr sz="2175" b="0">
                 <a:solidFill>
-                  <a:srgbClr val="151515"/>
-                </a:solidFill>
-                <a:latin typeface="Arial"/>
-                <a:ea typeface="Arial"/>
-                <a:cs typeface="Arial"/>
-              </a:rPr>
-              <a:t>Original team-designed cards and temperature mechanic</a:t>
-            </a:r>
-          </a:p>
-          <a:p xmlns:a="http://schemas.openxmlformats.org/drawingml/2006/main">
-            <a:pPr marL="292100" indent="-127000">
+                  <a:srgbClr val="17212B"/>
+                </a:solidFill>
+                <a:latin typeface="Arial"/>
+                <a:ea typeface="Arial"/>
+                <a:cs typeface="Arial"/>
+              </a:rPr>
+              <a:t>Further balance and encounter refinement</a:t>
+            </a:r>
+          </a:p>
+        </p:txBody>
+      </p:sp>
+      <p:sp>
+        <p:nvSpPr>
+          <p:cNvPr id="9" name="">
+            <a:extLst xmlns:a="http://schemas.openxmlformats.org/drawingml/2006/main">
+              <a:ext uri="{FF2B5EF4-FFF2-40B4-BE49-F238E27FC236}">
+                <a16:creationId xmlns:a16="http://schemas.microsoft.com/office/drawing/2014/main" id="{DD2DF007-D4DD-4EFB-9921-B0965C69DC92}"/>
+              </a:ext>
+            </a:extLst>
+          </p:cNvPr>
+          <p:cNvSpPr>
+            <a:spLocks xmlns:a="http://schemas.openxmlformats.org/drawingml/2006/main" noGrp="1"/>
+          </p:cNvSpPr>
+          <p:nvPr/>
+        </p:nvSpPr>
+        <p:spPr>
+          <a:xfrm xmlns:a="http://schemas.openxmlformats.org/drawingml/2006/main">
+            <a:off x="6667500" y="1990725"/>
+            <a:ext cx="4762500" cy="438150"/>
+          </a:xfrm>
+          <a:prstGeom xmlns:a="http://schemas.openxmlformats.org/drawingml/2006/main" prst="rect">
+            <a:avLst/>
+          </a:prstGeom>
+          <a:noFill xmlns:a="http://schemas.openxmlformats.org/drawingml/2006/main"/>
+          <a:ln xmlns:a="http://schemas.openxmlformats.org/drawingml/2006/main" w="0">
+            <a:noFill/>
+          </a:ln>
+        </p:spPr>
+        <p:txBody>
+          <a:bodyPr xmlns:a="http://schemas.openxmlformats.org/drawingml/2006/main">
+            <a:noAutofit/>
+          </a:bodyPr>
+          <a:lstStyle xmlns:a="http://schemas.openxmlformats.org/drawingml/2006/main"/>
+          <a:p xmlns:a="http://schemas.openxmlformats.org/drawingml/2006/main">
+            <a:pPr>
+              <a:defRPr sz="1650" b="1">
+                <a:solidFill>
+                  <a:srgbClr val="861F41"/>
+                </a:solidFill>
+                <a:latin typeface="Consolas"/>
+                <a:ea typeface="Consolas"/>
+                <a:cs typeface="Consolas"/>
+              </a:defRPr>
+            </a:pPr>
+            <a:r>
+              <a:rPr sz="1650" b="1">
+                <a:solidFill>
+                  <a:srgbClr val="861F41"/>
+                </a:solidFill>
+                <a:latin typeface="Consolas"/>
+                <a:ea typeface="Consolas"/>
+                <a:cs typeface="Consolas"/>
+              </a:rPr>
+              <a:t>TEAM-DESIGNED</a:t>
+            </a:r>
+          </a:p>
+        </p:txBody>
+      </p:sp>
+      <p:sp>
+        <p:nvSpPr>
+          <p:cNvPr id="10" name="">
+            <a:extLst xmlns:a="http://schemas.openxmlformats.org/drawingml/2006/main">
+              <a:ext uri="{FF2B5EF4-FFF2-40B4-BE49-F238E27FC236}">
+                <a16:creationId xmlns:a16="http://schemas.microsoft.com/office/drawing/2014/main" id="{0177F5E9-695A-4BED-9E18-B4535E4874F7}"/>
+              </a:ext>
+            </a:extLst>
+          </p:cNvPr>
+          <p:cNvSpPr>
+            <a:spLocks xmlns:a="http://schemas.openxmlformats.org/drawingml/2006/main" noGrp="1"/>
+          </p:cNvSpPr>
+          <p:nvPr/>
+        </p:nvSpPr>
+        <p:spPr>
+          <a:xfrm xmlns:a="http://schemas.openxmlformats.org/drawingml/2006/main">
+            <a:off x="6667500" y="2667000"/>
+            <a:ext cx="4762500" cy="2095500"/>
+          </a:xfrm>
+          <a:prstGeom xmlns:a="http://schemas.openxmlformats.org/drawingml/2006/main" prst="rect">
+            <a:avLst/>
+          </a:prstGeom>
+          <a:noFill xmlns:a="http://schemas.openxmlformats.org/drawingml/2006/main"/>
+          <a:ln xmlns:a="http://schemas.openxmlformats.org/drawingml/2006/main" w="0">
+            <a:noFill/>
+          </a:ln>
+        </p:spPr>
+        <p:txBody>
+          <a:bodyPr xmlns:a="http://schemas.openxmlformats.org/drawingml/2006/main">
+            <a:noAutofit/>
+          </a:bodyPr>
+          <a:lstStyle xmlns:a="http://schemas.openxmlformats.org/drawingml/2006/main"/>
+          <a:p xmlns:a="http://schemas.openxmlformats.org/drawingml/2006/main">
+            <a:pPr marL="241300" indent="-114300">
               <a:spcAft>
-                <a:spcPts val="1900"/>
+                <a:spcPts val="1800"/>
               </a:spcAft>
               <a:buChar char="•"/>
               <a:defRPr sz="2175" b="0">
                 <a:solidFill>
-                  <a:srgbClr val="151515"/>
+                  <a:srgbClr val="17212B"/>
                 </a:solidFill>
                 <a:latin typeface="Arial"/>
                 <a:ea typeface="Arial"/>
@@ -2888,13 +3758,97 @@
             <a:r>
               <a:rPr sz="2175" b="0">
                 <a:solidFill>
-                  <a:srgbClr val="151515"/>
-                </a:solidFill>
-                <a:latin typeface="Arial"/>
-                <a:ea typeface="Arial"/>
-                <a:cs typeface="Arial"/>
-              </a:rPr>
-              <a:t>Future goal: refine and adapt the concept as a mod</a:t>
+                  <a:srgbClr val="17212B"/>
+                </a:solidFill>
+                <a:latin typeface="Arial"/>
+                <a:ea typeface="Arial"/>
+                <a:cs typeface="Arial"/>
+              </a:rPr>
+              <a:t>Original cards and temperature mechanic</a:t>
+            </a:r>
+          </a:p>
+          <a:p xmlns:a="http://schemas.openxmlformats.org/drawingml/2006/main">
+            <a:pPr marL="241300" indent="-114300">
+              <a:spcAft>
+                <a:spcPts val="1800"/>
+              </a:spcAft>
+              <a:buChar char="•"/>
+              <a:defRPr sz="2175" b="0">
+                <a:solidFill>
+                  <a:srgbClr val="17212B"/>
+                </a:solidFill>
+                <a:latin typeface="Arial"/>
+                <a:ea typeface="Arial"/>
+                <a:cs typeface="Arial"/>
+              </a:defRPr>
+            </a:pPr>
+            <a:r>
+              <a:rPr sz="2175" b="0">
+                <a:solidFill>
+                  <a:srgbClr val="17212B"/>
+                </a:solidFill>
+                <a:latin typeface="Arial"/>
+                <a:ea typeface="Arial"/>
+                <a:cs typeface="Arial"/>
+              </a:rPr>
+              <a:t>A foundation for a future game mod</a:t>
+            </a:r>
+          </a:p>
+        </p:txBody>
+      </p:sp>
+      <p:sp>
+        <p:nvSpPr>
+          <p:cNvPr id="11" name="">
+            <a:extLst xmlns:a="http://schemas.openxmlformats.org/drawingml/2006/main">
+              <a:ext uri="{FF2B5EF4-FFF2-40B4-BE49-F238E27FC236}">
+                <a16:creationId xmlns:a16="http://schemas.microsoft.com/office/drawing/2014/main" id="{F6ED3247-860F-4C7C-96F2-A80A80AA38A8}"/>
+              </a:ext>
+            </a:extLst>
+          </p:cNvPr>
+          <p:cNvSpPr>
+            <a:spLocks xmlns:a="http://schemas.openxmlformats.org/drawingml/2006/main" noGrp="1"/>
+          </p:cNvSpPr>
+          <p:nvPr/>
+        </p:nvSpPr>
+        <p:spPr>
+          <a:xfrm xmlns:a="http://schemas.openxmlformats.org/drawingml/2006/main">
+            <a:off x="666750" y="5572125"/>
+            <a:ext cx="10668000" cy="523875"/>
+          </a:xfrm>
+          <a:prstGeom xmlns:a="http://schemas.openxmlformats.org/drawingml/2006/main" prst="rect">
+            <a:avLst/>
+          </a:prstGeom>
+          <a:noFill xmlns:a="http://schemas.openxmlformats.org/drawingml/2006/main"/>
+          <a:ln xmlns:a="http://schemas.openxmlformats.org/drawingml/2006/main" w="0">
+            <a:noFill/>
+          </a:ln>
+        </p:spPr>
+        <p:txBody>
+          <a:bodyPr xmlns:a="http://schemas.openxmlformats.org/drawingml/2006/main">
+            <a:noAutofit/>
+          </a:bodyPr>
+          <a:lstStyle xmlns:a="http://schemas.openxmlformats.org/drawingml/2006/main"/>
+          <a:p xmlns:a="http://schemas.openxmlformats.org/drawingml/2006/main">
+            <a:pPr>
+              <a:defRPr sz="2100" b="1">
+                <a:solidFill>
+                  <a:srgbClr val="861F41"/>
+                </a:solidFill>
+                <a:latin typeface="Arial"/>
+                <a:ea typeface="Arial"/>
+                <a:cs typeface="Arial"/>
+              </a:defRPr>
+            </a:pPr>
+            <a:r>
+              <a:rPr sz="2100" b="1">
+                <a:solidFill>
+                  <a:srgbClr val="861F41"/>
+                </a:solidFill>
+                <a:latin typeface="Arial"/>
+                <a:ea typeface="Arial"/>
+                <a:cs typeface="Arial"/>
+              </a:rPr>
+              <a:t>Our priority: finish a working core game loop</a:t>
             </a:r>
           </a:p>
         </p:txBody>
@@ -2915,7 +3869,7 @@
     <p:bg>
       <p:bgPr>
         <a:solidFill xmlns:a="http://schemas.openxmlformats.org/drawingml/2006/main">
-          <a:srgbClr val="FFFFFF"/>
+          <a:srgbClr val="10151D"/>
         </a:solidFill>
       </p:bgPr>
     </p:bg>
@@ -2928,24 +3882,49 @@
       <p:grpSpPr>
         <a:xfrm xmlns:a="http://schemas.openxmlformats.org/drawingml/2006/main"/>
       </p:grpSpPr>
-      <p:sp>
-        <p:nvSpPr>
-          <p:cNvPr id="5" name="">
-            <a:extLst xmlns:a="http://schemas.openxmlformats.org/drawingml/2006/main">
-              <a:ext uri="{FF2B5EF4-FFF2-40B4-BE49-F238E27FC236}">
-                <a16:creationId xmlns:a16="http://schemas.microsoft.com/office/drawing/2014/main" id="{5AB5A7C7-4921-4C35-A351-DCDCFAD7CB34}"/>
-              </a:ext>
-            </a:extLst>
-          </p:cNvPr>
-          <p:cNvSpPr>
-            <a:spLocks xmlns:a="http://schemas.openxmlformats.org/drawingml/2006/main" noGrp="1"/>
-          </p:cNvSpPr>
-          <p:nvPr/>
-        </p:nvSpPr>
-        <p:spPr>
-          <a:xfrm xmlns:a="http://schemas.openxmlformats.org/drawingml/2006/main">
-            <a:off x="666750" y="266700"/>
-            <a:ext cx="10668000" cy="304800"/>
+      <p:pic>
+        <p:nvPicPr>
+          <p:cNvPr id="24" name=""/>
+          <p:cNvPicPr>
+            <a:picLocks xmlns:a="http://schemas.openxmlformats.org/drawingml/2006/main" noChangeAspect="1"/>
+          </p:cNvPicPr>
+          <p:nvPr/>
+        </p:nvPicPr>
+        <p:blipFill>
+          <a:blip xmlns:r="http://schemas.openxmlformats.org/officeDocument/2006/relationships" xmlns:a="http://schemas.openxmlformats.org/drawingml/2006/main" r:embed="Rcc67171526984ab5"/>
+          <a:srcRect xmlns:a="http://schemas.openxmlformats.org/drawingml/2006/main" l="0" t="27" r="0" b="27"/>
+          <a:stretch xmlns:a="http://schemas.openxmlformats.org/drawingml/2006/main">
+            <a:fillRect l="0" t="0" r="0" b="0"/>
+          </a:stretch>
+        </p:blipFill>
+        <p:spPr>
+          <a:xfrm xmlns:a="http://schemas.openxmlformats.org/drawingml/2006/main">
+            <a:off x="0" y="0"/>
+            <a:ext cx="12192000" cy="6858000"/>
+          </a:xfrm>
+          <a:prstGeom xmlns:a="http://schemas.openxmlformats.org/drawingml/2006/main" prst="rect">
+            <a:avLst/>
+          </a:prstGeom>
+        </p:spPr>
+      </p:pic>
+      <p:sp>
+        <p:nvSpPr>
+          <p:cNvPr id="8" name="">
+            <a:extLst xmlns:a="http://schemas.openxmlformats.org/drawingml/2006/main">
+              <a:ext uri="{FF2B5EF4-FFF2-40B4-BE49-F238E27FC236}">
+                <a16:creationId xmlns:a16="http://schemas.microsoft.com/office/drawing/2014/main" id="{FC2DDD87-5CF5-4487-9AF6-D0AAFEBF80D1}"/>
+              </a:ext>
+            </a:extLst>
+          </p:cNvPr>
+          <p:cNvSpPr>
+            <a:spLocks xmlns:a="http://schemas.openxmlformats.org/drawingml/2006/main" noGrp="1"/>
+          </p:cNvSpPr>
+          <p:nvPr/>
+        </p:nvSpPr>
+        <p:spPr>
+          <a:xfrm xmlns:a="http://schemas.openxmlformats.org/drawingml/2006/main">
+            <a:off x="609600" y="304800"/>
+            <a:ext cx="10096500" cy="285750"/>
           </a:xfrm>
           <a:prstGeom xmlns:a="http://schemas.openxmlformats.org/drawingml/2006/main" prst="rect">
             <a:avLst/>
@@ -2964,74 +3943,74 @@
             <a:pPr>
               <a:defRPr sz="1275" b="1">
                 <a:solidFill>
-                  <a:srgbClr val="555555"/>
-                </a:solidFill>
-                <a:latin typeface="Arial"/>
-                <a:ea typeface="Arial"/>
-                <a:cs typeface="Arial"/>
+                  <a:srgbClr val="E5751F"/>
+                </a:solidFill>
+                <a:latin typeface="Consolas"/>
+                <a:ea typeface="Consolas"/>
+                <a:cs typeface="Consolas"/>
               </a:defRPr>
             </a:pPr>
             <a:r>
               <a:rPr sz="1275" b="1">
                 <a:solidFill>
-                  <a:srgbClr val="555555"/>
-                </a:solidFill>
-                <a:latin typeface="Arial"/>
-                <a:ea typeface="Arial"/>
-                <a:cs typeface="Arial"/>
-              </a:rPr>
-              <a:t>2 · DEMO</a:t>
-            </a:r>
-          </a:p>
-        </p:txBody>
-      </p:sp>
-      <p:sp>
-        <p:nvSpPr>
-          <p:cNvPr id="2" name="">
-            <a:extLst xmlns:a="http://schemas.openxmlformats.org/drawingml/2006/main">
-              <a:ext uri="{FF2B5EF4-FFF2-40B4-BE49-F238E27FC236}">
-                <a16:creationId xmlns:a16="http://schemas.microsoft.com/office/drawing/2014/main" id="{C2C55419-3D5B-4EC7-8913-97B0C9A4E460}"/>
-              </a:ext>
-            </a:extLst>
-          </p:cNvPr>
-          <p:cNvSpPr>
-            <a:spLocks xmlns:a="http://schemas.openxmlformats.org/drawingml/2006/main" noGrp="1"/>
-          </p:cNvSpPr>
-          <p:nvPr/>
-        </p:nvSpPr>
-        <p:spPr>
-          <a:xfrm xmlns:a="http://schemas.openxmlformats.org/drawingml/2006/main">
-            <a:off x="666750" y="685800"/>
-            <a:ext cx="10763250" cy="714375"/>
-          </a:xfrm>
-          <a:prstGeom xmlns:a="http://schemas.openxmlformats.org/drawingml/2006/main" prst="rect">
-            <a:avLst/>
-          </a:prstGeom>
-          <a:noFill xmlns:a="http://schemas.openxmlformats.org/drawingml/2006/main"/>
-          <a:ln xmlns:a="http://schemas.openxmlformats.org/drawingml/2006/main" w="0">
-            <a:noFill/>
-          </a:ln>
-        </p:spPr>
-        <p:txBody>
-          <a:bodyPr xmlns:a="http://schemas.openxmlformats.org/drawingml/2006/main">
-            <a:noAutofit/>
-          </a:bodyPr>
-          <a:lstStyle xmlns:a="http://schemas.openxmlformats.org/drawingml/2006/main"/>
-          <a:p xmlns:a="http://schemas.openxmlformats.org/drawingml/2006/main">
-            <a:pPr>
-              <a:defRPr sz="3150" b="1">
-                <a:solidFill>
-                  <a:srgbClr val="151515"/>
-                </a:solidFill>
-                <a:latin typeface="Arial"/>
-                <a:ea typeface="Arial"/>
-                <a:cs typeface="Arial"/>
-              </a:defRPr>
-            </a:pPr>
-            <a:r>
-              <a:rPr sz="3150" b="1">
-                <a:solidFill>
-                  <a:srgbClr val="151515"/>
+                  <a:srgbClr val="E5751F"/>
+                </a:solidFill>
+                <a:latin typeface="Consolas"/>
+                <a:ea typeface="Consolas"/>
+                <a:cs typeface="Consolas"/>
+              </a:rPr>
+              <a:t>02  /  DEMO</a:t>
+            </a:r>
+          </a:p>
+        </p:txBody>
+      </p:sp>
+      <p:sp>
+        <p:nvSpPr>
+          <p:cNvPr id="9" name="">
+            <a:extLst xmlns:a="http://schemas.openxmlformats.org/drawingml/2006/main">
+              <a:ext uri="{FF2B5EF4-FFF2-40B4-BE49-F238E27FC236}">
+                <a16:creationId xmlns:a16="http://schemas.microsoft.com/office/drawing/2014/main" id="{8E14EBFF-09D7-492B-A8D8-D6BC1A37098B}"/>
+              </a:ext>
+            </a:extLst>
+          </p:cNvPr>
+          <p:cNvSpPr>
+            <a:spLocks xmlns:a="http://schemas.openxmlformats.org/drawingml/2006/main" noGrp="1"/>
+          </p:cNvSpPr>
+          <p:nvPr/>
+        </p:nvSpPr>
+        <p:spPr>
+          <a:xfrm xmlns:a="http://schemas.openxmlformats.org/drawingml/2006/main">
+            <a:off x="609600" y="990600"/>
+            <a:ext cx="6858000" cy="857250"/>
+          </a:xfrm>
+          <a:prstGeom xmlns:a="http://schemas.openxmlformats.org/drawingml/2006/main" prst="rect">
+            <a:avLst/>
+          </a:prstGeom>
+          <a:noFill xmlns:a="http://schemas.openxmlformats.org/drawingml/2006/main"/>
+          <a:ln xmlns:a="http://schemas.openxmlformats.org/drawingml/2006/main" w="0">
+            <a:noFill/>
+          </a:ln>
+        </p:spPr>
+        <p:txBody>
+          <a:bodyPr xmlns:a="http://schemas.openxmlformats.org/drawingml/2006/main">
+            <a:noAutofit/>
+          </a:bodyPr>
+          <a:lstStyle xmlns:a="http://schemas.openxmlformats.org/drawingml/2006/main"/>
+          <a:p xmlns:a="http://schemas.openxmlformats.org/drawingml/2006/main">
+            <a:pPr>
+              <a:defRPr sz="4350" b="1">
+                <a:solidFill>
+                  <a:srgbClr val="F7F7F4"/>
+                </a:solidFill>
+                <a:latin typeface="Arial"/>
+                <a:ea typeface="Arial"/>
+                <a:cs typeface="Arial"/>
+              </a:defRPr>
+            </a:pPr>
+            <a:r>
+              <a:rPr sz="4350" b="1">
+                <a:solidFill>
+                  <a:srgbClr val="F7F7F4"/>
                 </a:solidFill>
                 <a:latin typeface="Arial"/>
                 <a:ea typeface="Arial"/>
@@ -3044,22 +4023,79 @@
       </p:sp>
       <p:sp>
         <p:nvSpPr>
-          <p:cNvPr id="3" name="">
-            <a:extLst xmlns:a="http://schemas.openxmlformats.org/drawingml/2006/main">
-              <a:ext uri="{FF2B5EF4-FFF2-40B4-BE49-F238E27FC236}">
-                <a16:creationId xmlns:a16="http://schemas.microsoft.com/office/drawing/2014/main" id="{A00071E2-686B-40D5-8F0D-42A0279BD268}"/>
-              </a:ext>
-            </a:extLst>
-          </p:cNvPr>
-          <p:cNvSpPr>
-            <a:spLocks xmlns:a="http://schemas.openxmlformats.org/drawingml/2006/main" noGrp="1"/>
-          </p:cNvSpPr>
-          <p:nvPr/>
-        </p:nvSpPr>
-        <p:spPr>
-          <a:xfrm xmlns:a="http://schemas.openxmlformats.org/drawingml/2006/main">
-            <a:off x="11049000" y="6343650"/>
-            <a:ext cx="476250" cy="238125"/>
+          <p:cNvPr id="10" name="">
+            <a:extLst xmlns:a="http://schemas.openxmlformats.org/drawingml/2006/main">
+              <a:ext uri="{FF2B5EF4-FFF2-40B4-BE49-F238E27FC236}">
+                <a16:creationId xmlns:a16="http://schemas.microsoft.com/office/drawing/2014/main" id="{9F3610C6-D270-4036-AF91-709ABD6EAF7E}"/>
+              </a:ext>
+            </a:extLst>
+          </p:cNvPr>
+          <p:cNvSpPr>
+            <a:spLocks xmlns:a="http://schemas.openxmlformats.org/drawingml/2006/main" noGrp="1"/>
+          </p:cNvSpPr>
+          <p:nvPr/>
+        </p:nvSpPr>
+        <p:spPr>
+          <a:xfrm xmlns:a="http://schemas.openxmlformats.org/drawingml/2006/main">
+            <a:off x="609600" y="6305550"/>
+            <a:ext cx="5715000" cy="285750"/>
+          </a:xfrm>
+          <a:prstGeom xmlns:a="http://schemas.openxmlformats.org/drawingml/2006/main" prst="rect">
+            <a:avLst/>
+          </a:prstGeom>
+          <a:noFill xmlns:a="http://schemas.openxmlformats.org/drawingml/2006/main"/>
+          <a:ln xmlns:a="http://schemas.openxmlformats.org/drawingml/2006/main" w="0">
+            <a:noFill/>
+          </a:ln>
+        </p:spPr>
+        <p:txBody>
+          <a:bodyPr xmlns:a="http://schemas.openxmlformats.org/drawingml/2006/main">
+            <a:noAutofit/>
+          </a:bodyPr>
+          <a:lstStyle xmlns:a="http://schemas.openxmlformats.org/drawingml/2006/main"/>
+          <a:p xmlns:a="http://schemas.openxmlformats.org/drawingml/2006/main">
+            <a:pPr>
+              <a:defRPr sz="1125" b="0">
+                <a:solidFill>
+                  <a:srgbClr val="B7C1CB"/>
+                </a:solidFill>
+                <a:latin typeface="Consolas"/>
+                <a:ea typeface="Consolas"/>
+                <a:cs typeface="Consolas"/>
+              </a:defRPr>
+            </a:pPr>
+            <a:r>
+              <a:rPr sz="1125" b="0">
+                <a:solidFill>
+                  <a:srgbClr val="B7C1CB"/>
+                </a:solidFill>
+                <a:latin typeface="Consolas"/>
+                <a:ea typeface="Consolas"/>
+                <a:cs typeface="Consolas"/>
+              </a:rPr>
+              <a:t>SLAYVT  /  VIRGINIA TECH</a:t>
+            </a:r>
+          </a:p>
+        </p:txBody>
+      </p:sp>
+      <p:sp>
+        <p:nvSpPr>
+          <p:cNvPr id="11" name="">
+            <a:extLst xmlns:a="http://schemas.openxmlformats.org/drawingml/2006/main">
+              <a:ext uri="{FF2B5EF4-FFF2-40B4-BE49-F238E27FC236}">
+                <a16:creationId xmlns:a16="http://schemas.microsoft.com/office/drawing/2014/main" id="{DBF25FF3-2E73-4C06-AA29-DA15BDC85AFB}"/>
+              </a:ext>
+            </a:extLst>
+          </p:cNvPr>
+          <p:cNvSpPr>
+            <a:spLocks xmlns:a="http://schemas.openxmlformats.org/drawingml/2006/main" noGrp="1"/>
+          </p:cNvSpPr>
+          <p:nvPr/>
+        </p:nvSpPr>
+        <p:spPr>
+          <a:xfrm xmlns:a="http://schemas.openxmlformats.org/drawingml/2006/main">
+            <a:off x="10610850" y="6305550"/>
+            <a:ext cx="1095375" cy="276225"/>
           </a:xfrm>
           <a:prstGeom xmlns:a="http://schemas.openxmlformats.org/drawingml/2006/main" prst="rect">
             <a:avLst/>
@@ -3078,192 +4114,707 @@
             <a:pPr>
               <a:defRPr sz="1200" b="0">
                 <a:solidFill>
-                  <a:srgbClr val="555555"/>
-                </a:solidFill>
-                <a:latin typeface="Arial"/>
-                <a:ea typeface="Arial"/>
-                <a:cs typeface="Arial"/>
+                  <a:srgbClr val="B7C1CB"/>
+                </a:solidFill>
+                <a:latin typeface="Consolas"/>
+                <a:ea typeface="Consolas"/>
+                <a:cs typeface="Consolas"/>
               </a:defRPr>
             </a:pPr>
             <a:r>
               <a:rPr sz="1200" b="0">
                 <a:solidFill>
-                  <a:srgbClr val="555555"/>
-                </a:solidFill>
-                <a:latin typeface="Arial"/>
-                <a:ea typeface="Arial"/>
-                <a:cs typeface="Arial"/>
-              </a:rPr>
-              <a:t>05</a:t>
-            </a:r>
-          </a:p>
-        </p:txBody>
-      </p:sp>
-      <p:sp>
-        <p:nvSpPr>
-          <p:cNvPr id="4" name="">
-            <a:extLst xmlns:a="http://schemas.openxmlformats.org/drawingml/2006/main">
-              <a:ext uri="{FF2B5EF4-FFF2-40B4-BE49-F238E27FC236}">
-                <a16:creationId xmlns:a16="http://schemas.microsoft.com/office/drawing/2014/main" id="{0FAB9EF5-3533-4CAA-960A-881F9CD820FC}"/>
-              </a:ext>
-            </a:extLst>
-          </p:cNvPr>
-          <p:cNvSpPr>
-            <a:spLocks xmlns:a="http://schemas.openxmlformats.org/drawingml/2006/main" noGrp="1"/>
-          </p:cNvSpPr>
-          <p:nvPr/>
-        </p:nvSpPr>
-        <p:spPr>
-          <a:xfrm xmlns:a="http://schemas.openxmlformats.org/drawingml/2006/main">
-            <a:off x="857250" y="1752600"/>
-            <a:ext cx="10477500" cy="4286250"/>
-          </a:xfrm>
-          <a:prstGeom xmlns:a="http://schemas.openxmlformats.org/drawingml/2006/main" prst="rect">
-            <a:avLst/>
-          </a:prstGeom>
-          <a:noFill xmlns:a="http://schemas.openxmlformats.org/drawingml/2006/main"/>
-          <a:ln xmlns:a="http://schemas.openxmlformats.org/drawingml/2006/main" w="0">
-            <a:noFill/>
-          </a:ln>
-        </p:spPr>
-        <p:txBody>
-          <a:bodyPr xmlns:a="http://schemas.openxmlformats.org/drawingml/2006/main">
-            <a:noAutofit/>
-          </a:bodyPr>
-          <a:lstStyle xmlns:a="http://schemas.openxmlformats.org/drawingml/2006/main"/>
-          <a:p xmlns:a="http://schemas.openxmlformats.org/drawingml/2006/main">
-            <a:pPr marL="292100" indent="-127000">
-              <a:spcAft>
-                <a:spcPts val="1900"/>
-              </a:spcAft>
-              <a:buChar char="•"/>
-              <a:defRPr sz="2175" b="0">
-                <a:solidFill>
-                  <a:srgbClr val="151515"/>
-                </a:solidFill>
-                <a:latin typeface="Arial"/>
-                <a:ea typeface="Arial"/>
-                <a:cs typeface="Arial"/>
-              </a:defRPr>
-            </a:pPr>
-            <a:r>
-              <a:rPr sz="2175" b="0">
-                <a:solidFill>
-                  <a:srgbClr val="151515"/>
-                </a:solidFill>
-                <a:latin typeface="Arial"/>
-                <a:ea typeface="Arial"/>
-                <a:cs typeface="Arial"/>
-              </a:rPr>
-              <a:t>Start a short run in Test Mode</a:t>
-            </a:r>
-          </a:p>
-          <a:p xmlns:a="http://schemas.openxmlformats.org/drawingml/2006/main">
-            <a:pPr marL="292100" indent="-127000">
-              <a:spcAft>
-                <a:spcPts val="1900"/>
-              </a:spcAft>
-              <a:buChar char="•"/>
-              <a:defRPr sz="2175" b="0">
-                <a:solidFill>
-                  <a:srgbClr val="151515"/>
-                </a:solidFill>
-                <a:latin typeface="Arial"/>
-                <a:ea typeface="Arial"/>
-                <a:cs typeface="Arial"/>
-              </a:defRPr>
-            </a:pPr>
-            <a:r>
-              <a:rPr sz="2175" b="0">
-                <a:solidFill>
-                  <a:srgbClr val="151515"/>
-                </a:solidFill>
-                <a:latin typeface="Arial"/>
-                <a:ea typeface="Arial"/>
-                <a:cs typeface="Arial"/>
-              </a:rPr>
-              <a:t>Show enemy intent, Energy, and card choices</a:t>
-            </a:r>
-          </a:p>
-          <a:p xmlns:a="http://schemas.openxmlformats.org/drawingml/2006/main">
-            <a:pPr marL="292100" indent="-127000">
-              <a:spcAft>
-                <a:spcPts val="1900"/>
-              </a:spcAft>
-              <a:buChar char="•"/>
-              <a:defRPr sz="2175" b="0">
-                <a:solidFill>
-                  <a:srgbClr val="151515"/>
-                </a:solidFill>
-                <a:latin typeface="Arial"/>
-                <a:ea typeface="Arial"/>
-                <a:cs typeface="Arial"/>
-              </a:defRPr>
-            </a:pPr>
-            <a:r>
-              <a:rPr sz="2175" b="0">
-                <a:solidFill>
-                  <a:srgbClr val="151515"/>
-                </a:solidFill>
-                <a:latin typeface="Arial"/>
-                <a:ea typeface="Arial"/>
-                <a:cs typeface="Arial"/>
-              </a:rPr>
-              <a:t>Trigger a temperature reversal</a:t>
-            </a:r>
-          </a:p>
-          <a:p xmlns:a="http://schemas.openxmlformats.org/drawingml/2006/main">
-            <a:pPr marL="292100" indent="-127000">
-              <a:spcAft>
-                <a:spcPts val="1900"/>
-              </a:spcAft>
-              <a:buChar char="•"/>
-              <a:defRPr sz="2175" b="0">
-                <a:solidFill>
-                  <a:srgbClr val="151515"/>
-                </a:solidFill>
-                <a:latin typeface="Arial"/>
-                <a:ea typeface="Arial"/>
-                <a:cs typeface="Arial"/>
-              </a:defRPr>
-            </a:pPr>
-            <a:r>
-              <a:rPr sz="2175" b="0">
-                <a:solidFill>
-                  <a:srgbClr val="151515"/>
-                </a:solidFill>
-                <a:latin typeface="Arial"/>
-                <a:ea typeface="Arial"/>
-                <a:cs typeface="Arial"/>
-              </a:rPr>
-              <a:t>Visit an event or Rest Site</a:t>
-            </a:r>
-          </a:p>
-          <a:p xmlns:a="http://schemas.openxmlformats.org/drawingml/2006/main">
-            <a:pPr marL="292100" indent="-127000">
-              <a:spcAft>
-                <a:spcPts val="1900"/>
-              </a:spcAft>
-              <a:buChar char="•"/>
-              <a:defRPr sz="2175" b="0">
-                <a:solidFill>
-                  <a:srgbClr val="151515"/>
-                </a:solidFill>
-                <a:latin typeface="Arial"/>
-                <a:ea typeface="Arial"/>
-                <a:cs typeface="Arial"/>
-              </a:defRPr>
-            </a:pPr>
-            <a:r>
-              <a:rPr sz="2175" b="0">
-                <a:solidFill>
-                  <a:srgbClr val="151515"/>
-                </a:solidFill>
-                <a:latin typeface="Arial"/>
-                <a:ea typeface="Arial"/>
-                <a:cs typeface="Arial"/>
-              </a:rPr>
-              <a:t>Enter an invalid menu choice and show recovery</a:t>
+                  <a:srgbClr val="B7C1CB"/>
+                </a:solidFill>
+                <a:latin typeface="Consolas"/>
+                <a:ea typeface="Consolas"/>
+                <a:cs typeface="Consolas"/>
+              </a:rPr>
+              <a:t>05 / 09</a:t>
+            </a:r>
+          </a:p>
+        </p:txBody>
+      </p:sp>
+      <p:sp>
+        <p:nvSpPr>
+          <p:cNvPr id="12" name="">
+            <a:extLst xmlns:a="http://schemas.openxmlformats.org/drawingml/2006/main">
+              <a:ext uri="{FF2B5EF4-FFF2-40B4-BE49-F238E27FC236}">
+                <a16:creationId xmlns:a16="http://schemas.microsoft.com/office/drawing/2014/main" id="{82886F29-2355-4376-BAFB-2BD78F105DC0}"/>
+              </a:ext>
+            </a:extLst>
+          </p:cNvPr>
+          <p:cNvSpPr>
+            <a:spLocks xmlns:a="http://schemas.openxmlformats.org/drawingml/2006/main" noGrp="1"/>
+          </p:cNvSpPr>
+          <p:nvPr/>
+        </p:nvSpPr>
+        <p:spPr>
+          <a:xfrm xmlns:a="http://schemas.openxmlformats.org/drawingml/2006/main">
+            <a:off x="666750" y="2085975"/>
+            <a:ext cx="666750" cy="381000"/>
+          </a:xfrm>
+          <a:prstGeom xmlns:a="http://schemas.openxmlformats.org/drawingml/2006/main" prst="rect">
+            <a:avLst/>
+          </a:prstGeom>
+          <a:noFill xmlns:a="http://schemas.openxmlformats.org/drawingml/2006/main"/>
+          <a:ln xmlns:a="http://schemas.openxmlformats.org/drawingml/2006/main" w="0">
+            <a:noFill/>
+          </a:ln>
+        </p:spPr>
+        <p:txBody>
+          <a:bodyPr xmlns:a="http://schemas.openxmlformats.org/drawingml/2006/main">
+            <a:noAutofit/>
+          </a:bodyPr>
+          <a:lstStyle xmlns:a="http://schemas.openxmlformats.org/drawingml/2006/main"/>
+          <a:p xmlns:a="http://schemas.openxmlformats.org/drawingml/2006/main">
+            <a:pPr>
+              <a:defRPr sz="1875" b="1">
+                <a:solidFill>
+                  <a:srgbClr val="E5751F"/>
+                </a:solidFill>
+                <a:latin typeface="Consolas"/>
+                <a:ea typeface="Consolas"/>
+                <a:cs typeface="Consolas"/>
+              </a:defRPr>
+            </a:pPr>
+            <a:r>
+              <a:rPr sz="1875" b="1">
+                <a:solidFill>
+                  <a:srgbClr val="E5751F"/>
+                </a:solidFill>
+                <a:latin typeface="Consolas"/>
+                <a:ea typeface="Consolas"/>
+                <a:cs typeface="Consolas"/>
+              </a:rPr>
+              <a:t>01</a:t>
+            </a:r>
+          </a:p>
+        </p:txBody>
+      </p:sp>
+      <p:sp>
+        <p:nvSpPr>
+          <p:cNvPr id="13" name="">
+            <a:extLst xmlns:a="http://schemas.openxmlformats.org/drawingml/2006/main">
+              <a:ext uri="{FF2B5EF4-FFF2-40B4-BE49-F238E27FC236}">
+                <a16:creationId xmlns:a16="http://schemas.microsoft.com/office/drawing/2014/main" id="{BFEF32EF-5AB5-4BD4-B552-12C9826EE600}"/>
+              </a:ext>
+            </a:extLst>
+          </p:cNvPr>
+          <p:cNvSpPr>
+            <a:spLocks xmlns:a="http://schemas.openxmlformats.org/drawingml/2006/main" noGrp="1"/>
+          </p:cNvSpPr>
+          <p:nvPr/>
+        </p:nvSpPr>
+        <p:spPr>
+          <a:xfrm xmlns:a="http://schemas.openxmlformats.org/drawingml/2006/main">
+            <a:off x="1514475" y="2066925"/>
+            <a:ext cx="5715000" cy="381000"/>
+          </a:xfrm>
+          <a:prstGeom xmlns:a="http://schemas.openxmlformats.org/drawingml/2006/main" prst="rect">
+            <a:avLst/>
+          </a:prstGeom>
+          <a:noFill xmlns:a="http://schemas.openxmlformats.org/drawingml/2006/main"/>
+          <a:ln xmlns:a="http://schemas.openxmlformats.org/drawingml/2006/main" w="0">
+            <a:noFill/>
+          </a:ln>
+        </p:spPr>
+        <p:txBody>
+          <a:bodyPr xmlns:a="http://schemas.openxmlformats.org/drawingml/2006/main">
+            <a:noAutofit/>
+          </a:bodyPr>
+          <a:lstStyle xmlns:a="http://schemas.openxmlformats.org/drawingml/2006/main"/>
+          <a:p xmlns:a="http://schemas.openxmlformats.org/drawingml/2006/main">
+            <a:pPr>
+              <a:defRPr sz="2175" b="1">
+                <a:solidFill>
+                  <a:srgbClr val="F7F7F4"/>
+                </a:solidFill>
+                <a:latin typeface="Arial"/>
+                <a:ea typeface="Arial"/>
+                <a:cs typeface="Arial"/>
+              </a:defRPr>
+            </a:pPr>
+            <a:r>
+              <a:rPr sz="2175" b="1">
+                <a:solidFill>
+                  <a:srgbClr val="F7F7F4"/>
+                </a:solidFill>
+                <a:latin typeface="Arial"/>
+                <a:ea typeface="Arial"/>
+                <a:cs typeface="Arial"/>
+              </a:rPr>
+              <a:t>Start a short run</a:t>
+            </a:r>
+          </a:p>
+        </p:txBody>
+      </p:sp>
+      <p:sp>
+        <p:nvSpPr>
+          <p:cNvPr id="14" name="">
+            <a:extLst xmlns:a="http://schemas.openxmlformats.org/drawingml/2006/main">
+              <a:ext uri="{FF2B5EF4-FFF2-40B4-BE49-F238E27FC236}">
+                <a16:creationId xmlns:a16="http://schemas.microsoft.com/office/drawing/2014/main" id="{08E029CD-7C1C-4394-AFFF-2E942EE43DEC}"/>
+              </a:ext>
+            </a:extLst>
+          </p:cNvPr>
+          <p:cNvSpPr>
+            <a:spLocks xmlns:a="http://schemas.openxmlformats.org/drawingml/2006/main" noGrp="1"/>
+          </p:cNvSpPr>
+          <p:nvPr/>
+        </p:nvSpPr>
+        <p:spPr>
+          <a:xfrm xmlns:a="http://schemas.openxmlformats.org/drawingml/2006/main">
+            <a:off x="1514475" y="2438400"/>
+            <a:ext cx="6000750" cy="409575"/>
+          </a:xfrm>
+          <a:prstGeom xmlns:a="http://schemas.openxmlformats.org/drawingml/2006/main" prst="rect">
+            <a:avLst/>
+          </a:prstGeom>
+          <a:noFill xmlns:a="http://schemas.openxmlformats.org/drawingml/2006/main"/>
+          <a:ln xmlns:a="http://schemas.openxmlformats.org/drawingml/2006/main" w="0">
+            <a:noFill/>
+          </a:ln>
+        </p:spPr>
+        <p:txBody>
+          <a:bodyPr xmlns:a="http://schemas.openxmlformats.org/drawingml/2006/main">
+            <a:noAutofit/>
+          </a:bodyPr>
+          <a:lstStyle xmlns:a="http://schemas.openxmlformats.org/drawingml/2006/main"/>
+          <a:p xmlns:a="http://schemas.openxmlformats.org/drawingml/2006/main">
+            <a:pPr>
+              <a:defRPr sz="1650" b="0">
+                <a:solidFill>
+                  <a:srgbClr val="B7C1CB"/>
+                </a:solidFill>
+                <a:latin typeface="Arial"/>
+                <a:ea typeface="Arial"/>
+                <a:cs typeface="Arial"/>
+              </a:defRPr>
+            </a:pPr>
+            <a:r>
+              <a:rPr sz="1650" b="0">
+                <a:solidFill>
+                  <a:srgbClr val="B7C1CB"/>
+                </a:solidFill>
+                <a:latin typeface="Arial"/>
+                <a:ea typeface="Arial"/>
+                <a:cs typeface="Arial"/>
+              </a:rPr>
+              <a:t>Test Mode and room choices</a:t>
+            </a:r>
+          </a:p>
+        </p:txBody>
+      </p:sp>
+      <p:sp>
+        <p:nvSpPr>
+          <p:cNvPr id="15" name="">
+            <a:extLst xmlns:a="http://schemas.openxmlformats.org/drawingml/2006/main">
+              <a:ext uri="{FF2B5EF4-FFF2-40B4-BE49-F238E27FC236}">
+                <a16:creationId xmlns:a16="http://schemas.microsoft.com/office/drawing/2014/main" id="{8BBA4CA4-FFE3-44AE-A120-42379C2A35E6}"/>
+              </a:ext>
+            </a:extLst>
+          </p:cNvPr>
+          <p:cNvSpPr>
+            <a:spLocks xmlns:a="http://schemas.openxmlformats.org/drawingml/2006/main" noGrp="1"/>
+          </p:cNvSpPr>
+          <p:nvPr/>
+        </p:nvSpPr>
+        <p:spPr>
+          <a:xfrm xmlns:a="http://schemas.openxmlformats.org/drawingml/2006/main">
+            <a:off x="666750" y="3009900"/>
+            <a:ext cx="666750" cy="381000"/>
+          </a:xfrm>
+          <a:prstGeom xmlns:a="http://schemas.openxmlformats.org/drawingml/2006/main" prst="rect">
+            <a:avLst/>
+          </a:prstGeom>
+          <a:noFill xmlns:a="http://schemas.openxmlformats.org/drawingml/2006/main"/>
+          <a:ln xmlns:a="http://schemas.openxmlformats.org/drawingml/2006/main" w="0">
+            <a:noFill/>
+          </a:ln>
+        </p:spPr>
+        <p:txBody>
+          <a:bodyPr xmlns:a="http://schemas.openxmlformats.org/drawingml/2006/main">
+            <a:noAutofit/>
+          </a:bodyPr>
+          <a:lstStyle xmlns:a="http://schemas.openxmlformats.org/drawingml/2006/main"/>
+          <a:p xmlns:a="http://schemas.openxmlformats.org/drawingml/2006/main">
+            <a:pPr>
+              <a:defRPr sz="1875" b="1">
+                <a:solidFill>
+                  <a:srgbClr val="E5751F"/>
+                </a:solidFill>
+                <a:latin typeface="Consolas"/>
+                <a:ea typeface="Consolas"/>
+                <a:cs typeface="Consolas"/>
+              </a:defRPr>
+            </a:pPr>
+            <a:r>
+              <a:rPr sz="1875" b="1">
+                <a:solidFill>
+                  <a:srgbClr val="E5751F"/>
+                </a:solidFill>
+                <a:latin typeface="Consolas"/>
+                <a:ea typeface="Consolas"/>
+                <a:cs typeface="Consolas"/>
+              </a:rPr>
+              <a:t>02</a:t>
+            </a:r>
+          </a:p>
+        </p:txBody>
+      </p:sp>
+      <p:sp>
+        <p:nvSpPr>
+          <p:cNvPr id="16" name="">
+            <a:extLst xmlns:a="http://schemas.openxmlformats.org/drawingml/2006/main">
+              <a:ext uri="{FF2B5EF4-FFF2-40B4-BE49-F238E27FC236}">
+                <a16:creationId xmlns:a16="http://schemas.microsoft.com/office/drawing/2014/main" id="{6A30CF4E-CA33-4DF4-BCB1-25124F723A47}"/>
+              </a:ext>
+            </a:extLst>
+          </p:cNvPr>
+          <p:cNvSpPr>
+            <a:spLocks xmlns:a="http://schemas.openxmlformats.org/drawingml/2006/main" noGrp="1"/>
+          </p:cNvSpPr>
+          <p:nvPr/>
+        </p:nvSpPr>
+        <p:spPr>
+          <a:xfrm xmlns:a="http://schemas.openxmlformats.org/drawingml/2006/main">
+            <a:off x="1514475" y="2990850"/>
+            <a:ext cx="5715000" cy="381000"/>
+          </a:xfrm>
+          <a:prstGeom xmlns:a="http://schemas.openxmlformats.org/drawingml/2006/main" prst="rect">
+            <a:avLst/>
+          </a:prstGeom>
+          <a:noFill xmlns:a="http://schemas.openxmlformats.org/drawingml/2006/main"/>
+          <a:ln xmlns:a="http://schemas.openxmlformats.org/drawingml/2006/main" w="0">
+            <a:noFill/>
+          </a:ln>
+        </p:spPr>
+        <p:txBody>
+          <a:bodyPr xmlns:a="http://schemas.openxmlformats.org/drawingml/2006/main">
+            <a:noAutofit/>
+          </a:bodyPr>
+          <a:lstStyle xmlns:a="http://schemas.openxmlformats.org/drawingml/2006/main"/>
+          <a:p xmlns:a="http://schemas.openxmlformats.org/drawingml/2006/main">
+            <a:pPr>
+              <a:defRPr sz="2175" b="1">
+                <a:solidFill>
+                  <a:srgbClr val="F7F7F4"/>
+                </a:solidFill>
+                <a:latin typeface="Arial"/>
+                <a:ea typeface="Arial"/>
+                <a:cs typeface="Arial"/>
+              </a:defRPr>
+            </a:pPr>
+            <a:r>
+              <a:rPr sz="2175" b="1">
+                <a:solidFill>
+                  <a:srgbClr val="F7F7F4"/>
+                </a:solidFill>
+                <a:latin typeface="Arial"/>
+                <a:ea typeface="Arial"/>
+                <a:cs typeface="Arial"/>
+              </a:rPr>
+              <a:t>Play a battle</a:t>
+            </a:r>
+          </a:p>
+        </p:txBody>
+      </p:sp>
+      <p:sp>
+        <p:nvSpPr>
+          <p:cNvPr id="17" name="">
+            <a:extLst xmlns:a="http://schemas.openxmlformats.org/drawingml/2006/main">
+              <a:ext uri="{FF2B5EF4-FFF2-40B4-BE49-F238E27FC236}">
+                <a16:creationId xmlns:a16="http://schemas.microsoft.com/office/drawing/2014/main" id="{BA25ECB8-A8B7-4165-A116-7A591F9FDDC7}"/>
+              </a:ext>
+            </a:extLst>
+          </p:cNvPr>
+          <p:cNvSpPr>
+            <a:spLocks xmlns:a="http://schemas.openxmlformats.org/drawingml/2006/main" noGrp="1"/>
+          </p:cNvSpPr>
+          <p:nvPr/>
+        </p:nvSpPr>
+        <p:spPr>
+          <a:xfrm xmlns:a="http://schemas.openxmlformats.org/drawingml/2006/main">
+            <a:off x="1514475" y="3362325"/>
+            <a:ext cx="6000750" cy="409575"/>
+          </a:xfrm>
+          <a:prstGeom xmlns:a="http://schemas.openxmlformats.org/drawingml/2006/main" prst="rect">
+            <a:avLst/>
+          </a:prstGeom>
+          <a:noFill xmlns:a="http://schemas.openxmlformats.org/drawingml/2006/main"/>
+          <a:ln xmlns:a="http://schemas.openxmlformats.org/drawingml/2006/main" w="0">
+            <a:noFill/>
+          </a:ln>
+        </p:spPr>
+        <p:txBody>
+          <a:bodyPr xmlns:a="http://schemas.openxmlformats.org/drawingml/2006/main">
+            <a:noAutofit/>
+          </a:bodyPr>
+          <a:lstStyle xmlns:a="http://schemas.openxmlformats.org/drawingml/2006/main"/>
+          <a:p xmlns:a="http://schemas.openxmlformats.org/drawingml/2006/main">
+            <a:pPr>
+              <a:defRPr sz="1650" b="0">
+                <a:solidFill>
+                  <a:srgbClr val="B7C1CB"/>
+                </a:solidFill>
+                <a:latin typeface="Arial"/>
+                <a:ea typeface="Arial"/>
+                <a:cs typeface="Arial"/>
+              </a:defRPr>
+            </a:pPr>
+            <a:r>
+              <a:rPr sz="1650" b="0">
+                <a:solidFill>
+                  <a:srgbClr val="B7C1CB"/>
+                </a:solidFill>
+                <a:latin typeface="Arial"/>
+                <a:ea typeface="Arial"/>
+                <a:cs typeface="Arial"/>
+              </a:rPr>
+              <a:t>Enemy intent, Energy, temperature reversal</a:t>
+            </a:r>
+          </a:p>
+        </p:txBody>
+      </p:sp>
+      <p:sp>
+        <p:nvSpPr>
+          <p:cNvPr id="18" name="">
+            <a:extLst xmlns:a="http://schemas.openxmlformats.org/drawingml/2006/main">
+              <a:ext uri="{FF2B5EF4-FFF2-40B4-BE49-F238E27FC236}">
+                <a16:creationId xmlns:a16="http://schemas.microsoft.com/office/drawing/2014/main" id="{680F736E-713E-4DC6-92F9-81C98D37D46D}"/>
+              </a:ext>
+            </a:extLst>
+          </p:cNvPr>
+          <p:cNvSpPr>
+            <a:spLocks xmlns:a="http://schemas.openxmlformats.org/drawingml/2006/main" noGrp="1"/>
+          </p:cNvSpPr>
+          <p:nvPr/>
+        </p:nvSpPr>
+        <p:spPr>
+          <a:xfrm xmlns:a="http://schemas.openxmlformats.org/drawingml/2006/main">
+            <a:off x="666750" y="3933825"/>
+            <a:ext cx="666750" cy="381000"/>
+          </a:xfrm>
+          <a:prstGeom xmlns:a="http://schemas.openxmlformats.org/drawingml/2006/main" prst="rect">
+            <a:avLst/>
+          </a:prstGeom>
+          <a:noFill xmlns:a="http://schemas.openxmlformats.org/drawingml/2006/main"/>
+          <a:ln xmlns:a="http://schemas.openxmlformats.org/drawingml/2006/main" w="0">
+            <a:noFill/>
+          </a:ln>
+        </p:spPr>
+        <p:txBody>
+          <a:bodyPr xmlns:a="http://schemas.openxmlformats.org/drawingml/2006/main">
+            <a:noAutofit/>
+          </a:bodyPr>
+          <a:lstStyle xmlns:a="http://schemas.openxmlformats.org/drawingml/2006/main"/>
+          <a:p xmlns:a="http://schemas.openxmlformats.org/drawingml/2006/main">
+            <a:pPr>
+              <a:defRPr sz="1875" b="1">
+                <a:solidFill>
+                  <a:srgbClr val="E5751F"/>
+                </a:solidFill>
+                <a:latin typeface="Consolas"/>
+                <a:ea typeface="Consolas"/>
+                <a:cs typeface="Consolas"/>
+              </a:defRPr>
+            </a:pPr>
+            <a:r>
+              <a:rPr sz="1875" b="1">
+                <a:solidFill>
+                  <a:srgbClr val="E5751F"/>
+                </a:solidFill>
+                <a:latin typeface="Consolas"/>
+                <a:ea typeface="Consolas"/>
+                <a:cs typeface="Consolas"/>
+              </a:rPr>
+              <a:t>03</a:t>
+            </a:r>
+          </a:p>
+        </p:txBody>
+      </p:sp>
+      <p:sp>
+        <p:nvSpPr>
+          <p:cNvPr id="19" name="">
+            <a:extLst xmlns:a="http://schemas.openxmlformats.org/drawingml/2006/main">
+              <a:ext uri="{FF2B5EF4-FFF2-40B4-BE49-F238E27FC236}">
+                <a16:creationId xmlns:a16="http://schemas.microsoft.com/office/drawing/2014/main" id="{9F2522E2-026B-4997-B956-A541D1D1745B}"/>
+              </a:ext>
+            </a:extLst>
+          </p:cNvPr>
+          <p:cNvSpPr>
+            <a:spLocks xmlns:a="http://schemas.openxmlformats.org/drawingml/2006/main" noGrp="1"/>
+          </p:cNvSpPr>
+          <p:nvPr/>
+        </p:nvSpPr>
+        <p:spPr>
+          <a:xfrm xmlns:a="http://schemas.openxmlformats.org/drawingml/2006/main">
+            <a:off x="1514475" y="3914775"/>
+            <a:ext cx="5715000" cy="381000"/>
+          </a:xfrm>
+          <a:prstGeom xmlns:a="http://schemas.openxmlformats.org/drawingml/2006/main" prst="rect">
+            <a:avLst/>
+          </a:prstGeom>
+          <a:noFill xmlns:a="http://schemas.openxmlformats.org/drawingml/2006/main"/>
+          <a:ln xmlns:a="http://schemas.openxmlformats.org/drawingml/2006/main" w="0">
+            <a:noFill/>
+          </a:ln>
+        </p:spPr>
+        <p:txBody>
+          <a:bodyPr xmlns:a="http://schemas.openxmlformats.org/drawingml/2006/main">
+            <a:noAutofit/>
+          </a:bodyPr>
+          <a:lstStyle xmlns:a="http://schemas.openxmlformats.org/drawingml/2006/main"/>
+          <a:p xmlns:a="http://schemas.openxmlformats.org/drawingml/2006/main">
+            <a:pPr>
+              <a:defRPr sz="2175" b="1">
+                <a:solidFill>
+                  <a:srgbClr val="F7F7F4"/>
+                </a:solidFill>
+                <a:latin typeface="Arial"/>
+                <a:ea typeface="Arial"/>
+                <a:cs typeface="Arial"/>
+              </a:defRPr>
+            </a:pPr>
+            <a:r>
+              <a:rPr sz="2175" b="1">
+                <a:solidFill>
+                  <a:srgbClr val="F7F7F4"/>
+                </a:solidFill>
+                <a:latin typeface="Arial"/>
+                <a:ea typeface="Arial"/>
+                <a:cs typeface="Arial"/>
+              </a:rPr>
+              <a:t>Make a room choice</a:t>
+            </a:r>
+          </a:p>
+        </p:txBody>
+      </p:sp>
+      <p:sp>
+        <p:nvSpPr>
+          <p:cNvPr id="20" name="">
+            <a:extLst xmlns:a="http://schemas.openxmlformats.org/drawingml/2006/main">
+              <a:ext uri="{FF2B5EF4-FFF2-40B4-BE49-F238E27FC236}">
+                <a16:creationId xmlns:a16="http://schemas.microsoft.com/office/drawing/2014/main" id="{2B280C4E-6CD7-49C2-B6B1-BAAD8A197318}"/>
+              </a:ext>
+            </a:extLst>
+          </p:cNvPr>
+          <p:cNvSpPr>
+            <a:spLocks xmlns:a="http://schemas.openxmlformats.org/drawingml/2006/main" noGrp="1"/>
+          </p:cNvSpPr>
+          <p:nvPr/>
+        </p:nvSpPr>
+        <p:spPr>
+          <a:xfrm xmlns:a="http://schemas.openxmlformats.org/drawingml/2006/main">
+            <a:off x="1514475" y="4286250"/>
+            <a:ext cx="6000750" cy="409575"/>
+          </a:xfrm>
+          <a:prstGeom xmlns:a="http://schemas.openxmlformats.org/drawingml/2006/main" prst="rect">
+            <a:avLst/>
+          </a:prstGeom>
+          <a:noFill xmlns:a="http://schemas.openxmlformats.org/drawingml/2006/main"/>
+          <a:ln xmlns:a="http://schemas.openxmlformats.org/drawingml/2006/main" w="0">
+            <a:noFill/>
+          </a:ln>
+        </p:spPr>
+        <p:txBody>
+          <a:bodyPr xmlns:a="http://schemas.openxmlformats.org/drawingml/2006/main">
+            <a:noAutofit/>
+          </a:bodyPr>
+          <a:lstStyle xmlns:a="http://schemas.openxmlformats.org/drawingml/2006/main"/>
+          <a:p xmlns:a="http://schemas.openxmlformats.org/drawingml/2006/main">
+            <a:pPr>
+              <a:defRPr sz="1650" b="0">
+                <a:solidFill>
+                  <a:srgbClr val="B7C1CB"/>
+                </a:solidFill>
+                <a:latin typeface="Arial"/>
+                <a:ea typeface="Arial"/>
+                <a:cs typeface="Arial"/>
+              </a:defRPr>
+            </a:pPr>
+            <a:r>
+              <a:rPr sz="1650" b="0">
+                <a:solidFill>
+                  <a:srgbClr val="B7C1CB"/>
+                </a:solidFill>
+                <a:latin typeface="Arial"/>
+                <a:ea typeface="Arial"/>
+                <a:cs typeface="Arial"/>
+              </a:rPr>
+              <a:t>An event or a Rest Site</a:t>
+            </a:r>
+          </a:p>
+        </p:txBody>
+      </p:sp>
+      <p:sp>
+        <p:nvSpPr>
+          <p:cNvPr id="21" name="">
+            <a:extLst xmlns:a="http://schemas.openxmlformats.org/drawingml/2006/main">
+              <a:ext uri="{FF2B5EF4-FFF2-40B4-BE49-F238E27FC236}">
+                <a16:creationId xmlns:a16="http://schemas.microsoft.com/office/drawing/2014/main" id="{BB5A000F-F027-46AA-938C-0C21692E92C2}"/>
+              </a:ext>
+            </a:extLst>
+          </p:cNvPr>
+          <p:cNvSpPr>
+            <a:spLocks xmlns:a="http://schemas.openxmlformats.org/drawingml/2006/main" noGrp="1"/>
+          </p:cNvSpPr>
+          <p:nvPr/>
+        </p:nvSpPr>
+        <p:spPr>
+          <a:xfrm xmlns:a="http://schemas.openxmlformats.org/drawingml/2006/main">
+            <a:off x="666750" y="4857750"/>
+            <a:ext cx="666750" cy="381000"/>
+          </a:xfrm>
+          <a:prstGeom xmlns:a="http://schemas.openxmlformats.org/drawingml/2006/main" prst="rect">
+            <a:avLst/>
+          </a:prstGeom>
+          <a:noFill xmlns:a="http://schemas.openxmlformats.org/drawingml/2006/main"/>
+          <a:ln xmlns:a="http://schemas.openxmlformats.org/drawingml/2006/main" w="0">
+            <a:noFill/>
+          </a:ln>
+        </p:spPr>
+        <p:txBody>
+          <a:bodyPr xmlns:a="http://schemas.openxmlformats.org/drawingml/2006/main">
+            <a:noAutofit/>
+          </a:bodyPr>
+          <a:lstStyle xmlns:a="http://schemas.openxmlformats.org/drawingml/2006/main"/>
+          <a:p xmlns:a="http://schemas.openxmlformats.org/drawingml/2006/main">
+            <a:pPr>
+              <a:defRPr sz="1875" b="1">
+                <a:solidFill>
+                  <a:srgbClr val="E5751F"/>
+                </a:solidFill>
+                <a:latin typeface="Consolas"/>
+                <a:ea typeface="Consolas"/>
+                <a:cs typeface="Consolas"/>
+              </a:defRPr>
+            </a:pPr>
+            <a:r>
+              <a:rPr sz="1875" b="1">
+                <a:solidFill>
+                  <a:srgbClr val="E5751F"/>
+                </a:solidFill>
+                <a:latin typeface="Consolas"/>
+                <a:ea typeface="Consolas"/>
+                <a:cs typeface="Consolas"/>
+              </a:rPr>
+              <a:t>04</a:t>
+            </a:r>
+          </a:p>
+        </p:txBody>
+      </p:sp>
+      <p:sp>
+        <p:nvSpPr>
+          <p:cNvPr id="22" name="">
+            <a:extLst xmlns:a="http://schemas.openxmlformats.org/drawingml/2006/main">
+              <a:ext uri="{FF2B5EF4-FFF2-40B4-BE49-F238E27FC236}">
+                <a16:creationId xmlns:a16="http://schemas.microsoft.com/office/drawing/2014/main" id="{02E82293-B6B4-431C-8B3F-D290857573EC}"/>
+              </a:ext>
+            </a:extLst>
+          </p:cNvPr>
+          <p:cNvSpPr>
+            <a:spLocks xmlns:a="http://schemas.openxmlformats.org/drawingml/2006/main" noGrp="1"/>
+          </p:cNvSpPr>
+          <p:nvPr/>
+        </p:nvSpPr>
+        <p:spPr>
+          <a:xfrm xmlns:a="http://schemas.openxmlformats.org/drawingml/2006/main">
+            <a:off x="1514475" y="4838700"/>
+            <a:ext cx="5715000" cy="381000"/>
+          </a:xfrm>
+          <a:prstGeom xmlns:a="http://schemas.openxmlformats.org/drawingml/2006/main" prst="rect">
+            <a:avLst/>
+          </a:prstGeom>
+          <a:noFill xmlns:a="http://schemas.openxmlformats.org/drawingml/2006/main"/>
+          <a:ln xmlns:a="http://schemas.openxmlformats.org/drawingml/2006/main" w="0">
+            <a:noFill/>
+          </a:ln>
+        </p:spPr>
+        <p:txBody>
+          <a:bodyPr xmlns:a="http://schemas.openxmlformats.org/drawingml/2006/main">
+            <a:noAutofit/>
+          </a:bodyPr>
+          <a:lstStyle xmlns:a="http://schemas.openxmlformats.org/drawingml/2006/main"/>
+          <a:p xmlns:a="http://schemas.openxmlformats.org/drawingml/2006/main">
+            <a:pPr>
+              <a:defRPr sz="2175" b="1">
+                <a:solidFill>
+                  <a:srgbClr val="F7F7F4"/>
+                </a:solidFill>
+                <a:latin typeface="Arial"/>
+                <a:ea typeface="Arial"/>
+                <a:cs typeface="Arial"/>
+              </a:defRPr>
+            </a:pPr>
+            <a:r>
+              <a:rPr sz="2175" b="1">
+                <a:solidFill>
+                  <a:srgbClr val="F7F7F4"/>
+                </a:solidFill>
+                <a:latin typeface="Arial"/>
+                <a:ea typeface="Arial"/>
+                <a:cs typeface="Arial"/>
+              </a:rPr>
+              <a:t>Try an invalid input</a:t>
+            </a:r>
+          </a:p>
+        </p:txBody>
+      </p:sp>
+      <p:sp>
+        <p:nvSpPr>
+          <p:cNvPr id="23" name="">
+            <a:extLst xmlns:a="http://schemas.openxmlformats.org/drawingml/2006/main">
+              <a:ext uri="{FF2B5EF4-FFF2-40B4-BE49-F238E27FC236}">
+                <a16:creationId xmlns:a16="http://schemas.microsoft.com/office/drawing/2014/main" id="{B49029E9-857B-40EF-9C81-A330FE20A412}"/>
+              </a:ext>
+            </a:extLst>
+          </p:cNvPr>
+          <p:cNvSpPr>
+            <a:spLocks xmlns:a="http://schemas.openxmlformats.org/drawingml/2006/main" noGrp="1"/>
+          </p:cNvSpPr>
+          <p:nvPr/>
+        </p:nvSpPr>
+        <p:spPr>
+          <a:xfrm xmlns:a="http://schemas.openxmlformats.org/drawingml/2006/main">
+            <a:off x="1514475" y="5210175"/>
+            <a:ext cx="6000750" cy="409575"/>
+          </a:xfrm>
+          <a:prstGeom xmlns:a="http://schemas.openxmlformats.org/drawingml/2006/main" prst="rect">
+            <a:avLst/>
+          </a:prstGeom>
+          <a:noFill xmlns:a="http://schemas.openxmlformats.org/drawingml/2006/main"/>
+          <a:ln xmlns:a="http://schemas.openxmlformats.org/drawingml/2006/main" w="0">
+            <a:noFill/>
+          </a:ln>
+        </p:spPr>
+        <p:txBody>
+          <a:bodyPr xmlns:a="http://schemas.openxmlformats.org/drawingml/2006/main">
+            <a:noAutofit/>
+          </a:bodyPr>
+          <a:lstStyle xmlns:a="http://schemas.openxmlformats.org/drawingml/2006/main"/>
+          <a:p xmlns:a="http://schemas.openxmlformats.org/drawingml/2006/main">
+            <a:pPr>
+              <a:defRPr sz="1650" b="0">
+                <a:solidFill>
+                  <a:srgbClr val="B7C1CB"/>
+                </a:solidFill>
+                <a:latin typeface="Arial"/>
+                <a:ea typeface="Arial"/>
+                <a:cs typeface="Arial"/>
+              </a:defRPr>
+            </a:pPr>
+            <a:r>
+              <a:rPr sz="1650" b="0">
+                <a:solidFill>
+                  <a:srgbClr val="B7C1CB"/>
+                </a:solidFill>
+                <a:latin typeface="Arial"/>
+                <a:ea typeface="Arial"/>
+                <a:cs typeface="Arial"/>
+              </a:rPr>
+              <a:t>Show the menu recovering</a:t>
             </a:r>
           </a:p>
         </p:txBody>
@@ -3313,43 +4864,44 @@
         </p:nvSpPr>
         <p:spPr>
           <a:xfrm xmlns:a="http://schemas.openxmlformats.org/drawingml/2006/main">
-            <a:off x="666750" y="266700"/>
-            <a:ext cx="10668000" cy="304800"/>
-          </a:xfrm>
-          <a:prstGeom xmlns:a="http://schemas.openxmlformats.org/drawingml/2006/main" prst="rect">
-            <a:avLst/>
-          </a:prstGeom>
-          <a:noFill xmlns:a="http://schemas.openxmlformats.org/drawingml/2006/main"/>
-          <a:ln xmlns:a="http://schemas.openxmlformats.org/drawingml/2006/main" w="0">
-            <a:noFill/>
-          </a:ln>
-        </p:spPr>
-        <p:txBody>
-          <a:bodyPr xmlns:a="http://schemas.openxmlformats.org/drawingml/2006/main">
-            <a:noAutofit/>
-          </a:bodyPr>
-          <a:lstStyle xmlns:a="http://schemas.openxmlformats.org/drawingml/2006/main"/>
-          <a:p xmlns:a="http://schemas.openxmlformats.org/drawingml/2006/main">
-            <a:pPr>
+            <a:off x="609600" y="304800"/>
+            <a:ext cx="10096500" cy="285750"/>
+          </a:xfrm>
+          <a:prstGeom xmlns:a="http://schemas.openxmlformats.org/drawingml/2006/main" prst="rect">
+            <a:avLst/>
+          </a:prstGeom>
+          <a:noFill xmlns:a="http://schemas.openxmlformats.org/drawingml/2006/main"/>
+          <a:ln xmlns:a="http://schemas.openxmlformats.org/drawingml/2006/main" w="0">
+            <a:noFill/>
+          </a:ln>
+        </p:spPr>
+        <p:txBody>
+          <a:bodyPr xmlns:a="http://schemas.openxmlformats.org/drawingml/2006/main">
+            <a:noAutofit/>
+          </a:bodyPr>
+          <a:lstStyle xmlns:a="http://schemas.openxmlformats.org/drawingml/2006/main"/>
+          <a:p xmlns:a="http://schemas.openxmlformats.org/drawingml/2006/main">
+            <a:pPr>
+              <a:buNone/>
               <a:defRPr sz="1275" b="1">
                 <a:solidFill>
-                  <a:srgbClr val="555555"/>
-                </a:solidFill>
-                <a:latin typeface="Arial"/>
-                <a:ea typeface="Arial"/>
-                <a:cs typeface="Arial"/>
+                  <a:srgbClr val="C64600"/>
+                </a:solidFill>
+                <a:latin typeface="Consolas"/>
+                <a:ea typeface="Consolas"/>
+                <a:cs typeface="Consolas"/>
               </a:defRPr>
             </a:pPr>
             <a:r>
               <a:rPr sz="1275" b="1">
                 <a:solidFill>
-                  <a:srgbClr val="555555"/>
-                </a:solidFill>
-                <a:latin typeface="Arial"/>
-                <a:ea typeface="Arial"/>
-                <a:cs typeface="Arial"/>
-              </a:rPr>
-              <a:t>3 · REFLECTION</a:t>
+                  <a:srgbClr val="C64600"/>
+                </a:solidFill>
+                <a:latin typeface="Consolas"/>
+                <a:ea typeface="Consolas"/>
+                <a:cs typeface="Consolas"/>
+              </a:rPr>
+              <a:t>03  /  REFLECTION</a:t>
             </a:r>
           </a:p>
         </p:txBody>
@@ -3370,37 +4922,38 @@
         </p:nvSpPr>
         <p:spPr>
           <a:xfrm xmlns:a="http://schemas.openxmlformats.org/drawingml/2006/main">
-            <a:off x="666750" y="685800"/>
-            <a:ext cx="10763250" cy="714375"/>
-          </a:xfrm>
-          <a:prstGeom xmlns:a="http://schemas.openxmlformats.org/drawingml/2006/main" prst="rect">
-            <a:avLst/>
-          </a:prstGeom>
-          <a:noFill xmlns:a="http://schemas.openxmlformats.org/drawingml/2006/main"/>
-          <a:ln xmlns:a="http://schemas.openxmlformats.org/drawingml/2006/main" w="0">
-            <a:noFill/>
-          </a:ln>
-        </p:spPr>
-        <p:txBody>
-          <a:bodyPr xmlns:a="http://schemas.openxmlformats.org/drawingml/2006/main">
-            <a:noAutofit/>
-          </a:bodyPr>
-          <a:lstStyle xmlns:a="http://schemas.openxmlformats.org/drawingml/2006/main"/>
-          <a:p xmlns:a="http://schemas.openxmlformats.org/drawingml/2006/main">
-            <a:pPr>
-              <a:defRPr sz="3150" b="1">
-                <a:solidFill>
-                  <a:srgbClr val="151515"/>
-                </a:solidFill>
-                <a:latin typeface="Arial"/>
-                <a:ea typeface="Arial"/>
-                <a:cs typeface="Arial"/>
-              </a:defRPr>
-            </a:pPr>
-            <a:r>
-              <a:rPr sz="3150" b="1">
-                <a:solidFill>
-                  <a:srgbClr val="151515"/>
+            <a:off x="609600" y="781050"/>
+            <a:ext cx="10906125" cy="809625"/>
+          </a:xfrm>
+          <a:prstGeom xmlns:a="http://schemas.openxmlformats.org/drawingml/2006/main" prst="rect">
+            <a:avLst/>
+          </a:prstGeom>
+          <a:noFill xmlns:a="http://schemas.openxmlformats.org/drawingml/2006/main"/>
+          <a:ln xmlns:a="http://schemas.openxmlformats.org/drawingml/2006/main" w="0">
+            <a:noFill/>
+          </a:ln>
+        </p:spPr>
+        <p:txBody>
+          <a:bodyPr xmlns:a="http://schemas.openxmlformats.org/drawingml/2006/main">
+            <a:noAutofit/>
+          </a:bodyPr>
+          <a:lstStyle xmlns:a="http://schemas.openxmlformats.org/drawingml/2006/main"/>
+          <a:p xmlns:a="http://schemas.openxmlformats.org/drawingml/2006/main">
+            <a:pPr>
+              <a:buNone/>
+              <a:defRPr sz="3450" b="1">
+                <a:solidFill>
+                  <a:srgbClr val="17212B"/>
+                </a:solidFill>
+                <a:latin typeface="Arial"/>
+                <a:ea typeface="Arial"/>
+                <a:cs typeface="Arial"/>
+              </a:defRPr>
+            </a:pPr>
+            <a:r>
+              <a:rPr sz="3450" b="1">
+                <a:solidFill>
+                  <a:srgbClr val="17212B"/>
                 </a:solidFill>
                 <a:latin typeface="Arial"/>
                 <a:ea typeface="Arial"/>
@@ -3427,158 +4980,512 @@
         </p:nvSpPr>
         <p:spPr>
           <a:xfrm xmlns:a="http://schemas.openxmlformats.org/drawingml/2006/main">
-            <a:off x="11049000" y="6343650"/>
-            <a:ext cx="476250" cy="238125"/>
-          </a:xfrm>
-          <a:prstGeom xmlns:a="http://schemas.openxmlformats.org/drawingml/2006/main" prst="rect">
-            <a:avLst/>
-          </a:prstGeom>
-          <a:noFill xmlns:a="http://schemas.openxmlformats.org/drawingml/2006/main"/>
-          <a:ln xmlns:a="http://schemas.openxmlformats.org/drawingml/2006/main" w="0">
-            <a:noFill/>
-          </a:ln>
-        </p:spPr>
-        <p:txBody>
-          <a:bodyPr xmlns:a="http://schemas.openxmlformats.org/drawingml/2006/main">
-            <a:noAutofit/>
-          </a:bodyPr>
-          <a:lstStyle xmlns:a="http://schemas.openxmlformats.org/drawingml/2006/main"/>
-          <a:p xmlns:a="http://schemas.openxmlformats.org/drawingml/2006/main">
-            <a:pPr>
+            <a:off x="10610850" y="6305550"/>
+            <a:ext cx="1095375" cy="276225"/>
+          </a:xfrm>
+          <a:prstGeom xmlns:a="http://schemas.openxmlformats.org/drawingml/2006/main" prst="rect">
+            <a:avLst/>
+          </a:prstGeom>
+          <a:noFill xmlns:a="http://schemas.openxmlformats.org/drawingml/2006/main"/>
+          <a:ln xmlns:a="http://schemas.openxmlformats.org/drawingml/2006/main" w="0">
+            <a:noFill/>
+          </a:ln>
+        </p:spPr>
+        <p:txBody>
+          <a:bodyPr xmlns:a="http://schemas.openxmlformats.org/drawingml/2006/main">
+            <a:noAutofit/>
+          </a:bodyPr>
+          <a:lstStyle xmlns:a="http://schemas.openxmlformats.org/drawingml/2006/main"/>
+          <a:p xmlns:a="http://schemas.openxmlformats.org/drawingml/2006/main">
+            <a:pPr>
+              <a:buNone/>
               <a:defRPr sz="1200" b="0">
                 <a:solidFill>
-                  <a:srgbClr val="555555"/>
-                </a:solidFill>
-                <a:latin typeface="Arial"/>
-                <a:ea typeface="Arial"/>
-                <a:cs typeface="Arial"/>
+                  <a:srgbClr val="59616B"/>
+                </a:solidFill>
+                <a:latin typeface="Consolas"/>
+                <a:ea typeface="Consolas"/>
+                <a:cs typeface="Consolas"/>
               </a:defRPr>
             </a:pPr>
             <a:r>
               <a:rPr sz="1200" b="0">
                 <a:solidFill>
-                  <a:srgbClr val="555555"/>
-                </a:solidFill>
-                <a:latin typeface="Arial"/>
-                <a:ea typeface="Arial"/>
-                <a:cs typeface="Arial"/>
-              </a:rPr>
-              <a:t>06</a:t>
-            </a:r>
-          </a:p>
-        </p:txBody>
-      </p:sp>
-      <p:sp>
-        <p:nvSpPr>
-          <p:cNvPr id="4" name="">
-            <a:extLst xmlns:a="http://schemas.openxmlformats.org/drawingml/2006/main">
-              <a:ext uri="{FF2B5EF4-FFF2-40B4-BE49-F238E27FC236}">
-                <a16:creationId xmlns:a16="http://schemas.microsoft.com/office/drawing/2014/main" id="{77322D76-6210-4379-8CC4-2E9DAA4EA2F8}"/>
-              </a:ext>
-            </a:extLst>
-          </p:cNvPr>
-          <p:cNvSpPr>
-            <a:spLocks xmlns:a="http://schemas.openxmlformats.org/drawingml/2006/main" noGrp="1"/>
-          </p:cNvSpPr>
-          <p:nvPr/>
-        </p:nvSpPr>
-        <p:spPr>
-          <a:xfrm xmlns:a="http://schemas.openxmlformats.org/drawingml/2006/main">
-            <a:off x="857250" y="1876425"/>
-            <a:ext cx="10477500" cy="4286250"/>
-          </a:xfrm>
-          <a:prstGeom xmlns:a="http://schemas.openxmlformats.org/drawingml/2006/main" prst="rect">
-            <a:avLst/>
-          </a:prstGeom>
-          <a:noFill xmlns:a="http://schemas.openxmlformats.org/drawingml/2006/main"/>
-          <a:ln xmlns:a="http://schemas.openxmlformats.org/drawingml/2006/main" w="0">
-            <a:noFill/>
-          </a:ln>
-        </p:spPr>
-        <p:txBody>
-          <a:bodyPr xmlns:a="http://schemas.openxmlformats.org/drawingml/2006/main">
-            <a:noAutofit/>
-          </a:bodyPr>
-          <a:lstStyle xmlns:a="http://schemas.openxmlformats.org/drawingml/2006/main"/>
-          <a:p xmlns:a="http://schemas.openxmlformats.org/drawingml/2006/main">
-            <a:pPr marL="292100" indent="-127000">
-              <a:spcAft>
-                <a:spcPts val="1900"/>
-              </a:spcAft>
-              <a:buChar char="•"/>
-              <a:defRPr sz="2175" b="0">
-                <a:solidFill>
-                  <a:srgbClr val="151515"/>
-                </a:solidFill>
-                <a:latin typeface="Arial"/>
-                <a:ea typeface="Arial"/>
-                <a:cs typeface="Arial"/>
-              </a:defRPr>
-            </a:pPr>
-            <a:r>
-              <a:rPr sz="2175" b="0">
-                <a:solidFill>
-                  <a:srgbClr val="151515"/>
-                </a:solidFill>
-                <a:latin typeface="Arial"/>
-                <a:ea typeface="Arial"/>
-                <a:cs typeface="Arial"/>
-              </a:rPr>
-              <a:t>Scope → spec: “one room” hides several responsibilities</a:t>
-            </a:r>
-          </a:p>
-          <a:p xmlns:a="http://schemas.openxmlformats.org/drawingml/2006/main">
-            <a:pPr marL="292100" indent="-127000">
-              <a:spcAft>
-                <a:spcPts val="1900"/>
-              </a:spcAft>
-              <a:buChar char="•"/>
-              <a:defRPr sz="2175" b="0">
-                <a:solidFill>
-                  <a:srgbClr val="151515"/>
-                </a:solidFill>
-                <a:latin typeface="Arial"/>
-                <a:ea typeface="Arial"/>
-                <a:cs typeface="Arial"/>
-              </a:defRPr>
-            </a:pPr>
-            <a:r>
-              <a:rPr sz="2175" b="0">
-                <a:solidFill>
-                  <a:srgbClr val="151515"/>
-                </a:solidFill>
-                <a:latin typeface="Arial"/>
-                <a:ea typeface="Arial"/>
-                <a:cs typeface="Arial"/>
-              </a:rPr>
-              <a:t>Spec → code: every upgradeable card needs upgraded behavior</a:t>
-            </a:r>
-          </a:p>
-          <a:p xmlns:a="http://schemas.openxmlformats.org/drawingml/2006/main">
-            <a:pPr marL="292100" indent="-127000">
-              <a:spcAft>
-                <a:spcPts val="1900"/>
-              </a:spcAft>
-              <a:buChar char="•"/>
-              <a:defRPr sz="2175" b="0">
-                <a:solidFill>
-                  <a:srgbClr val="151515"/>
-                </a:solidFill>
-                <a:latin typeface="Arial"/>
-                <a:ea typeface="Arial"/>
-                <a:cs typeface="Arial"/>
-              </a:defRPr>
-            </a:pPr>
-            <a:r>
-              <a:rPr sz="2175" b="0">
-                <a:solidFill>
-                  <a:srgbClr val="151515"/>
-                </a:solidFill>
-                <a:latin typeface="Arial"/>
-                <a:ea typeface="Arial"/>
-                <a:cs typeface="Arial"/>
-              </a:rPr>
-              <a:t>Rest Site selection works, but a long deck is tedious to scroll</a:t>
+                  <a:srgbClr val="59616B"/>
+                </a:solidFill>
+                <a:latin typeface="Consolas"/>
+                <a:ea typeface="Consolas"/>
+                <a:cs typeface="Consolas"/>
+              </a:rPr>
+              <a:t>06 / 09</a:t>
+            </a:r>
+          </a:p>
+        </p:txBody>
+      </p:sp>
+      <p:sp>
+        <p:nvSpPr>
+          <p:cNvPr id="6" name="">
+            <a:extLst xmlns:a="http://schemas.openxmlformats.org/drawingml/2006/main">
+              <a:ext uri="{FF2B5EF4-FFF2-40B4-BE49-F238E27FC236}">
+                <a16:creationId xmlns:a16="http://schemas.microsoft.com/office/drawing/2014/main" id="{9F525630-3050-4715-8F77-1AE228FB52B2}"/>
+              </a:ext>
+            </a:extLst>
+          </p:cNvPr>
+          <p:cNvSpPr>
+            <a:spLocks xmlns:a="http://schemas.openxmlformats.org/drawingml/2006/main" noGrp="1"/>
+          </p:cNvSpPr>
+          <p:nvPr/>
+        </p:nvSpPr>
+        <p:spPr>
+          <a:xfrm xmlns:a="http://schemas.openxmlformats.org/drawingml/2006/main">
+            <a:off x="609600" y="6305550"/>
+            <a:ext cx="5715000" cy="285750"/>
+          </a:xfrm>
+          <a:prstGeom xmlns:a="http://schemas.openxmlformats.org/drawingml/2006/main" prst="rect">
+            <a:avLst/>
+          </a:prstGeom>
+          <a:noFill xmlns:a="http://schemas.openxmlformats.org/drawingml/2006/main"/>
+          <a:ln xmlns:a="http://schemas.openxmlformats.org/drawingml/2006/main" w="0">
+            <a:noFill/>
+          </a:ln>
+        </p:spPr>
+        <p:txBody>
+          <a:bodyPr xmlns:a="http://schemas.openxmlformats.org/drawingml/2006/main">
+            <a:noAutofit/>
+          </a:bodyPr>
+          <a:lstStyle xmlns:a="http://schemas.openxmlformats.org/drawingml/2006/main"/>
+          <a:p xmlns:a="http://schemas.openxmlformats.org/drawingml/2006/main">
+            <a:pPr>
+              <a:defRPr sz="1125" b="0">
+                <a:solidFill>
+                  <a:srgbClr val="59616B"/>
+                </a:solidFill>
+                <a:latin typeface="Consolas"/>
+                <a:ea typeface="Consolas"/>
+                <a:cs typeface="Consolas"/>
+              </a:defRPr>
+            </a:pPr>
+            <a:r>
+              <a:rPr sz="1125" b="0">
+                <a:solidFill>
+                  <a:srgbClr val="59616B"/>
+                </a:solidFill>
+                <a:latin typeface="Consolas"/>
+                <a:ea typeface="Consolas"/>
+                <a:cs typeface="Consolas"/>
+              </a:rPr>
+              <a:t>SLAYVT  /  VIRGINIA TECH</a:t>
+            </a:r>
+          </a:p>
+        </p:txBody>
+      </p:sp>
+      <p:sp>
+        <p:nvSpPr>
+          <p:cNvPr id="7" name="">
+            <a:extLst xmlns:a="http://schemas.openxmlformats.org/drawingml/2006/main">
+              <a:ext uri="{FF2B5EF4-FFF2-40B4-BE49-F238E27FC236}">
+                <a16:creationId xmlns:a16="http://schemas.microsoft.com/office/drawing/2014/main" id="{B5439B08-D280-4C23-8EC0-8D898F6F7D78}"/>
+              </a:ext>
+            </a:extLst>
+          </p:cNvPr>
+          <p:cNvSpPr>
+            <a:spLocks xmlns:a="http://schemas.openxmlformats.org/drawingml/2006/main" noGrp="1"/>
+          </p:cNvSpPr>
+          <p:nvPr/>
+        </p:nvSpPr>
+        <p:spPr>
+          <a:xfrm xmlns:a="http://schemas.openxmlformats.org/drawingml/2006/main">
+            <a:off x="657225" y="2076450"/>
+            <a:ext cx="3048000" cy="762000"/>
+          </a:xfrm>
+          <a:prstGeom xmlns:a="http://schemas.openxmlformats.org/drawingml/2006/main" prst="rect">
+            <a:avLst/>
+          </a:prstGeom>
+          <a:noFill xmlns:a="http://schemas.openxmlformats.org/drawingml/2006/main"/>
+          <a:ln xmlns:a="http://schemas.openxmlformats.org/drawingml/2006/main" w="0">
+            <a:noFill/>
+          </a:ln>
+        </p:spPr>
+        <p:txBody>
+          <a:bodyPr xmlns:a="http://schemas.openxmlformats.org/drawingml/2006/main">
+            <a:noAutofit/>
+          </a:bodyPr>
+          <a:lstStyle xmlns:a="http://schemas.openxmlformats.org/drawingml/2006/main"/>
+          <a:p xmlns:a="http://schemas.openxmlformats.org/drawingml/2006/main">
+            <a:pPr>
+              <a:defRPr sz="2250" b="1">
+                <a:solidFill>
+                  <a:srgbClr val="861F41"/>
+                </a:solidFill>
+                <a:latin typeface="Arial"/>
+                <a:ea typeface="Arial"/>
+                <a:cs typeface="Arial"/>
+              </a:defRPr>
+            </a:pPr>
+            <a:r>
+              <a:rPr sz="2250" b="1">
+                <a:solidFill>
+                  <a:srgbClr val="861F41"/>
+                </a:solidFill>
+                <a:latin typeface="Arial"/>
+                <a:ea typeface="Arial"/>
+                <a:cs typeface="Arial"/>
+              </a:rPr>
+              <a:t>Scope to spec</a:t>
+            </a:r>
+          </a:p>
+        </p:txBody>
+      </p:sp>
+      <p:sp>
+        <p:nvSpPr>
+          <p:cNvPr id="8" name="">
+            <a:extLst xmlns:a="http://schemas.openxmlformats.org/drawingml/2006/main">
+              <a:ext uri="{FF2B5EF4-FFF2-40B4-BE49-F238E27FC236}">
+                <a16:creationId xmlns:a16="http://schemas.microsoft.com/office/drawing/2014/main" id="{0ABD09FF-4FD0-4E83-894C-26496DB8ADE2}"/>
+              </a:ext>
+            </a:extLst>
+          </p:cNvPr>
+          <p:cNvSpPr>
+            <a:spLocks xmlns:a="http://schemas.openxmlformats.org/drawingml/2006/main" noGrp="1"/>
+          </p:cNvSpPr>
+          <p:nvPr/>
+        </p:nvSpPr>
+        <p:spPr>
+          <a:xfrm xmlns:a="http://schemas.openxmlformats.org/drawingml/2006/main">
+            <a:off x="4210050" y="2066925"/>
+            <a:ext cx="7086600" cy="952500"/>
+          </a:xfrm>
+          <a:prstGeom xmlns:a="http://schemas.openxmlformats.org/drawingml/2006/main" prst="rect">
+            <a:avLst/>
+          </a:prstGeom>
+          <a:noFill xmlns:a="http://schemas.openxmlformats.org/drawingml/2006/main"/>
+          <a:ln xmlns:a="http://schemas.openxmlformats.org/drawingml/2006/main" w="0">
+            <a:noFill/>
+          </a:ln>
+        </p:spPr>
+        <p:txBody>
+          <a:bodyPr xmlns:a="http://schemas.openxmlformats.org/drawingml/2006/main">
+            <a:noAutofit/>
+          </a:bodyPr>
+          <a:lstStyle xmlns:a="http://schemas.openxmlformats.org/drawingml/2006/main"/>
+          <a:p xmlns:a="http://schemas.openxmlformats.org/drawingml/2006/main">
+            <a:pPr>
+              <a:defRPr sz="2100" b="0">
+                <a:solidFill>
+                  <a:srgbClr val="17212B"/>
+                </a:solidFill>
+                <a:latin typeface="Arial"/>
+                <a:ea typeface="Arial"/>
+                <a:cs typeface="Arial"/>
+              </a:defRPr>
+            </a:pPr>
+            <a:r>
+              <a:rPr sz="2100" b="0">
+                <a:solidFill>
+                  <a:srgbClr val="17212B"/>
+                </a:solidFill>
+                <a:latin typeface="Arial"/>
+                <a:ea typeface="Arial"/>
+                <a:cs typeface="Arial"/>
+              </a:rPr>
+              <a:t>A room needs input handling, state changes,</a:t>
+            </a:r>
+          </a:p>
+          <a:p xmlns:a="http://schemas.openxmlformats.org/drawingml/2006/main">
+            <a:pPr>
+              <a:defRPr sz="2100" b="0">
+                <a:solidFill>
+                  <a:srgbClr val="17212B"/>
+                </a:solidFill>
+                <a:latin typeface="Arial"/>
+                <a:ea typeface="Arial"/>
+                <a:cs typeface="Arial"/>
+              </a:defRPr>
+            </a:pPr>
+            <a:r>
+              <a:rPr sz="2100" b="0">
+                <a:solidFill>
+                  <a:srgbClr val="17212B"/>
+                </a:solidFill>
+                <a:latin typeface="Arial"/>
+                <a:ea typeface="Arial"/>
+                <a:cs typeface="Arial"/>
+              </a:rPr>
+              <a:t>output, and invalid-input checks.</a:t>
+            </a:r>
+          </a:p>
+        </p:txBody>
+      </p:sp>
+      <p:sp>
+        <p:nvSpPr>
+          <p:cNvPr id="9" name="">
+            <a:extLst xmlns:a="http://schemas.openxmlformats.org/drawingml/2006/main">
+              <a:ext uri="{FF2B5EF4-FFF2-40B4-BE49-F238E27FC236}">
+                <a16:creationId xmlns:a16="http://schemas.microsoft.com/office/drawing/2014/main" id="{E8DEF9EA-0D45-4DCE-B1DC-4A2A1F528090}"/>
+              </a:ext>
+            </a:extLst>
+          </p:cNvPr>
+          <p:cNvSpPr>
+            <a:spLocks xmlns:a="http://schemas.openxmlformats.org/drawingml/2006/main" noGrp="1"/>
+          </p:cNvSpPr>
+          <p:nvPr/>
+        </p:nvSpPr>
+        <p:spPr>
+          <a:xfrm xmlns:a="http://schemas.openxmlformats.org/drawingml/2006/main">
+            <a:off x="657225" y="3400425"/>
+            <a:ext cx="3048000" cy="762000"/>
+          </a:xfrm>
+          <a:prstGeom xmlns:a="http://schemas.openxmlformats.org/drawingml/2006/main" prst="rect">
+            <a:avLst/>
+          </a:prstGeom>
+          <a:noFill xmlns:a="http://schemas.openxmlformats.org/drawingml/2006/main"/>
+          <a:ln xmlns:a="http://schemas.openxmlformats.org/drawingml/2006/main" w="0">
+            <a:noFill/>
+          </a:ln>
+        </p:spPr>
+        <p:txBody>
+          <a:bodyPr xmlns:a="http://schemas.openxmlformats.org/drawingml/2006/main">
+            <a:noAutofit/>
+          </a:bodyPr>
+          <a:lstStyle xmlns:a="http://schemas.openxmlformats.org/drawingml/2006/main"/>
+          <a:p xmlns:a="http://schemas.openxmlformats.org/drawingml/2006/main">
+            <a:pPr>
+              <a:defRPr sz="2250" b="1">
+                <a:solidFill>
+                  <a:srgbClr val="861F41"/>
+                </a:solidFill>
+                <a:latin typeface="Arial"/>
+                <a:ea typeface="Arial"/>
+                <a:cs typeface="Arial"/>
+              </a:defRPr>
+            </a:pPr>
+            <a:r>
+              <a:rPr sz="2250" b="1">
+                <a:solidFill>
+                  <a:srgbClr val="861F41"/>
+                </a:solidFill>
+                <a:latin typeface="Arial"/>
+                <a:ea typeface="Arial"/>
+                <a:cs typeface="Arial"/>
+              </a:rPr>
+              <a:t>Spec to code</a:t>
+            </a:r>
+          </a:p>
+        </p:txBody>
+      </p:sp>
+      <p:sp>
+        <p:nvSpPr>
+          <p:cNvPr id="10" name="">
+            <a:extLst xmlns:a="http://schemas.openxmlformats.org/drawingml/2006/main">
+              <a:ext uri="{FF2B5EF4-FFF2-40B4-BE49-F238E27FC236}">
+                <a16:creationId xmlns:a16="http://schemas.microsoft.com/office/drawing/2014/main" id="{EC29DDA5-5CDF-411C-B4D0-D38184703351}"/>
+              </a:ext>
+            </a:extLst>
+          </p:cNvPr>
+          <p:cNvSpPr>
+            <a:spLocks xmlns:a="http://schemas.openxmlformats.org/drawingml/2006/main" noGrp="1"/>
+          </p:cNvSpPr>
+          <p:nvPr/>
+        </p:nvSpPr>
+        <p:spPr>
+          <a:xfrm xmlns:a="http://schemas.openxmlformats.org/drawingml/2006/main">
+            <a:off x="4210050" y="3390900"/>
+            <a:ext cx="7086600" cy="952500"/>
+          </a:xfrm>
+          <a:prstGeom xmlns:a="http://schemas.openxmlformats.org/drawingml/2006/main" prst="rect">
+            <a:avLst/>
+          </a:prstGeom>
+          <a:noFill xmlns:a="http://schemas.openxmlformats.org/drawingml/2006/main"/>
+          <a:ln xmlns:a="http://schemas.openxmlformats.org/drawingml/2006/main" w="0">
+            <a:noFill/>
+          </a:ln>
+        </p:spPr>
+        <p:txBody>
+          <a:bodyPr xmlns:a="http://schemas.openxmlformats.org/drawingml/2006/main">
+            <a:noAutofit/>
+          </a:bodyPr>
+          <a:lstStyle xmlns:a="http://schemas.openxmlformats.org/drawingml/2006/main"/>
+          <a:p xmlns:a="http://schemas.openxmlformats.org/drawingml/2006/main">
+            <a:pPr>
+              <a:defRPr sz="2100" b="0">
+                <a:solidFill>
+                  <a:srgbClr val="17212B"/>
+                </a:solidFill>
+                <a:latin typeface="Arial"/>
+                <a:ea typeface="Arial"/>
+                <a:cs typeface="Arial"/>
+              </a:defRPr>
+            </a:pPr>
+            <a:r>
+              <a:rPr sz="2100" b="0">
+                <a:solidFill>
+                  <a:srgbClr val="17212B"/>
+                </a:solidFill>
+                <a:latin typeface="Arial"/>
+                <a:ea typeface="Arial"/>
+                <a:cs typeface="Arial"/>
+              </a:rPr>
+              <a:t>A two-option Rest Site still needs upgraded</a:t>
+            </a:r>
+          </a:p>
+          <a:p xmlns:a="http://schemas.openxmlformats.org/drawingml/2006/main">
+            <a:pPr>
+              <a:defRPr sz="2100" b="0">
+                <a:solidFill>
+                  <a:srgbClr val="17212B"/>
+                </a:solidFill>
+                <a:latin typeface="Arial"/>
+                <a:ea typeface="Arial"/>
+                <a:cs typeface="Arial"/>
+              </a:defRPr>
+            </a:pPr>
+            <a:r>
+              <a:rPr sz="2100" b="0">
+                <a:solidFill>
+                  <a:srgbClr val="17212B"/>
+                </a:solidFill>
+                <a:latin typeface="Arial"/>
+                <a:ea typeface="Arial"/>
+                <a:cs typeface="Arial"/>
+              </a:rPr>
+              <a:t>behavior for every upgradeable card.</a:t>
+            </a:r>
+          </a:p>
+        </p:txBody>
+      </p:sp>
+      <p:sp>
+        <p:nvSpPr>
+          <p:cNvPr id="11" name="">
+            <a:extLst xmlns:a="http://schemas.openxmlformats.org/drawingml/2006/main">
+              <a:ext uri="{FF2B5EF4-FFF2-40B4-BE49-F238E27FC236}">
+                <a16:creationId xmlns:a16="http://schemas.microsoft.com/office/drawing/2014/main" id="{6134442F-5D04-45D1-B005-2A01DF71C0A5}"/>
+              </a:ext>
+            </a:extLst>
+          </p:cNvPr>
+          <p:cNvSpPr>
+            <a:spLocks xmlns:a="http://schemas.openxmlformats.org/drawingml/2006/main" noGrp="1"/>
+          </p:cNvSpPr>
+          <p:nvPr/>
+        </p:nvSpPr>
+        <p:spPr>
+          <a:xfrm xmlns:a="http://schemas.openxmlformats.org/drawingml/2006/main">
+            <a:off x="657225" y="4724400"/>
+            <a:ext cx="3048000" cy="762000"/>
+          </a:xfrm>
+          <a:prstGeom xmlns:a="http://schemas.openxmlformats.org/drawingml/2006/main" prst="rect">
+            <a:avLst/>
+          </a:prstGeom>
+          <a:noFill xmlns:a="http://schemas.openxmlformats.org/drawingml/2006/main"/>
+          <a:ln xmlns:a="http://schemas.openxmlformats.org/drawingml/2006/main" w="0">
+            <a:noFill/>
+          </a:ln>
+        </p:spPr>
+        <p:txBody>
+          <a:bodyPr xmlns:a="http://schemas.openxmlformats.org/drawingml/2006/main">
+            <a:noAutofit/>
+          </a:bodyPr>
+          <a:lstStyle xmlns:a="http://schemas.openxmlformats.org/drawingml/2006/main"/>
+          <a:p xmlns:a="http://schemas.openxmlformats.org/drawingml/2006/main">
+            <a:pPr>
+              <a:defRPr sz="2250" b="1">
+                <a:solidFill>
+                  <a:srgbClr val="861F41"/>
+                </a:solidFill>
+                <a:latin typeface="Arial"/>
+                <a:ea typeface="Arial"/>
+                <a:cs typeface="Arial"/>
+              </a:defRPr>
+            </a:pPr>
+            <a:r>
+              <a:rPr sz="2250" b="1">
+                <a:solidFill>
+                  <a:srgbClr val="861F41"/>
+                </a:solidFill>
+                <a:latin typeface="Arial"/>
+                <a:ea typeface="Arial"/>
+                <a:cs typeface="Arial"/>
+              </a:rPr>
+              <a:t>UI trade-off</a:t>
+            </a:r>
+          </a:p>
+        </p:txBody>
+      </p:sp>
+      <p:sp>
+        <p:nvSpPr>
+          <p:cNvPr id="12" name="">
+            <a:extLst xmlns:a="http://schemas.openxmlformats.org/drawingml/2006/main">
+              <a:ext uri="{FF2B5EF4-FFF2-40B4-BE49-F238E27FC236}">
+                <a16:creationId xmlns:a16="http://schemas.microsoft.com/office/drawing/2014/main" id="{A9EF607A-FEE6-4CE6-B091-8B5A458059E0}"/>
+              </a:ext>
+            </a:extLst>
+          </p:cNvPr>
+          <p:cNvSpPr>
+            <a:spLocks xmlns:a="http://schemas.openxmlformats.org/drawingml/2006/main" noGrp="1"/>
+          </p:cNvSpPr>
+          <p:nvPr/>
+        </p:nvSpPr>
+        <p:spPr>
+          <a:xfrm xmlns:a="http://schemas.openxmlformats.org/drawingml/2006/main">
+            <a:off x="4210050" y="4714875"/>
+            <a:ext cx="7086600" cy="952500"/>
+          </a:xfrm>
+          <a:prstGeom xmlns:a="http://schemas.openxmlformats.org/drawingml/2006/main" prst="rect">
+            <a:avLst/>
+          </a:prstGeom>
+          <a:noFill xmlns:a="http://schemas.openxmlformats.org/drawingml/2006/main"/>
+          <a:ln xmlns:a="http://schemas.openxmlformats.org/drawingml/2006/main" w="0">
+            <a:noFill/>
+          </a:ln>
+        </p:spPr>
+        <p:txBody>
+          <a:bodyPr xmlns:a="http://schemas.openxmlformats.org/drawingml/2006/main">
+            <a:noAutofit/>
+          </a:bodyPr>
+          <a:lstStyle xmlns:a="http://schemas.openxmlformats.org/drawingml/2006/main"/>
+          <a:p xmlns:a="http://schemas.openxmlformats.org/drawingml/2006/main">
+            <a:pPr>
+              <a:defRPr sz="2100" b="0">
+                <a:solidFill>
+                  <a:srgbClr val="17212B"/>
+                </a:solidFill>
+                <a:latin typeface="Arial"/>
+                <a:ea typeface="Arial"/>
+                <a:cs typeface="Arial"/>
+              </a:defRPr>
+            </a:pPr>
+            <a:r>
+              <a:rPr sz="2100" b="0">
+                <a:solidFill>
+                  <a:srgbClr val="17212B"/>
+                </a:solidFill>
+                <a:latin typeface="Arial"/>
+                <a:ea typeface="Arial"/>
+                <a:cs typeface="Arial"/>
+              </a:rPr>
+              <a:t>The numbered selection works, but large decks</a:t>
+            </a:r>
+          </a:p>
+          <a:p xmlns:a="http://schemas.openxmlformats.org/drawingml/2006/main">
+            <a:pPr>
+              <a:defRPr sz="2100" b="0">
+                <a:solidFill>
+                  <a:srgbClr val="17212B"/>
+                </a:solidFill>
+                <a:latin typeface="Arial"/>
+                <a:ea typeface="Arial"/>
+                <a:cs typeface="Arial"/>
+              </a:defRPr>
+            </a:pPr>
+            <a:r>
+              <a:rPr sz="2100" b="0">
+                <a:solidFill>
+                  <a:srgbClr val="17212B"/>
+                </a:solidFill>
+                <a:latin typeface="Arial"/>
+                <a:ea typeface="Arial"/>
+                <a:cs typeface="Arial"/>
+              </a:rPr>
+              <a:t>make scrolling cumbersome.</a:t>
             </a:r>
           </a:p>
         </p:txBody>
@@ -3628,43 +5535,44 @@
         </p:nvSpPr>
         <p:spPr>
           <a:xfrm xmlns:a="http://schemas.openxmlformats.org/drawingml/2006/main">
-            <a:off x="666750" y="266700"/>
-            <a:ext cx="10668000" cy="304800"/>
-          </a:xfrm>
-          <a:prstGeom xmlns:a="http://schemas.openxmlformats.org/drawingml/2006/main" prst="rect">
-            <a:avLst/>
-          </a:prstGeom>
-          <a:noFill xmlns:a="http://schemas.openxmlformats.org/drawingml/2006/main"/>
-          <a:ln xmlns:a="http://schemas.openxmlformats.org/drawingml/2006/main" w="0">
-            <a:noFill/>
-          </a:ln>
-        </p:spPr>
-        <p:txBody>
-          <a:bodyPr xmlns:a="http://schemas.openxmlformats.org/drawingml/2006/main">
-            <a:noAutofit/>
-          </a:bodyPr>
-          <a:lstStyle xmlns:a="http://schemas.openxmlformats.org/drawingml/2006/main"/>
-          <a:p xmlns:a="http://schemas.openxmlformats.org/drawingml/2006/main">
-            <a:pPr>
+            <a:off x="609600" y="304800"/>
+            <a:ext cx="10096500" cy="285750"/>
+          </a:xfrm>
+          <a:prstGeom xmlns:a="http://schemas.openxmlformats.org/drawingml/2006/main" prst="rect">
+            <a:avLst/>
+          </a:prstGeom>
+          <a:noFill xmlns:a="http://schemas.openxmlformats.org/drawingml/2006/main"/>
+          <a:ln xmlns:a="http://schemas.openxmlformats.org/drawingml/2006/main" w="0">
+            <a:noFill/>
+          </a:ln>
+        </p:spPr>
+        <p:txBody>
+          <a:bodyPr xmlns:a="http://schemas.openxmlformats.org/drawingml/2006/main">
+            <a:noAutofit/>
+          </a:bodyPr>
+          <a:lstStyle xmlns:a="http://schemas.openxmlformats.org/drawingml/2006/main"/>
+          <a:p xmlns:a="http://schemas.openxmlformats.org/drawingml/2006/main">
+            <a:pPr>
+              <a:buNone/>
               <a:defRPr sz="1275" b="1">
                 <a:solidFill>
-                  <a:srgbClr val="555555"/>
-                </a:solidFill>
-                <a:latin typeface="Arial"/>
-                <a:ea typeface="Arial"/>
-                <a:cs typeface="Arial"/>
+                  <a:srgbClr val="C64600"/>
+                </a:solidFill>
+                <a:latin typeface="Consolas"/>
+                <a:ea typeface="Consolas"/>
+                <a:cs typeface="Consolas"/>
               </a:defRPr>
             </a:pPr>
             <a:r>
               <a:rPr sz="1275" b="1">
                 <a:solidFill>
-                  <a:srgbClr val="555555"/>
-                </a:solidFill>
-                <a:latin typeface="Arial"/>
-                <a:ea typeface="Arial"/>
-                <a:cs typeface="Arial"/>
-              </a:rPr>
-              <a:t>3 · REFLECTION</a:t>
+                  <a:srgbClr val="C64600"/>
+                </a:solidFill>
+                <a:latin typeface="Consolas"/>
+                <a:ea typeface="Consolas"/>
+                <a:cs typeface="Consolas"/>
+              </a:rPr>
+              <a:t>03  /  REFLECTION</a:t>
             </a:r>
           </a:p>
         </p:txBody>
@@ -3685,8 +5593,238 @@
         </p:nvSpPr>
         <p:spPr>
           <a:xfrm xmlns:a="http://schemas.openxmlformats.org/drawingml/2006/main">
-            <a:off x="666750" y="685800"/>
-            <a:ext cx="10763250" cy="714375"/>
+            <a:off x="609600" y="781050"/>
+            <a:ext cx="10906125" cy="809625"/>
+          </a:xfrm>
+          <a:prstGeom xmlns:a="http://schemas.openxmlformats.org/drawingml/2006/main" prst="rect">
+            <a:avLst/>
+          </a:prstGeom>
+          <a:noFill xmlns:a="http://schemas.openxmlformats.org/drawingml/2006/main"/>
+          <a:ln xmlns:a="http://schemas.openxmlformats.org/drawingml/2006/main" w="0">
+            <a:noFill/>
+          </a:ln>
+        </p:spPr>
+        <p:txBody>
+          <a:bodyPr xmlns:a="http://schemas.openxmlformats.org/drawingml/2006/main">
+            <a:noAutofit/>
+          </a:bodyPr>
+          <a:lstStyle xmlns:a="http://schemas.openxmlformats.org/drawingml/2006/main"/>
+          <a:p xmlns:a="http://schemas.openxmlformats.org/drawingml/2006/main">
+            <a:pPr>
+              <a:buNone/>
+              <a:defRPr sz="3450" b="1">
+                <a:solidFill>
+                  <a:srgbClr val="17212B"/>
+                </a:solidFill>
+                <a:latin typeface="Arial"/>
+                <a:ea typeface="Arial"/>
+                <a:cs typeface="Arial"/>
+              </a:defRPr>
+            </a:pPr>
+            <a:r>
+              <a:rPr sz="3450" b="1">
+                <a:solidFill>
+                  <a:srgbClr val="17212B"/>
+                </a:solidFill>
+                <a:latin typeface="Arial"/>
+                <a:ea typeface="Arial"/>
+                <a:cs typeface="Arial"/>
+              </a:rPr>
+              <a:t>How our view of scoping changed</a:t>
+            </a:r>
+          </a:p>
+        </p:txBody>
+      </p:sp>
+      <p:sp>
+        <p:nvSpPr>
+          <p:cNvPr id="3" name="">
+            <a:extLst xmlns:a="http://schemas.openxmlformats.org/drawingml/2006/main">
+              <a:ext uri="{FF2B5EF4-FFF2-40B4-BE49-F238E27FC236}">
+                <a16:creationId xmlns:a16="http://schemas.microsoft.com/office/drawing/2014/main" id="{2DE1193D-9AB0-4783-8033-A9AD3B955394}"/>
+              </a:ext>
+            </a:extLst>
+          </p:cNvPr>
+          <p:cNvSpPr>
+            <a:spLocks xmlns:a="http://schemas.openxmlformats.org/drawingml/2006/main" noGrp="1"/>
+          </p:cNvSpPr>
+          <p:nvPr/>
+        </p:nvSpPr>
+        <p:spPr>
+          <a:xfrm xmlns:a="http://schemas.openxmlformats.org/drawingml/2006/main">
+            <a:off x="10610850" y="6305550"/>
+            <a:ext cx="1095375" cy="276225"/>
+          </a:xfrm>
+          <a:prstGeom xmlns:a="http://schemas.openxmlformats.org/drawingml/2006/main" prst="rect">
+            <a:avLst/>
+          </a:prstGeom>
+          <a:noFill xmlns:a="http://schemas.openxmlformats.org/drawingml/2006/main"/>
+          <a:ln xmlns:a="http://schemas.openxmlformats.org/drawingml/2006/main" w="0">
+            <a:noFill/>
+          </a:ln>
+        </p:spPr>
+        <p:txBody>
+          <a:bodyPr xmlns:a="http://schemas.openxmlformats.org/drawingml/2006/main">
+            <a:noAutofit/>
+          </a:bodyPr>
+          <a:lstStyle xmlns:a="http://schemas.openxmlformats.org/drawingml/2006/main"/>
+          <a:p xmlns:a="http://schemas.openxmlformats.org/drawingml/2006/main">
+            <a:pPr>
+              <a:buNone/>
+              <a:defRPr sz="1200" b="0">
+                <a:solidFill>
+                  <a:srgbClr val="59616B"/>
+                </a:solidFill>
+                <a:latin typeface="Consolas"/>
+                <a:ea typeface="Consolas"/>
+                <a:cs typeface="Consolas"/>
+              </a:defRPr>
+            </a:pPr>
+            <a:r>
+              <a:rPr sz="1200" b="0">
+                <a:solidFill>
+                  <a:srgbClr val="59616B"/>
+                </a:solidFill>
+                <a:latin typeface="Consolas"/>
+                <a:ea typeface="Consolas"/>
+                <a:cs typeface="Consolas"/>
+              </a:rPr>
+              <a:t>07 / 09</a:t>
+            </a:r>
+          </a:p>
+        </p:txBody>
+      </p:sp>
+      <p:sp>
+        <p:nvSpPr>
+          <p:cNvPr id="6" name="">
+            <a:extLst xmlns:a="http://schemas.openxmlformats.org/drawingml/2006/main">
+              <a:ext uri="{FF2B5EF4-FFF2-40B4-BE49-F238E27FC236}">
+                <a16:creationId xmlns:a16="http://schemas.microsoft.com/office/drawing/2014/main" id="{8B04D84A-FDC2-4E7A-9C3A-DCB8BE161DE7}"/>
+              </a:ext>
+            </a:extLst>
+          </p:cNvPr>
+          <p:cNvSpPr>
+            <a:spLocks xmlns:a="http://schemas.openxmlformats.org/drawingml/2006/main" noGrp="1"/>
+          </p:cNvSpPr>
+          <p:nvPr/>
+        </p:nvSpPr>
+        <p:spPr>
+          <a:xfrm xmlns:a="http://schemas.openxmlformats.org/drawingml/2006/main">
+            <a:off x="609600" y="6305550"/>
+            <a:ext cx="5715000" cy="285750"/>
+          </a:xfrm>
+          <a:prstGeom xmlns:a="http://schemas.openxmlformats.org/drawingml/2006/main" prst="rect">
+            <a:avLst/>
+          </a:prstGeom>
+          <a:noFill xmlns:a="http://schemas.openxmlformats.org/drawingml/2006/main"/>
+          <a:ln xmlns:a="http://schemas.openxmlformats.org/drawingml/2006/main" w="0">
+            <a:noFill/>
+          </a:ln>
+        </p:spPr>
+        <p:txBody>
+          <a:bodyPr xmlns:a="http://schemas.openxmlformats.org/drawingml/2006/main">
+            <a:noAutofit/>
+          </a:bodyPr>
+          <a:lstStyle xmlns:a="http://schemas.openxmlformats.org/drawingml/2006/main"/>
+          <a:p xmlns:a="http://schemas.openxmlformats.org/drawingml/2006/main">
+            <a:pPr>
+              <a:defRPr sz="1125" b="0">
+                <a:solidFill>
+                  <a:srgbClr val="59616B"/>
+                </a:solidFill>
+                <a:latin typeface="Consolas"/>
+                <a:ea typeface="Consolas"/>
+                <a:cs typeface="Consolas"/>
+              </a:defRPr>
+            </a:pPr>
+            <a:r>
+              <a:rPr sz="1125" b="0">
+                <a:solidFill>
+                  <a:srgbClr val="59616B"/>
+                </a:solidFill>
+                <a:latin typeface="Consolas"/>
+                <a:ea typeface="Consolas"/>
+                <a:cs typeface="Consolas"/>
+              </a:rPr>
+              <a:t>SLAYVT  /  VIRGINIA TECH</a:t>
+            </a:r>
+          </a:p>
+        </p:txBody>
+      </p:sp>
+      <p:sp>
+        <p:nvSpPr>
+          <p:cNvPr id="7" name="">
+            <a:extLst xmlns:a="http://schemas.openxmlformats.org/drawingml/2006/main">
+              <a:ext uri="{FF2B5EF4-FFF2-40B4-BE49-F238E27FC236}">
+                <a16:creationId xmlns:a16="http://schemas.microsoft.com/office/drawing/2014/main" id="{DA9BC811-6651-46F5-8ED4-B6356D898C73}"/>
+              </a:ext>
+            </a:extLst>
+          </p:cNvPr>
+          <p:cNvSpPr>
+            <a:spLocks xmlns:a="http://schemas.openxmlformats.org/drawingml/2006/main" noGrp="1"/>
+          </p:cNvSpPr>
+          <p:nvPr/>
+        </p:nvSpPr>
+        <p:spPr>
+          <a:xfrm xmlns:a="http://schemas.openxmlformats.org/drawingml/2006/main">
+            <a:off x="657225" y="2009775"/>
+            <a:ext cx="4095750" cy="381000"/>
+          </a:xfrm>
+          <a:prstGeom xmlns:a="http://schemas.openxmlformats.org/drawingml/2006/main" prst="rect">
+            <a:avLst/>
+          </a:prstGeom>
+          <a:noFill xmlns:a="http://schemas.openxmlformats.org/drawingml/2006/main"/>
+          <a:ln xmlns:a="http://schemas.openxmlformats.org/drawingml/2006/main" w="0">
+            <a:noFill/>
+          </a:ln>
+        </p:spPr>
+        <p:txBody>
+          <a:bodyPr xmlns:a="http://schemas.openxmlformats.org/drawingml/2006/main">
+            <a:noAutofit/>
+          </a:bodyPr>
+          <a:lstStyle xmlns:a="http://schemas.openxmlformats.org/drawingml/2006/main"/>
+          <a:p xmlns:a="http://schemas.openxmlformats.org/drawingml/2006/main">
+            <a:pPr>
+              <a:defRPr sz="1575" b="1">
+                <a:solidFill>
+                  <a:srgbClr val="59616B"/>
+                </a:solidFill>
+                <a:latin typeface="Consolas"/>
+                <a:ea typeface="Consolas"/>
+                <a:cs typeface="Consolas"/>
+              </a:defRPr>
+            </a:pPr>
+            <a:r>
+              <a:rPr sz="1575" b="1">
+                <a:solidFill>
+                  <a:srgbClr val="59616B"/>
+                </a:solidFill>
+                <a:latin typeface="Consolas"/>
+                <a:ea typeface="Consolas"/>
+                <a:cs typeface="Consolas"/>
+              </a:rPr>
+              <a:t>WEEK 3</a:t>
+            </a:r>
+          </a:p>
+        </p:txBody>
+      </p:sp>
+      <p:sp>
+        <p:nvSpPr>
+          <p:cNvPr id="8" name="">
+            <a:extLst xmlns:a="http://schemas.openxmlformats.org/drawingml/2006/main">
+              <a:ext uri="{FF2B5EF4-FFF2-40B4-BE49-F238E27FC236}">
+                <a16:creationId xmlns:a16="http://schemas.microsoft.com/office/drawing/2014/main" id="{E52AE83A-AEB8-47D4-B57F-B16CBE354E17}"/>
+              </a:ext>
+            </a:extLst>
+          </p:cNvPr>
+          <p:cNvSpPr>
+            <a:spLocks xmlns:a="http://schemas.openxmlformats.org/drawingml/2006/main" noGrp="1"/>
+          </p:cNvSpPr>
+          <p:nvPr/>
+        </p:nvSpPr>
+        <p:spPr>
+          <a:xfrm xmlns:a="http://schemas.openxmlformats.org/drawingml/2006/main">
+            <a:off x="647700" y="2657475"/>
+            <a:ext cx="4572000" cy="1304925"/>
           </a:xfrm>
           <a:prstGeom xmlns:a="http://schemas.openxmlformats.org/drawingml/2006/main" prst="rect">
             <a:avLst/>
@@ -3705,7 +5843,7 @@
             <a:pPr>
               <a:defRPr sz="3150" b="1">
                 <a:solidFill>
-                  <a:srgbClr val="151515"/>
+                  <a:srgbClr val="59616B"/>
                 </a:solidFill>
                 <a:latin typeface="Arial"/>
                 <a:ea typeface="Arial"/>
@@ -3715,212 +5853,345 @@
             <a:r>
               <a:rPr sz="3150" b="1">
                 <a:solidFill>
-                  <a:srgbClr val="151515"/>
-                </a:solidFill>
-                <a:latin typeface="Arial"/>
-                <a:ea typeface="Arial"/>
-                <a:cs typeface="Arial"/>
-              </a:rPr>
-              <a:t>How our view of scoping changed</a:t>
-            </a:r>
-          </a:p>
-        </p:txBody>
-      </p:sp>
-      <p:sp>
-        <p:nvSpPr>
-          <p:cNvPr id="3" name="">
-            <a:extLst xmlns:a="http://schemas.openxmlformats.org/drawingml/2006/main">
-              <a:ext uri="{FF2B5EF4-FFF2-40B4-BE49-F238E27FC236}">
-                <a16:creationId xmlns:a16="http://schemas.microsoft.com/office/drawing/2014/main" id="{2DE1193D-9AB0-4783-8033-A9AD3B955394}"/>
-              </a:ext>
-            </a:extLst>
-          </p:cNvPr>
-          <p:cNvSpPr>
-            <a:spLocks xmlns:a="http://schemas.openxmlformats.org/drawingml/2006/main" noGrp="1"/>
-          </p:cNvSpPr>
-          <p:nvPr/>
-        </p:nvSpPr>
-        <p:spPr>
-          <a:xfrm xmlns:a="http://schemas.openxmlformats.org/drawingml/2006/main">
-            <a:off x="11049000" y="6343650"/>
-            <a:ext cx="476250" cy="238125"/>
-          </a:xfrm>
-          <a:prstGeom xmlns:a="http://schemas.openxmlformats.org/drawingml/2006/main" prst="rect">
-            <a:avLst/>
-          </a:prstGeom>
-          <a:noFill xmlns:a="http://schemas.openxmlformats.org/drawingml/2006/main"/>
-          <a:ln xmlns:a="http://schemas.openxmlformats.org/drawingml/2006/main" w="0">
-            <a:noFill/>
-          </a:ln>
-        </p:spPr>
-        <p:txBody>
-          <a:bodyPr xmlns:a="http://schemas.openxmlformats.org/drawingml/2006/main">
-            <a:noAutofit/>
-          </a:bodyPr>
-          <a:lstStyle xmlns:a="http://schemas.openxmlformats.org/drawingml/2006/main"/>
-          <a:p xmlns:a="http://schemas.openxmlformats.org/drawingml/2006/main">
-            <a:pPr>
-              <a:defRPr sz="1200" b="0">
-                <a:solidFill>
-                  <a:srgbClr val="555555"/>
-                </a:solidFill>
-                <a:latin typeface="Arial"/>
-                <a:ea typeface="Arial"/>
-                <a:cs typeface="Arial"/>
-              </a:defRPr>
-            </a:pPr>
-            <a:r>
-              <a:rPr sz="1200" b="0">
-                <a:solidFill>
-                  <a:srgbClr val="555555"/>
-                </a:solidFill>
-                <a:latin typeface="Arial"/>
-                <a:ea typeface="Arial"/>
-                <a:cs typeface="Arial"/>
-              </a:rPr>
-              <a:t>07</a:t>
-            </a:r>
-          </a:p>
-        </p:txBody>
-      </p:sp>
-      <p:sp>
-        <p:nvSpPr>
-          <p:cNvPr id="4" name="">
-            <a:extLst xmlns:a="http://schemas.openxmlformats.org/drawingml/2006/main">
-              <a:ext uri="{FF2B5EF4-FFF2-40B4-BE49-F238E27FC236}">
-                <a16:creationId xmlns:a16="http://schemas.microsoft.com/office/drawing/2014/main" id="{96E6981F-D77F-4033-9710-439395419A33}"/>
-              </a:ext>
-            </a:extLst>
-          </p:cNvPr>
-          <p:cNvSpPr>
-            <a:spLocks xmlns:a="http://schemas.openxmlformats.org/drawingml/2006/main" noGrp="1"/>
-          </p:cNvSpPr>
-          <p:nvPr/>
-        </p:nvSpPr>
-        <p:spPr>
-          <a:xfrm xmlns:a="http://schemas.openxmlformats.org/drawingml/2006/main">
-            <a:off x="857250" y="1809750"/>
-            <a:ext cx="10477500" cy="4286250"/>
-          </a:xfrm>
-          <a:prstGeom xmlns:a="http://schemas.openxmlformats.org/drawingml/2006/main" prst="rect">
-            <a:avLst/>
-          </a:prstGeom>
-          <a:noFill xmlns:a="http://schemas.openxmlformats.org/drawingml/2006/main"/>
-          <a:ln xmlns:a="http://schemas.openxmlformats.org/drawingml/2006/main" w="0">
-            <a:noFill/>
-          </a:ln>
-        </p:spPr>
-        <p:txBody>
-          <a:bodyPr xmlns:a="http://schemas.openxmlformats.org/drawingml/2006/main">
-            <a:noAutofit/>
-          </a:bodyPr>
-          <a:lstStyle xmlns:a="http://schemas.openxmlformats.org/drawingml/2006/main"/>
-          <a:p xmlns:a="http://schemas.openxmlformats.org/drawingml/2006/main">
-            <a:pPr marL="292100" indent="-127000">
+                  <a:srgbClr val="59616B"/>
+                </a:solidFill>
+                <a:latin typeface="Arial"/>
+                <a:ea typeface="Arial"/>
+                <a:cs typeface="Arial"/>
+              </a:rPr>
+              <a:t>What features</a:t>
+            </a:r>
+          </a:p>
+          <a:p xmlns:a="http://schemas.openxmlformats.org/drawingml/2006/main">
+            <a:pPr>
+              <a:defRPr sz="3150" b="1">
+                <a:solidFill>
+                  <a:srgbClr val="59616B"/>
+                </a:solidFill>
+                <a:latin typeface="Arial"/>
+                <a:ea typeface="Arial"/>
+                <a:cs typeface="Arial"/>
+              </a:defRPr>
+            </a:pPr>
+            <a:r>
+              <a:rPr sz="3150" b="1">
+                <a:solidFill>
+                  <a:srgbClr val="59616B"/>
+                </a:solidFill>
+                <a:latin typeface="Arial"/>
+                <a:ea typeface="Arial"/>
+                <a:cs typeface="Arial"/>
+              </a:rPr>
+              <a:t>can we add?</a:t>
+            </a:r>
+          </a:p>
+        </p:txBody>
+      </p:sp>
+      <p:sp>
+        <p:nvSpPr>
+          <p:cNvPr id="9" name="">
+            <a:extLst xmlns:a="http://schemas.openxmlformats.org/drawingml/2006/main">
+              <a:ext uri="{FF2B5EF4-FFF2-40B4-BE49-F238E27FC236}">
+                <a16:creationId xmlns:a16="http://schemas.microsoft.com/office/drawing/2014/main" id="{C5E15272-14EE-4385-970E-AE18CBBDA3AB}"/>
+              </a:ext>
+            </a:extLst>
+          </p:cNvPr>
+          <p:cNvSpPr>
+            <a:spLocks xmlns:a="http://schemas.openxmlformats.org/drawingml/2006/main" noGrp="1"/>
+          </p:cNvSpPr>
+          <p:nvPr/>
+        </p:nvSpPr>
+        <p:spPr>
+          <a:xfrm xmlns:a="http://schemas.openxmlformats.org/drawingml/2006/main">
+            <a:off x="6610350" y="2009775"/>
+            <a:ext cx="4286250" cy="381000"/>
+          </a:xfrm>
+          <a:prstGeom xmlns:a="http://schemas.openxmlformats.org/drawingml/2006/main" prst="rect">
+            <a:avLst/>
+          </a:prstGeom>
+          <a:noFill xmlns:a="http://schemas.openxmlformats.org/drawingml/2006/main"/>
+          <a:ln xmlns:a="http://schemas.openxmlformats.org/drawingml/2006/main" w="0">
+            <a:noFill/>
+          </a:ln>
+        </p:spPr>
+        <p:txBody>
+          <a:bodyPr xmlns:a="http://schemas.openxmlformats.org/drawingml/2006/main">
+            <a:noAutofit/>
+          </a:bodyPr>
+          <a:lstStyle xmlns:a="http://schemas.openxmlformats.org/drawingml/2006/main"/>
+          <a:p xmlns:a="http://schemas.openxmlformats.org/drawingml/2006/main">
+            <a:pPr>
+              <a:defRPr sz="1575" b="1">
+                <a:solidFill>
+                  <a:srgbClr val="861F41"/>
+                </a:solidFill>
+                <a:latin typeface="Consolas"/>
+                <a:ea typeface="Consolas"/>
+                <a:cs typeface="Consolas"/>
+              </a:defRPr>
+            </a:pPr>
+            <a:r>
+              <a:rPr sz="1575" b="1">
+                <a:solidFill>
+                  <a:srgbClr val="861F41"/>
+                </a:solidFill>
+                <a:latin typeface="Consolas"/>
+                <a:ea typeface="Consolas"/>
+                <a:cs typeface="Consolas"/>
+              </a:rPr>
+              <a:t>NOW</a:t>
+            </a:r>
+          </a:p>
+        </p:txBody>
+      </p:sp>
+      <p:sp>
+        <p:nvSpPr>
+          <p:cNvPr id="10" name="">
+            <a:extLst xmlns:a="http://schemas.openxmlformats.org/drawingml/2006/main">
+              <a:ext uri="{FF2B5EF4-FFF2-40B4-BE49-F238E27FC236}">
+                <a16:creationId xmlns:a16="http://schemas.microsoft.com/office/drawing/2014/main" id="{D779FC86-F46A-4701-BF30-294A665640FF}"/>
+              </a:ext>
+            </a:extLst>
+          </p:cNvPr>
+          <p:cNvSpPr>
+            <a:spLocks xmlns:a="http://schemas.openxmlformats.org/drawingml/2006/main" noGrp="1"/>
+          </p:cNvSpPr>
+          <p:nvPr/>
+        </p:nvSpPr>
+        <p:spPr>
+          <a:xfrm xmlns:a="http://schemas.openxmlformats.org/drawingml/2006/main">
+            <a:off x="6600825" y="2657475"/>
+            <a:ext cx="4762500" cy="1304925"/>
+          </a:xfrm>
+          <a:prstGeom xmlns:a="http://schemas.openxmlformats.org/drawingml/2006/main" prst="rect">
+            <a:avLst/>
+          </a:prstGeom>
+          <a:noFill xmlns:a="http://schemas.openxmlformats.org/drawingml/2006/main"/>
+          <a:ln xmlns:a="http://schemas.openxmlformats.org/drawingml/2006/main" w="0">
+            <a:noFill/>
+          </a:ln>
+        </p:spPr>
+        <p:txBody>
+          <a:bodyPr xmlns:a="http://schemas.openxmlformats.org/drawingml/2006/main">
+            <a:noAutofit/>
+          </a:bodyPr>
+          <a:lstStyle xmlns:a="http://schemas.openxmlformats.org/drawingml/2006/main"/>
+          <a:p xmlns:a="http://schemas.openxmlformats.org/drawingml/2006/main">
+            <a:pPr>
+              <a:defRPr sz="3150" b="1">
+                <a:solidFill>
+                  <a:srgbClr val="861F41"/>
+                </a:solidFill>
+                <a:latin typeface="Arial"/>
+                <a:ea typeface="Arial"/>
+                <a:cs typeface="Arial"/>
+              </a:defRPr>
+            </a:pPr>
+            <a:r>
+              <a:rPr sz="3150" b="1">
+                <a:solidFill>
+                  <a:srgbClr val="861F41"/>
+                </a:solidFill>
+                <a:latin typeface="Arial"/>
+                <a:ea typeface="Arial"/>
+                <a:cs typeface="Arial"/>
+              </a:rPr>
+              <a:t>What can we finish</a:t>
+            </a:r>
+          </a:p>
+          <a:p xmlns:a="http://schemas.openxmlformats.org/drawingml/2006/main">
+            <a:pPr>
+              <a:defRPr sz="3150" b="1">
+                <a:solidFill>
+                  <a:srgbClr val="861F41"/>
+                </a:solidFill>
+                <a:latin typeface="Arial"/>
+                <a:ea typeface="Arial"/>
+                <a:cs typeface="Arial"/>
+              </a:defRPr>
+            </a:pPr>
+            <a:r>
+              <a:rPr sz="3150" b="1">
+                <a:solidFill>
+                  <a:srgbClr val="861F41"/>
+                </a:solidFill>
+                <a:latin typeface="Arial"/>
+                <a:ea typeface="Arial"/>
+                <a:cs typeface="Arial"/>
+              </a:rPr>
+              <a:t>and verify?</a:t>
+            </a:r>
+          </a:p>
+        </p:txBody>
+      </p:sp>
+      <p:sp>
+        <p:nvSpPr>
+          <p:cNvPr id="11" name="">
+            <a:extLst xmlns:a="http://schemas.openxmlformats.org/drawingml/2006/main">
+              <a:ext uri="{FF2B5EF4-FFF2-40B4-BE49-F238E27FC236}">
+                <a16:creationId xmlns:a16="http://schemas.microsoft.com/office/drawing/2014/main" id="{D65C4B98-A489-4BD2-A46E-E7EDBF313FE1}"/>
+              </a:ext>
+            </a:extLst>
+          </p:cNvPr>
+          <p:cNvSpPr>
+            <a:spLocks xmlns:a="http://schemas.openxmlformats.org/drawingml/2006/main" noGrp="1"/>
+          </p:cNvSpPr>
+          <p:nvPr/>
+        </p:nvSpPr>
+        <p:spPr>
+          <a:xfrm xmlns:a="http://schemas.openxmlformats.org/drawingml/2006/main">
+            <a:off x="6610350" y="4333875"/>
+            <a:ext cx="4953000" cy="1714500"/>
+          </a:xfrm>
+          <a:prstGeom xmlns:a="http://schemas.openxmlformats.org/drawingml/2006/main" prst="rect">
+            <a:avLst/>
+          </a:prstGeom>
+          <a:noFill xmlns:a="http://schemas.openxmlformats.org/drawingml/2006/main"/>
+          <a:ln xmlns:a="http://schemas.openxmlformats.org/drawingml/2006/main" w="0">
+            <a:noFill/>
+          </a:ln>
+        </p:spPr>
+        <p:txBody>
+          <a:bodyPr xmlns:a="http://schemas.openxmlformats.org/drawingml/2006/main">
+            <a:noAutofit/>
+          </a:bodyPr>
+          <a:lstStyle xmlns:a="http://schemas.openxmlformats.org/drawingml/2006/main"/>
+          <a:p xmlns:a="http://schemas.openxmlformats.org/drawingml/2006/main">
+            <a:pPr marL="241300" indent="-114300">
               <a:spcAft>
-                <a:spcPts val="1900"/>
+                <a:spcPts val="1800"/>
               </a:spcAft>
               <a:buChar char="•"/>
-              <a:defRPr sz="2175" b="0">
-                <a:solidFill>
-                  <a:srgbClr val="151515"/>
-                </a:solidFill>
-                <a:latin typeface="Arial"/>
-                <a:ea typeface="Arial"/>
-                <a:cs typeface="Arial"/>
-              </a:defRPr>
-            </a:pPr>
-            <a:r>
-              <a:rPr sz="2175" b="0">
-                <a:solidFill>
-                  <a:srgbClr val="151515"/>
-                </a:solidFill>
-                <a:latin typeface="Arial"/>
-                <a:ea typeface="Arial"/>
-                <a:cs typeface="Arial"/>
-              </a:rPr>
-              <a:t>Estimate effort per subsystem, not just per feature</a:t>
-            </a:r>
-          </a:p>
-          <a:p xmlns:a="http://schemas.openxmlformats.org/drawingml/2006/main">
-            <a:pPr marL="292100" indent="-127000">
+              <a:defRPr sz="1800" b="0">
+                <a:solidFill>
+                  <a:srgbClr val="17212B"/>
+                </a:solidFill>
+                <a:latin typeface="Arial"/>
+                <a:ea typeface="Arial"/>
+                <a:cs typeface="Arial"/>
+              </a:defRPr>
+            </a:pPr>
+            <a:r>
+              <a:rPr sz="1800" b="0">
+                <a:solidFill>
+                  <a:srgbClr val="17212B"/>
+                </a:solidFill>
+                <a:latin typeface="Arial"/>
+                <a:ea typeface="Arial"/>
+                <a:cs typeface="Arial"/>
+              </a:rPr>
+              <a:t>Estimate effort for each subsystem</a:t>
+            </a:r>
+          </a:p>
+          <a:p xmlns:a="http://schemas.openxmlformats.org/drawingml/2006/main">
+            <a:pPr marL="241300" indent="-114300">
               <a:spcAft>
-                <a:spcPts val="1900"/>
+                <a:spcPts val="1800"/>
               </a:spcAft>
               <a:buChar char="•"/>
-              <a:defRPr sz="2175" b="0">
-                <a:solidFill>
-                  <a:srgbClr val="151515"/>
-                </a:solidFill>
-                <a:latin typeface="Arial"/>
-                <a:ea typeface="Arial"/>
-                <a:cs typeface="Arial"/>
-              </a:defRPr>
-            </a:pPr>
-            <a:r>
-              <a:rPr sz="2175" b="0">
-                <a:solidFill>
-                  <a:srgbClr val="151515"/>
-                </a:solidFill>
-                <a:latin typeface="Arial"/>
-                <a:ea typeface="Arial"/>
-                <a:cs typeface="Arial"/>
-              </a:rPr>
-              <a:t>Define the smallest playable version first</a:t>
-            </a:r>
-          </a:p>
-          <a:p xmlns:a="http://schemas.openxmlformats.org/drawingml/2006/main">
-            <a:pPr marL="292100" indent="-127000">
+              <a:defRPr sz="1800" b="0">
+                <a:solidFill>
+                  <a:srgbClr val="17212B"/>
+                </a:solidFill>
+                <a:latin typeface="Arial"/>
+                <a:ea typeface="Arial"/>
+                <a:cs typeface="Arial"/>
+              </a:defRPr>
+            </a:pPr>
+            <a:r>
+              <a:rPr sz="1800" b="0">
+                <a:solidFill>
+                  <a:srgbClr val="17212B"/>
+                </a:solidFill>
+                <a:latin typeface="Arial"/>
+                <a:ea typeface="Arial"/>
+                <a:cs typeface="Arial"/>
+              </a:rPr>
+              <a:t>Define the smallest playable version</a:t>
+            </a:r>
+          </a:p>
+          <a:p xmlns:a="http://schemas.openxmlformats.org/drawingml/2006/main">
+            <a:pPr marL="241300" indent="-114300">
               <a:spcAft>
-                <a:spcPts val="1900"/>
+                <a:spcPts val="1800"/>
               </a:spcAft>
               <a:buChar char="•"/>
-              <a:defRPr sz="2175" b="0">
-                <a:solidFill>
-                  <a:srgbClr val="151515"/>
-                </a:solidFill>
-                <a:latin typeface="Arial"/>
-                <a:ea typeface="Arial"/>
-                <a:cs typeface="Arial"/>
-              </a:defRPr>
-            </a:pPr>
-            <a:r>
-              <a:rPr sz="2175" b="0">
-                <a:solidFill>
-                  <a:srgbClr val="151515"/>
-                </a:solidFill>
-                <a:latin typeface="Arial"/>
-                <a:ea typeface="Arial"/>
-                <a:cs typeface="Arial"/>
-              </a:rPr>
-              <a:t>Reserve time for integration, testing, and UI</a:t>
-            </a:r>
-          </a:p>
-          <a:p xmlns:a="http://schemas.openxmlformats.org/drawingml/2006/main">
-            <a:pPr marL="292100" indent="-127000">
-              <a:spcAft>
-                <a:spcPts val="1900"/>
-              </a:spcAft>
-              <a:buChar char="•"/>
-              <a:defRPr sz="2175" b="0">
-                <a:solidFill>
-                  <a:srgbClr val="151515"/>
-                </a:solidFill>
-                <a:latin typeface="Arial"/>
-                <a:ea typeface="Arial"/>
-                <a:cs typeface="Arial"/>
-              </a:defRPr>
-            </a:pPr>
-            <a:r>
-              <a:rPr sz="2175" b="0">
-                <a:solidFill>
-                  <a:srgbClr val="151515"/>
-                </a:solidFill>
-                <a:latin typeface="Arial"/>
-                <a:ea typeface="Arial"/>
-                <a:cs typeface="Arial"/>
-              </a:rPr>
-              <a:t>Cut lower-priority features before they threaten the core loop</a:t>
+              <a:defRPr sz="1800" b="0">
+                <a:solidFill>
+                  <a:srgbClr val="17212B"/>
+                </a:solidFill>
+                <a:latin typeface="Arial"/>
+                <a:ea typeface="Arial"/>
+                <a:cs typeface="Arial"/>
+              </a:defRPr>
+            </a:pPr>
+            <a:r>
+              <a:rPr sz="1800" b="0">
+                <a:solidFill>
+                  <a:srgbClr val="17212B"/>
+                </a:solidFill>
+                <a:latin typeface="Arial"/>
+                <a:ea typeface="Arial"/>
+                <a:cs typeface="Arial"/>
+              </a:rPr>
+              <a:t>Reserve time for testing and UI</a:t>
+            </a:r>
+          </a:p>
+        </p:txBody>
+      </p:sp>
+      <p:sp>
+        <p:nvSpPr>
+          <p:cNvPr id="12" name="">
+            <a:extLst xmlns:a="http://schemas.openxmlformats.org/drawingml/2006/main">
+              <a:ext uri="{FF2B5EF4-FFF2-40B4-BE49-F238E27FC236}">
+                <a16:creationId xmlns:a16="http://schemas.microsoft.com/office/drawing/2014/main" id="{85E1DA0F-C9D6-4FE8-9EEA-1857875742AE}"/>
+              </a:ext>
+            </a:extLst>
+          </p:cNvPr>
+          <p:cNvSpPr>
+            <a:spLocks xmlns:a="http://schemas.openxmlformats.org/drawingml/2006/main" noGrp="1"/>
+          </p:cNvSpPr>
+          <p:nvPr/>
+        </p:nvSpPr>
+        <p:spPr>
+          <a:xfrm xmlns:a="http://schemas.openxmlformats.org/drawingml/2006/main">
+            <a:off x="685800" y="5229225"/>
+            <a:ext cx="4667250" cy="790575"/>
+          </a:xfrm>
+          <a:prstGeom xmlns:a="http://schemas.openxmlformats.org/drawingml/2006/main" prst="rect">
+            <a:avLst/>
+          </a:prstGeom>
+          <a:noFill xmlns:a="http://schemas.openxmlformats.org/drawingml/2006/main"/>
+          <a:ln xmlns:a="http://schemas.openxmlformats.org/drawingml/2006/main" w="0">
+            <a:noFill/>
+          </a:ln>
+        </p:spPr>
+        <p:txBody>
+          <a:bodyPr xmlns:a="http://schemas.openxmlformats.org/drawingml/2006/main">
+            <a:noAutofit/>
+          </a:bodyPr>
+          <a:lstStyle xmlns:a="http://schemas.openxmlformats.org/drawingml/2006/main"/>
+          <a:p xmlns:a="http://schemas.openxmlformats.org/drawingml/2006/main">
+            <a:pPr>
+              <a:defRPr sz="1950" b="0">
+                <a:solidFill>
+                  <a:srgbClr val="59616B"/>
+                </a:solidFill>
+                <a:latin typeface="Arial"/>
+                <a:ea typeface="Arial"/>
+                <a:cs typeface="Arial"/>
+              </a:defRPr>
+            </a:pPr>
+            <a:r>
+              <a:rPr sz="1950" b="0">
+                <a:solidFill>
+                  <a:srgbClr val="59616B"/>
+                </a:solidFill>
+                <a:latin typeface="Arial"/>
+                <a:ea typeface="Arial"/>
+                <a:cs typeface="Arial"/>
+              </a:rPr>
+              <a:t>Cut lower-priority features early.</a:t>
             </a:r>
           </a:p>
         </p:txBody>
@@ -3970,43 +6241,44 @@
         </p:nvSpPr>
         <p:spPr>
           <a:xfrm xmlns:a="http://schemas.openxmlformats.org/drawingml/2006/main">
-            <a:off x="666750" y="266700"/>
-            <a:ext cx="10668000" cy="304800"/>
-          </a:xfrm>
-          <a:prstGeom xmlns:a="http://schemas.openxmlformats.org/drawingml/2006/main" prst="rect">
-            <a:avLst/>
-          </a:prstGeom>
-          <a:noFill xmlns:a="http://schemas.openxmlformats.org/drawingml/2006/main"/>
-          <a:ln xmlns:a="http://schemas.openxmlformats.org/drawingml/2006/main" w="0">
-            <a:noFill/>
-          </a:ln>
-        </p:spPr>
-        <p:txBody>
-          <a:bodyPr xmlns:a="http://schemas.openxmlformats.org/drawingml/2006/main">
-            <a:noAutofit/>
-          </a:bodyPr>
-          <a:lstStyle xmlns:a="http://schemas.openxmlformats.org/drawingml/2006/main"/>
-          <a:p xmlns:a="http://schemas.openxmlformats.org/drawingml/2006/main">
-            <a:pPr>
+            <a:off x="609600" y="304800"/>
+            <a:ext cx="10096500" cy="285750"/>
+          </a:xfrm>
+          <a:prstGeom xmlns:a="http://schemas.openxmlformats.org/drawingml/2006/main" prst="rect">
+            <a:avLst/>
+          </a:prstGeom>
+          <a:noFill xmlns:a="http://schemas.openxmlformats.org/drawingml/2006/main"/>
+          <a:ln xmlns:a="http://schemas.openxmlformats.org/drawingml/2006/main" w="0">
+            <a:noFill/>
+          </a:ln>
+        </p:spPr>
+        <p:txBody>
+          <a:bodyPr xmlns:a="http://schemas.openxmlformats.org/drawingml/2006/main">
+            <a:noAutofit/>
+          </a:bodyPr>
+          <a:lstStyle xmlns:a="http://schemas.openxmlformats.org/drawingml/2006/main"/>
+          <a:p xmlns:a="http://schemas.openxmlformats.org/drawingml/2006/main">
+            <a:pPr>
+              <a:buNone/>
               <a:defRPr sz="1275" b="1">
                 <a:solidFill>
-                  <a:srgbClr val="555555"/>
-                </a:solidFill>
-                <a:latin typeface="Arial"/>
-                <a:ea typeface="Arial"/>
-                <a:cs typeface="Arial"/>
+                  <a:srgbClr val="C64600"/>
+                </a:solidFill>
+                <a:latin typeface="Consolas"/>
+                <a:ea typeface="Consolas"/>
+                <a:cs typeface="Consolas"/>
               </a:defRPr>
             </a:pPr>
             <a:r>
               <a:rPr sz="1275" b="1">
                 <a:solidFill>
-                  <a:srgbClr val="555555"/>
-                </a:solidFill>
-                <a:latin typeface="Arial"/>
-                <a:ea typeface="Arial"/>
-                <a:cs typeface="Arial"/>
-              </a:rPr>
-              <a:t>4 · GENAI REFLECTION</a:t>
+                  <a:srgbClr val="C64600"/>
+                </a:solidFill>
+                <a:latin typeface="Consolas"/>
+                <a:ea typeface="Consolas"/>
+                <a:cs typeface="Consolas"/>
+              </a:rPr>
+              <a:t>04  /  GENAI REFLECTION</a:t>
             </a:r>
           </a:p>
         </p:txBody>
@@ -4027,37 +6299,38 @@
         </p:nvSpPr>
         <p:spPr>
           <a:xfrm xmlns:a="http://schemas.openxmlformats.org/drawingml/2006/main">
-            <a:off x="666750" y="685800"/>
-            <a:ext cx="10763250" cy="714375"/>
-          </a:xfrm>
-          <a:prstGeom xmlns:a="http://schemas.openxmlformats.org/drawingml/2006/main" prst="rect">
-            <a:avLst/>
-          </a:prstGeom>
-          <a:noFill xmlns:a="http://schemas.openxmlformats.org/drawingml/2006/main"/>
-          <a:ln xmlns:a="http://schemas.openxmlformats.org/drawingml/2006/main" w="0">
-            <a:noFill/>
-          </a:ln>
-        </p:spPr>
-        <p:txBody>
-          <a:bodyPr xmlns:a="http://schemas.openxmlformats.org/drawingml/2006/main">
-            <a:noAutofit/>
-          </a:bodyPr>
-          <a:lstStyle xmlns:a="http://schemas.openxmlformats.org/drawingml/2006/main"/>
-          <a:p xmlns:a="http://schemas.openxmlformats.org/drawingml/2006/main">
-            <a:pPr>
-              <a:defRPr sz="3150" b="1">
-                <a:solidFill>
-                  <a:srgbClr val="151515"/>
-                </a:solidFill>
-                <a:latin typeface="Arial"/>
-                <a:ea typeface="Arial"/>
-                <a:cs typeface="Arial"/>
-              </a:defRPr>
-            </a:pPr>
-            <a:r>
-              <a:rPr sz="3150" b="1">
-                <a:solidFill>
-                  <a:srgbClr val="151515"/>
+            <a:off x="609600" y="781050"/>
+            <a:ext cx="10906125" cy="809625"/>
+          </a:xfrm>
+          <a:prstGeom xmlns:a="http://schemas.openxmlformats.org/drawingml/2006/main" prst="rect">
+            <a:avLst/>
+          </a:prstGeom>
+          <a:noFill xmlns:a="http://schemas.openxmlformats.org/drawingml/2006/main"/>
+          <a:ln xmlns:a="http://schemas.openxmlformats.org/drawingml/2006/main" w="0">
+            <a:noFill/>
+          </a:ln>
+        </p:spPr>
+        <p:txBody>
+          <a:bodyPr xmlns:a="http://schemas.openxmlformats.org/drawingml/2006/main">
+            <a:noAutofit/>
+          </a:bodyPr>
+          <a:lstStyle xmlns:a="http://schemas.openxmlformats.org/drawingml/2006/main"/>
+          <a:p xmlns:a="http://schemas.openxmlformats.org/drawingml/2006/main">
+            <a:pPr>
+              <a:buNone/>
+              <a:defRPr sz="3450" b="1">
+                <a:solidFill>
+                  <a:srgbClr val="17212B"/>
+                </a:solidFill>
+                <a:latin typeface="Arial"/>
+                <a:ea typeface="Arial"/>
+                <a:cs typeface="Arial"/>
+              </a:defRPr>
+            </a:pPr>
+            <a:r>
+              <a:rPr sz="3450" b="1">
+                <a:solidFill>
+                  <a:srgbClr val="17212B"/>
                 </a:solidFill>
                 <a:latin typeface="Arial"/>
                 <a:ea typeface="Arial"/>
@@ -4084,185 +6357,667 @@
         </p:nvSpPr>
         <p:spPr>
           <a:xfrm xmlns:a="http://schemas.openxmlformats.org/drawingml/2006/main">
-            <a:off x="11049000" y="6343650"/>
-            <a:ext cx="476250" cy="238125"/>
-          </a:xfrm>
-          <a:prstGeom xmlns:a="http://schemas.openxmlformats.org/drawingml/2006/main" prst="rect">
-            <a:avLst/>
-          </a:prstGeom>
-          <a:noFill xmlns:a="http://schemas.openxmlformats.org/drawingml/2006/main"/>
-          <a:ln xmlns:a="http://schemas.openxmlformats.org/drawingml/2006/main" w="0">
-            <a:noFill/>
-          </a:ln>
-        </p:spPr>
-        <p:txBody>
-          <a:bodyPr xmlns:a="http://schemas.openxmlformats.org/drawingml/2006/main">
-            <a:noAutofit/>
-          </a:bodyPr>
-          <a:lstStyle xmlns:a="http://schemas.openxmlformats.org/drawingml/2006/main"/>
-          <a:p xmlns:a="http://schemas.openxmlformats.org/drawingml/2006/main">
-            <a:pPr>
+            <a:off x="10610850" y="6305550"/>
+            <a:ext cx="1095375" cy="276225"/>
+          </a:xfrm>
+          <a:prstGeom xmlns:a="http://schemas.openxmlformats.org/drawingml/2006/main" prst="rect">
+            <a:avLst/>
+          </a:prstGeom>
+          <a:noFill xmlns:a="http://schemas.openxmlformats.org/drawingml/2006/main"/>
+          <a:ln xmlns:a="http://schemas.openxmlformats.org/drawingml/2006/main" w="0">
+            <a:noFill/>
+          </a:ln>
+        </p:spPr>
+        <p:txBody>
+          <a:bodyPr xmlns:a="http://schemas.openxmlformats.org/drawingml/2006/main">
+            <a:noAutofit/>
+          </a:bodyPr>
+          <a:lstStyle xmlns:a="http://schemas.openxmlformats.org/drawingml/2006/main"/>
+          <a:p xmlns:a="http://schemas.openxmlformats.org/drawingml/2006/main">
+            <a:pPr>
+              <a:buNone/>
               <a:defRPr sz="1200" b="0">
                 <a:solidFill>
-                  <a:srgbClr val="555555"/>
-                </a:solidFill>
-                <a:latin typeface="Arial"/>
-                <a:ea typeface="Arial"/>
-                <a:cs typeface="Arial"/>
+                  <a:srgbClr val="59616B"/>
+                </a:solidFill>
+                <a:latin typeface="Consolas"/>
+                <a:ea typeface="Consolas"/>
+                <a:cs typeface="Consolas"/>
               </a:defRPr>
             </a:pPr>
             <a:r>
               <a:rPr sz="1200" b="0">
                 <a:solidFill>
-                  <a:srgbClr val="555555"/>
-                </a:solidFill>
-                <a:latin typeface="Arial"/>
-                <a:ea typeface="Arial"/>
-                <a:cs typeface="Arial"/>
-              </a:rPr>
-              <a:t>08</a:t>
-            </a:r>
-          </a:p>
-        </p:txBody>
-      </p:sp>
-      <p:sp>
-        <p:nvSpPr>
-          <p:cNvPr id="4" name="">
-            <a:extLst xmlns:a="http://schemas.openxmlformats.org/drawingml/2006/main">
-              <a:ext uri="{FF2B5EF4-FFF2-40B4-BE49-F238E27FC236}">
-                <a16:creationId xmlns:a16="http://schemas.microsoft.com/office/drawing/2014/main" id="{263E21A8-6B02-4401-9CD1-80D02537DDCF}"/>
-              </a:ext>
-            </a:extLst>
-          </p:cNvPr>
-          <p:cNvSpPr>
-            <a:spLocks xmlns:a="http://schemas.openxmlformats.org/drawingml/2006/main" noGrp="1"/>
-          </p:cNvSpPr>
-          <p:nvPr/>
-        </p:nvSpPr>
-        <p:spPr>
-          <a:xfrm xmlns:a="http://schemas.openxmlformats.org/drawingml/2006/main">
-            <a:off x="857250" y="1743075"/>
-            <a:ext cx="10477500" cy="4286250"/>
-          </a:xfrm>
-          <a:prstGeom xmlns:a="http://schemas.openxmlformats.org/drawingml/2006/main" prst="rect">
-            <a:avLst/>
-          </a:prstGeom>
-          <a:noFill xmlns:a="http://schemas.openxmlformats.org/drawingml/2006/main"/>
-          <a:ln xmlns:a="http://schemas.openxmlformats.org/drawingml/2006/main" w="0">
-            <a:noFill/>
-          </a:ln>
-        </p:spPr>
-        <p:txBody>
-          <a:bodyPr xmlns:a="http://schemas.openxmlformats.org/drawingml/2006/main">
-            <a:noAutofit/>
-          </a:bodyPr>
-          <a:lstStyle xmlns:a="http://schemas.openxmlformats.org/drawingml/2006/main"/>
-          <a:p xmlns:a="http://schemas.openxmlformats.org/drawingml/2006/main">
-            <a:pPr marL="292100" indent="-127000">
+                  <a:srgbClr val="59616B"/>
+                </a:solidFill>
+                <a:latin typeface="Consolas"/>
+                <a:ea typeface="Consolas"/>
+                <a:cs typeface="Consolas"/>
+              </a:rPr>
+              <a:t>08 / 09</a:t>
+            </a:r>
+          </a:p>
+        </p:txBody>
+      </p:sp>
+      <p:sp>
+        <p:nvSpPr>
+          <p:cNvPr id="6" name="">
+            <a:extLst xmlns:a="http://schemas.openxmlformats.org/drawingml/2006/main">
+              <a:ext uri="{FF2B5EF4-FFF2-40B4-BE49-F238E27FC236}">
+                <a16:creationId xmlns:a16="http://schemas.microsoft.com/office/drawing/2014/main" id="{24555D6B-5A1C-489C-87B8-FC350A7AF95B}"/>
+              </a:ext>
+            </a:extLst>
+          </p:cNvPr>
+          <p:cNvSpPr>
+            <a:spLocks xmlns:a="http://schemas.openxmlformats.org/drawingml/2006/main" noGrp="1"/>
+          </p:cNvSpPr>
+          <p:nvPr/>
+        </p:nvSpPr>
+        <p:spPr>
+          <a:xfrm xmlns:a="http://schemas.openxmlformats.org/drawingml/2006/main">
+            <a:off x="609600" y="6305550"/>
+            <a:ext cx="5715000" cy="285750"/>
+          </a:xfrm>
+          <a:prstGeom xmlns:a="http://schemas.openxmlformats.org/drawingml/2006/main" prst="rect">
+            <a:avLst/>
+          </a:prstGeom>
+          <a:noFill xmlns:a="http://schemas.openxmlformats.org/drawingml/2006/main"/>
+          <a:ln xmlns:a="http://schemas.openxmlformats.org/drawingml/2006/main" w="0">
+            <a:noFill/>
+          </a:ln>
+        </p:spPr>
+        <p:txBody>
+          <a:bodyPr xmlns:a="http://schemas.openxmlformats.org/drawingml/2006/main">
+            <a:noAutofit/>
+          </a:bodyPr>
+          <a:lstStyle xmlns:a="http://schemas.openxmlformats.org/drawingml/2006/main"/>
+          <a:p xmlns:a="http://schemas.openxmlformats.org/drawingml/2006/main">
+            <a:pPr>
+              <a:defRPr sz="1125" b="0">
+                <a:solidFill>
+                  <a:srgbClr val="59616B"/>
+                </a:solidFill>
+                <a:latin typeface="Consolas"/>
+                <a:ea typeface="Consolas"/>
+                <a:cs typeface="Consolas"/>
+              </a:defRPr>
+            </a:pPr>
+            <a:r>
+              <a:rPr sz="1125" b="0">
+                <a:solidFill>
+                  <a:srgbClr val="59616B"/>
+                </a:solidFill>
+                <a:latin typeface="Consolas"/>
+                <a:ea typeface="Consolas"/>
+                <a:cs typeface="Consolas"/>
+              </a:rPr>
+              <a:t>SLAYVT  /  VIRGINIA TECH</a:t>
+            </a:r>
+          </a:p>
+        </p:txBody>
+      </p:sp>
+      <p:sp>
+        <p:nvSpPr>
+          <p:cNvPr id="7" name="">
+            <a:extLst xmlns:a="http://schemas.openxmlformats.org/drawingml/2006/main">
+              <a:ext uri="{FF2B5EF4-FFF2-40B4-BE49-F238E27FC236}">
+                <a16:creationId xmlns:a16="http://schemas.microsoft.com/office/drawing/2014/main" id="{0FA17577-6E31-41AE-81FE-331678880460}"/>
+              </a:ext>
+            </a:extLst>
+          </p:cNvPr>
+          <p:cNvSpPr>
+            <a:spLocks xmlns:a="http://schemas.openxmlformats.org/drawingml/2006/main" noGrp="1"/>
+          </p:cNvSpPr>
+          <p:nvPr/>
+        </p:nvSpPr>
+        <p:spPr>
+          <a:xfrm xmlns:a="http://schemas.openxmlformats.org/drawingml/2006/main">
+            <a:off x="666750" y="1981200"/>
+            <a:ext cx="4714875" cy="381000"/>
+          </a:xfrm>
+          <a:prstGeom xmlns:a="http://schemas.openxmlformats.org/drawingml/2006/main" prst="rect">
+            <a:avLst/>
+          </a:prstGeom>
+          <a:noFill xmlns:a="http://schemas.openxmlformats.org/drawingml/2006/main"/>
+          <a:ln xmlns:a="http://schemas.openxmlformats.org/drawingml/2006/main" w="0">
+            <a:noFill/>
+          </a:ln>
+        </p:spPr>
+        <p:txBody>
+          <a:bodyPr xmlns:a="http://schemas.openxmlformats.org/drawingml/2006/main">
+            <a:noAutofit/>
+          </a:bodyPr>
+          <a:lstStyle xmlns:a="http://schemas.openxmlformats.org/drawingml/2006/main"/>
+          <a:p xmlns:a="http://schemas.openxmlformats.org/drawingml/2006/main">
+            <a:pPr>
+              <a:defRPr sz="1575" b="1">
+                <a:solidFill>
+                  <a:srgbClr val="C64600"/>
+                </a:solidFill>
+                <a:latin typeface="Consolas"/>
+                <a:ea typeface="Consolas"/>
+                <a:cs typeface="Consolas"/>
+              </a:defRPr>
+            </a:pPr>
+            <a:r>
+              <a:rPr sz="1575" b="1">
+                <a:solidFill>
+                  <a:srgbClr val="C64600"/>
+                </a:solidFill>
+                <a:latin typeface="Consolas"/>
+                <a:ea typeface="Consolas"/>
+                <a:cs typeface="Consolas"/>
+              </a:rPr>
+              <a:t>AI-ASSISTED</a:t>
+            </a:r>
+          </a:p>
+        </p:txBody>
+      </p:sp>
+      <p:sp>
+        <p:nvSpPr>
+          <p:cNvPr id="8" name="">
+            <a:extLst xmlns:a="http://schemas.openxmlformats.org/drawingml/2006/main">
+              <a:ext uri="{FF2B5EF4-FFF2-40B4-BE49-F238E27FC236}">
+                <a16:creationId xmlns:a16="http://schemas.microsoft.com/office/drawing/2014/main" id="{4D61F6A9-2148-42D6-8713-C29CF69BF2BD}"/>
+              </a:ext>
+            </a:extLst>
+          </p:cNvPr>
+          <p:cNvSpPr>
+            <a:spLocks xmlns:a="http://schemas.openxmlformats.org/drawingml/2006/main" noGrp="1"/>
+          </p:cNvSpPr>
+          <p:nvPr/>
+        </p:nvSpPr>
+        <p:spPr>
+          <a:xfrm xmlns:a="http://schemas.openxmlformats.org/drawingml/2006/main">
+            <a:off x="657225" y="2543175"/>
+            <a:ext cx="4762500" cy="1533525"/>
+          </a:xfrm>
+          <a:prstGeom xmlns:a="http://schemas.openxmlformats.org/drawingml/2006/main" prst="rect">
+            <a:avLst/>
+          </a:prstGeom>
+          <a:noFill xmlns:a="http://schemas.openxmlformats.org/drawingml/2006/main"/>
+          <a:ln xmlns:a="http://schemas.openxmlformats.org/drawingml/2006/main" w="0">
+            <a:noFill/>
+          </a:ln>
+        </p:spPr>
+        <p:txBody>
+          <a:bodyPr xmlns:a="http://schemas.openxmlformats.org/drawingml/2006/main">
+            <a:noAutofit/>
+          </a:bodyPr>
+          <a:lstStyle xmlns:a="http://schemas.openxmlformats.org/drawingml/2006/main"/>
+          <a:p xmlns:a="http://schemas.openxmlformats.org/drawingml/2006/main">
+            <a:pPr marL="241300" indent="-114300">
               <a:spcAft>
-                <a:spcPts val="1900"/>
+                <a:spcPts val="1800"/>
               </a:spcAft>
               <a:buChar char="•"/>
-              <a:defRPr sz="2025" b="0">
-                <a:solidFill>
-                  <a:srgbClr val="151515"/>
-                </a:solidFill>
-                <a:latin typeface="Arial"/>
-                <a:ea typeface="Arial"/>
-                <a:cs typeface="Arial"/>
-              </a:defRPr>
-            </a:pPr>
-            <a:r>
-              <a:rPr sz="2025" b="0">
-                <a:solidFill>
-                  <a:srgbClr val="151515"/>
-                </a:solidFill>
-                <a:latin typeface="Arial"/>
-                <a:ea typeface="Arial"/>
-                <a:cs typeface="Arial"/>
-              </a:rPr>
-              <a:t>AI assisted with structure, tests, names, and UI ideas</a:t>
-            </a:r>
-          </a:p>
-          <a:p xmlns:a="http://schemas.openxmlformats.org/drawingml/2006/main">
-            <a:pPr marL="292100" indent="-127000">
+              <a:defRPr sz="1950" b="0">
+                <a:solidFill>
+                  <a:srgbClr val="17212B"/>
+                </a:solidFill>
+                <a:latin typeface="Arial"/>
+                <a:ea typeface="Arial"/>
+                <a:cs typeface="Arial"/>
+              </a:defRPr>
+            </a:pPr>
+            <a:r>
+              <a:rPr sz="1950" b="0">
+                <a:solidFill>
+                  <a:srgbClr val="17212B"/>
+                </a:solidFill>
+                <a:latin typeface="Arial"/>
+                <a:ea typeface="Arial"/>
+                <a:cs typeface="Arial"/>
+              </a:rPr>
+              <a:t>Initial structure and test drafts</a:t>
+            </a:r>
+          </a:p>
+          <a:p xmlns:a="http://schemas.openxmlformats.org/drawingml/2006/main">
+            <a:pPr marL="241300" indent="-114300">
               <a:spcAft>
-                <a:spcPts val="1900"/>
+                <a:spcPts val="1800"/>
               </a:spcAft>
               <a:buChar char="•"/>
-              <a:defRPr sz="2025" b="0">
-                <a:solidFill>
-                  <a:srgbClr val="151515"/>
-                </a:solidFill>
-                <a:latin typeface="Arial"/>
-                <a:ea typeface="Arial"/>
-                <a:cs typeface="Arial"/>
-              </a:defRPr>
-            </a:pPr>
-            <a:r>
-              <a:rPr sz="2025" b="0">
-                <a:solidFill>
-                  <a:srgbClr val="151515"/>
-                </a:solidFill>
-                <a:latin typeface="Arial"/>
-                <a:ea typeface="Arial"/>
-                <a:cs typeface="Arial"/>
-              </a:rPr>
-              <a:t>Example output: BattleContext groups battle state</a:t>
-            </a:r>
-          </a:p>
-          <a:p xmlns:a="http://schemas.openxmlformats.org/drawingml/2006/main">
-            <a:pPr marL="292100" indent="-127000">
-              <a:spcAft>
-                <a:spcPts val="1900"/>
-              </a:spcAft>
-              <a:buChar char="•"/>
-              <a:defRPr sz="2025" b="0">
-                <a:solidFill>
-                  <a:srgbClr val="151515"/>
-                </a:solidFill>
-                <a:latin typeface="Arial"/>
-                <a:ea typeface="Arial"/>
-                <a:cs typeface="Arial"/>
-              </a:defRPr>
-            </a:pPr>
-            <a:r>
-              <a:rPr sz="2025" b="0">
-                <a:solidFill>
-                  <a:srgbClr val="151515"/>
-                </a:solidFill>
-                <a:latin typeface="Arial"/>
-                <a:ea typeface="Arial"/>
-                <a:cs typeface="Arial"/>
-              </a:rPr>
-              <a:t>Team-designed: cards, temperature, and combat decisions</a:t>
-            </a:r>
-          </a:p>
-          <a:p xmlns:a="http://schemas.openxmlformats.org/drawingml/2006/main">
-            <a:pPr marL="292100" indent="-127000">
-              <a:spcAft>
-                <a:spcPts val="1900"/>
-              </a:spcAft>
-              <a:buChar char="•"/>
-              <a:defRPr sz="2025" b="0">
-                <a:solidFill>
-                  <a:srgbClr val="151515"/>
-                </a:solidFill>
-                <a:latin typeface="Arial"/>
-                <a:ea typeface="Arial"/>
-                <a:cs typeface="Arial"/>
-              </a:defRPr>
-            </a:pPr>
-            <a:r>
-              <a:rPr sz="2025" b="0">
-                <a:solidFill>
-                  <a:srgbClr val="151515"/>
-                </a:solidFill>
-                <a:latin typeface="Arial"/>
-                <a:ea typeface="Arial"/>
-                <a:cs typeface="Arial"/>
-              </a:rPr>
-              <a:t>Show one real prompt → output during the talk, if available</a:t>
+              <a:defRPr sz="1950" b="0">
+                <a:solidFill>
+                  <a:srgbClr val="17212B"/>
+                </a:solidFill>
+                <a:latin typeface="Arial"/>
+                <a:ea typeface="Arial"/>
+                <a:cs typeface="Arial"/>
+              </a:defRPr>
+            </a:pPr>
+            <a:r>
+              <a:rPr sz="1950" b="0">
+                <a:solidFill>
+                  <a:srgbClr val="17212B"/>
+                </a:solidFill>
+                <a:latin typeface="Arial"/>
+                <a:ea typeface="Arial"/>
+                <a:cs typeface="Arial"/>
+              </a:rPr>
+              <a:t>Names, UI ideas, and refactoring</a:t>
+            </a:r>
+          </a:p>
+        </p:txBody>
+      </p:sp>
+      <p:sp>
+        <p:nvSpPr>
+          <p:cNvPr id="9" name="">
+            <a:extLst xmlns:a="http://schemas.openxmlformats.org/drawingml/2006/main">
+              <a:ext uri="{FF2B5EF4-FFF2-40B4-BE49-F238E27FC236}">
+                <a16:creationId xmlns:a16="http://schemas.microsoft.com/office/drawing/2014/main" id="{5D654C8B-5B47-4295-959B-7249D180B888}"/>
+              </a:ext>
+            </a:extLst>
+          </p:cNvPr>
+          <p:cNvSpPr>
+            <a:spLocks xmlns:a="http://schemas.openxmlformats.org/drawingml/2006/main" noGrp="1"/>
+          </p:cNvSpPr>
+          <p:nvPr/>
+        </p:nvSpPr>
+        <p:spPr>
+          <a:xfrm xmlns:a="http://schemas.openxmlformats.org/drawingml/2006/main">
+            <a:off x="666750" y="4248150"/>
+            <a:ext cx="4857750" cy="381000"/>
+          </a:xfrm>
+          <a:prstGeom xmlns:a="http://schemas.openxmlformats.org/drawingml/2006/main" prst="rect">
+            <a:avLst/>
+          </a:prstGeom>
+          <a:noFill xmlns:a="http://schemas.openxmlformats.org/drawingml/2006/main"/>
+          <a:ln xmlns:a="http://schemas.openxmlformats.org/drawingml/2006/main" w="0">
+            <a:noFill/>
+          </a:ln>
+        </p:spPr>
+        <p:txBody>
+          <a:bodyPr xmlns:a="http://schemas.openxmlformats.org/drawingml/2006/main">
+            <a:noAutofit/>
+          </a:bodyPr>
+          <a:lstStyle xmlns:a="http://schemas.openxmlformats.org/drawingml/2006/main"/>
+          <a:p xmlns:a="http://schemas.openxmlformats.org/drawingml/2006/main">
+            <a:pPr>
+              <a:defRPr sz="1575" b="1">
+                <a:solidFill>
+                  <a:srgbClr val="861F41"/>
+                </a:solidFill>
+                <a:latin typeface="Consolas"/>
+                <a:ea typeface="Consolas"/>
+                <a:cs typeface="Consolas"/>
+              </a:defRPr>
+            </a:pPr>
+            <a:r>
+              <a:rPr sz="1575" b="1">
+                <a:solidFill>
+                  <a:srgbClr val="861F41"/>
+                </a:solidFill>
+                <a:latin typeface="Consolas"/>
+                <a:ea typeface="Consolas"/>
+                <a:cs typeface="Consolas"/>
+              </a:rPr>
+              <a:t>TEAM-DESIGNED</a:t>
+            </a:r>
+          </a:p>
+        </p:txBody>
+      </p:sp>
+      <p:sp>
+        <p:nvSpPr>
+          <p:cNvPr id="10" name="">
+            <a:extLst xmlns:a="http://schemas.openxmlformats.org/drawingml/2006/main">
+              <a:ext uri="{FF2B5EF4-FFF2-40B4-BE49-F238E27FC236}">
+                <a16:creationId xmlns:a16="http://schemas.microsoft.com/office/drawing/2014/main" id="{29AE085E-E306-4A55-A467-09F3AEFA0C1F}"/>
+              </a:ext>
+            </a:extLst>
+          </p:cNvPr>
+          <p:cNvSpPr>
+            <a:spLocks xmlns:a="http://schemas.openxmlformats.org/drawingml/2006/main" noGrp="1"/>
+          </p:cNvSpPr>
+          <p:nvPr/>
+        </p:nvSpPr>
+        <p:spPr>
+          <a:xfrm xmlns:a="http://schemas.openxmlformats.org/drawingml/2006/main">
+            <a:off x="685800" y="4800600"/>
+            <a:ext cx="4667250" cy="952500"/>
+          </a:xfrm>
+          <a:prstGeom xmlns:a="http://schemas.openxmlformats.org/drawingml/2006/main" prst="rect">
+            <a:avLst/>
+          </a:prstGeom>
+          <a:noFill xmlns:a="http://schemas.openxmlformats.org/drawingml/2006/main"/>
+          <a:ln xmlns:a="http://schemas.openxmlformats.org/drawingml/2006/main" w="0">
+            <a:noFill/>
+          </a:ln>
+        </p:spPr>
+        <p:txBody>
+          <a:bodyPr xmlns:a="http://schemas.openxmlformats.org/drawingml/2006/main">
+            <a:noAutofit/>
+          </a:bodyPr>
+          <a:lstStyle xmlns:a="http://schemas.openxmlformats.org/drawingml/2006/main"/>
+          <a:p xmlns:a="http://schemas.openxmlformats.org/drawingml/2006/main">
+            <a:pPr>
+              <a:defRPr sz="2100" b="0">
+                <a:solidFill>
+                  <a:srgbClr val="17212B"/>
+                </a:solidFill>
+                <a:latin typeface="Arial"/>
+                <a:ea typeface="Arial"/>
+                <a:cs typeface="Arial"/>
+              </a:defRPr>
+            </a:pPr>
+            <a:r>
+              <a:rPr sz="2100" b="0">
+                <a:solidFill>
+                  <a:srgbClr val="17212B"/>
+                </a:solidFill>
+                <a:latin typeface="Arial"/>
+                <a:ea typeface="Arial"/>
+                <a:cs typeface="Arial"/>
+              </a:rPr>
+              <a:t>Cards, temperature,</a:t>
+            </a:r>
+          </a:p>
+          <a:p xmlns:a="http://schemas.openxmlformats.org/drawingml/2006/main">
+            <a:pPr>
+              <a:defRPr sz="2100" b="0">
+                <a:solidFill>
+                  <a:srgbClr val="17212B"/>
+                </a:solidFill>
+                <a:latin typeface="Arial"/>
+                <a:ea typeface="Arial"/>
+                <a:cs typeface="Arial"/>
+              </a:defRPr>
+            </a:pPr>
+            <a:r>
+              <a:rPr sz="2100" b="0">
+                <a:solidFill>
+                  <a:srgbClr val="17212B"/>
+                </a:solidFill>
+                <a:latin typeface="Arial"/>
+                <a:ea typeface="Arial"/>
+                <a:cs typeface="Arial"/>
+              </a:rPr>
+              <a:t>and core combat decisions</a:t>
+            </a:r>
+          </a:p>
+        </p:txBody>
+      </p:sp>
+      <p:sp>
+        <p:nvSpPr>
+          <p:cNvPr id="11" name="">
+            <a:extLst xmlns:a="http://schemas.openxmlformats.org/drawingml/2006/main">
+              <a:ext uri="{FF2B5EF4-FFF2-40B4-BE49-F238E27FC236}">
+                <a16:creationId xmlns:a16="http://schemas.microsoft.com/office/drawing/2014/main" id="{4AE0398E-50A2-4616-A892-C283D8FE7300}"/>
+              </a:ext>
+            </a:extLst>
+          </p:cNvPr>
+          <p:cNvSpPr>
+            <a:spLocks xmlns:a="http://schemas.openxmlformats.org/drawingml/2006/main" noGrp="1"/>
+          </p:cNvSpPr>
+          <p:nvPr/>
+        </p:nvSpPr>
+        <p:spPr>
+          <a:xfrm xmlns:a="http://schemas.openxmlformats.org/drawingml/2006/main">
+            <a:off x="6267450" y="1981200"/>
+            <a:ext cx="5267325" cy="381000"/>
+          </a:xfrm>
+          <a:prstGeom xmlns:a="http://schemas.openxmlformats.org/drawingml/2006/main" prst="rect">
+            <a:avLst/>
+          </a:prstGeom>
+          <a:noFill xmlns:a="http://schemas.openxmlformats.org/drawingml/2006/main"/>
+          <a:ln xmlns:a="http://schemas.openxmlformats.org/drawingml/2006/main" w="0">
+            <a:noFill/>
+          </a:ln>
+        </p:spPr>
+        <p:txBody>
+          <a:bodyPr xmlns:a="http://schemas.openxmlformats.org/drawingml/2006/main">
+            <a:noAutofit/>
+          </a:bodyPr>
+          <a:lstStyle xmlns:a="http://schemas.openxmlformats.org/drawingml/2006/main"/>
+          <a:p xmlns:a="http://schemas.openxmlformats.org/drawingml/2006/main">
+            <a:pPr>
+              <a:defRPr sz="1575" b="1">
+                <a:solidFill>
+                  <a:srgbClr val="861F41"/>
+                </a:solidFill>
+                <a:latin typeface="Consolas"/>
+                <a:ea typeface="Consolas"/>
+                <a:cs typeface="Consolas"/>
+              </a:defRPr>
+            </a:pPr>
+            <a:r>
+              <a:rPr sz="1575" b="1">
+                <a:solidFill>
+                  <a:srgbClr val="861F41"/>
+                </a:solidFill>
+                <a:latin typeface="Consolas"/>
+                <a:ea typeface="Consolas"/>
+                <a:cs typeface="Consolas"/>
+              </a:rPr>
+              <a:t>EXAMPLE: BATTLECONTEXT</a:t>
+            </a:r>
+          </a:p>
+        </p:txBody>
+      </p:sp>
+      <p:sp>
+        <p:nvSpPr>
+          <p:cNvPr id="12" name="">
+            <a:extLst xmlns:a="http://schemas.openxmlformats.org/drawingml/2006/main">
+              <a:ext uri="{FF2B5EF4-FFF2-40B4-BE49-F238E27FC236}">
+                <a16:creationId xmlns:a16="http://schemas.microsoft.com/office/drawing/2014/main" id="{F8686C2D-E075-4840-B160-EE9F29D52CC5}"/>
+              </a:ext>
+            </a:extLst>
+          </p:cNvPr>
+          <p:cNvSpPr>
+            <a:spLocks xmlns:a="http://schemas.openxmlformats.org/drawingml/2006/main" noGrp="1"/>
+          </p:cNvSpPr>
+          <p:nvPr/>
+        </p:nvSpPr>
+        <p:spPr>
+          <a:xfrm xmlns:a="http://schemas.openxmlformats.org/drawingml/2006/main">
+            <a:off x="6276975" y="2562225"/>
+            <a:ext cx="5210175" cy="447675"/>
+          </a:xfrm>
+          <a:prstGeom xmlns:a="http://schemas.openxmlformats.org/drawingml/2006/main" prst="rect">
+            <a:avLst/>
+          </a:prstGeom>
+          <a:noFill xmlns:a="http://schemas.openxmlformats.org/drawingml/2006/main"/>
+          <a:ln xmlns:a="http://schemas.openxmlformats.org/drawingml/2006/main" w="0">
+            <a:noFill/>
+          </a:ln>
+        </p:spPr>
+        <p:txBody>
+          <a:bodyPr xmlns:a="http://schemas.openxmlformats.org/drawingml/2006/main">
+            <a:noAutofit/>
+          </a:bodyPr>
+          <a:lstStyle xmlns:a="http://schemas.openxmlformats.org/drawingml/2006/main"/>
+          <a:p xmlns:a="http://schemas.openxmlformats.org/drawingml/2006/main">
+            <a:pPr>
+              <a:defRPr sz="2175" b="1">
+                <a:solidFill>
+                  <a:srgbClr val="17212B"/>
+                </a:solidFill>
+                <a:latin typeface="Arial"/>
+                <a:ea typeface="Arial"/>
+                <a:cs typeface="Arial"/>
+              </a:defRPr>
+            </a:pPr>
+            <a:r>
+              <a:rPr sz="2175" b="1">
+                <a:solidFill>
+                  <a:srgbClr val="17212B"/>
+                </a:solidFill>
+                <a:latin typeface="Arial"/>
+                <a:ea typeface="Arial"/>
+                <a:cs typeface="Arial"/>
+              </a:rPr>
+              <a:t>One place for battle state</a:t>
+            </a:r>
+          </a:p>
+        </p:txBody>
+      </p:sp>
+      <p:sp>
+        <p:nvSpPr>
+          <p:cNvPr id="13" name="">
+            <a:extLst xmlns:a="http://schemas.openxmlformats.org/drawingml/2006/main">
+              <a:ext uri="{FF2B5EF4-FFF2-40B4-BE49-F238E27FC236}">
+                <a16:creationId xmlns:a16="http://schemas.microsoft.com/office/drawing/2014/main" id="{C8E65C8D-EE7A-417C-9FEC-A4EF6DDCC182}"/>
+              </a:ext>
+            </a:extLst>
+          </p:cNvPr>
+          <p:cNvSpPr>
+            <a:spLocks xmlns:a="http://schemas.openxmlformats.org/drawingml/2006/main" noGrp="1"/>
+          </p:cNvSpPr>
+          <p:nvPr/>
+        </p:nvSpPr>
+        <p:spPr>
+          <a:xfrm xmlns:a="http://schemas.openxmlformats.org/drawingml/2006/main">
+            <a:off x="6296025" y="3286125"/>
+            <a:ext cx="5257800" cy="2105025"/>
+          </a:xfrm>
+          <a:prstGeom xmlns:a="http://schemas.openxmlformats.org/drawingml/2006/main" prst="rect">
+            <a:avLst/>
+          </a:prstGeom>
+          <a:noFill xmlns:a="http://schemas.openxmlformats.org/drawingml/2006/main"/>
+          <a:ln xmlns:a="http://schemas.openxmlformats.org/drawingml/2006/main" w="0">
+            <a:noFill/>
+          </a:ln>
+        </p:spPr>
+        <p:txBody>
+          <a:bodyPr xmlns:a="http://schemas.openxmlformats.org/drawingml/2006/main">
+            <a:noAutofit/>
+          </a:bodyPr>
+          <a:lstStyle xmlns:a="http://schemas.openxmlformats.org/drawingml/2006/main"/>
+          <a:p xmlns:a="http://schemas.openxmlformats.org/drawingml/2006/main">
+            <a:pPr>
+              <a:defRPr sz="1575" b="0">
+                <a:solidFill>
+                  <a:srgbClr val="216C8C"/>
+                </a:solidFill>
+                <a:latin typeface="Consolas"/>
+                <a:ea typeface="Consolas"/>
+                <a:cs typeface="Consolas"/>
+              </a:defRPr>
+            </a:pPr>
+            <a:r>
+              <a:rPr sz="1575" b="0">
+                <a:solidFill>
+                  <a:srgbClr val="216C8C"/>
+                </a:solidFill>
+                <a:latin typeface="Consolas"/>
+                <a:ea typeface="Consolas"/>
+                <a:cs typeface="Consolas"/>
+              </a:rPr>
+              <a:t>private final Player player;</a:t>
+            </a:r>
+          </a:p>
+          <a:p xmlns:a="http://schemas.openxmlformats.org/drawingml/2006/main">
+            <a:r>
+              <a:t/>
+            </a:r>
+          </a:p>
+          <a:p xmlns:a="http://schemas.openxmlformats.org/drawingml/2006/main">
+            <a:pPr>
+              <a:defRPr sz="1575" b="0">
+                <a:solidFill>
+                  <a:srgbClr val="216C8C"/>
+                </a:solidFill>
+                <a:latin typeface="Consolas"/>
+                <a:ea typeface="Consolas"/>
+                <a:cs typeface="Consolas"/>
+              </a:defRPr>
+            </a:pPr>
+            <a:r>
+              <a:rPr sz="1575" b="0">
+                <a:solidFill>
+                  <a:srgbClr val="216C8C"/>
+                </a:solidFill>
+                <a:latin typeface="Consolas"/>
+                <a:ea typeface="Consolas"/>
+                <a:cs typeface="Consolas"/>
+              </a:rPr>
+              <a:t>private final ArrayList&lt;Enemy&gt; enemies;</a:t>
+            </a:r>
+          </a:p>
+          <a:p xmlns:a="http://schemas.openxmlformats.org/drawingml/2006/main">
+            <a:r>
+              <a:t/>
+            </a:r>
+          </a:p>
+          <a:p xmlns:a="http://schemas.openxmlformats.org/drawingml/2006/main">
+            <a:pPr>
+              <a:defRPr sz="1575" b="0">
+                <a:solidFill>
+                  <a:srgbClr val="216C8C"/>
+                </a:solidFill>
+                <a:latin typeface="Consolas"/>
+                <a:ea typeface="Consolas"/>
+                <a:cs typeface="Consolas"/>
+              </a:defRPr>
+            </a:pPr>
+            <a:r>
+              <a:rPr sz="1575" b="0">
+                <a:solidFill>
+                  <a:srgbClr val="216C8C"/>
+                </a:solidFill>
+                <a:latin typeface="Consolas"/>
+                <a:ea typeface="Consolas"/>
+                <a:cs typeface="Consolas"/>
+              </a:rPr>
+              <a:t>private final BattlePiles piles;</a:t>
+            </a:r>
+          </a:p>
+        </p:txBody>
+      </p:sp>
+      <p:sp>
+        <p:nvSpPr>
+          <p:cNvPr id="14" name="">
+            <a:extLst xmlns:a="http://schemas.openxmlformats.org/drawingml/2006/main">
+              <a:ext uri="{FF2B5EF4-FFF2-40B4-BE49-F238E27FC236}">
+                <a16:creationId xmlns:a16="http://schemas.microsoft.com/office/drawing/2014/main" id="{74DB0B05-DC2B-4C75-B021-8E81123C825F}"/>
+              </a:ext>
+            </a:extLst>
+          </p:cNvPr>
+          <p:cNvSpPr>
+            <a:spLocks xmlns:a="http://schemas.openxmlformats.org/drawingml/2006/main" noGrp="1"/>
+          </p:cNvSpPr>
+          <p:nvPr/>
+        </p:nvSpPr>
+        <p:spPr>
+          <a:xfrm xmlns:a="http://schemas.openxmlformats.org/drawingml/2006/main">
+            <a:off x="6296025" y="5553075"/>
+            <a:ext cx="5095875" cy="342900"/>
+          </a:xfrm>
+          <a:prstGeom xmlns:a="http://schemas.openxmlformats.org/drawingml/2006/main" prst="rect">
+            <a:avLst/>
+          </a:prstGeom>
+          <a:noFill xmlns:a="http://schemas.openxmlformats.org/drawingml/2006/main"/>
+          <a:ln xmlns:a="http://schemas.openxmlformats.org/drawingml/2006/main" w="0">
+            <a:noFill/>
+          </a:ln>
+        </p:spPr>
+        <p:txBody>
+          <a:bodyPr xmlns:a="http://schemas.openxmlformats.org/drawingml/2006/main">
+            <a:noAutofit/>
+          </a:bodyPr>
+          <a:lstStyle xmlns:a="http://schemas.openxmlformats.org/drawingml/2006/main"/>
+          <a:p xmlns:a="http://schemas.openxmlformats.org/drawingml/2006/main">
+            <a:pPr>
+              <a:defRPr sz="1425" b="0">
+                <a:solidFill>
+                  <a:srgbClr val="59616B"/>
+                </a:solidFill>
+                <a:latin typeface="Arial"/>
+                <a:ea typeface="Arial"/>
+                <a:cs typeface="Arial"/>
+              </a:defRPr>
+            </a:pPr>
+            <a:r>
+              <a:rPr sz="1425" b="0">
+                <a:solidFill>
+                  <a:srgbClr val="59616B"/>
+                </a:solidFill>
+                <a:latin typeface="Arial"/>
+                <a:ea typeface="Arial"/>
+                <a:cs typeface="Arial"/>
+              </a:rPr>
+              <a:t>Fields excerpt from the project</a:t>
             </a:r>
           </a:p>
         </p:txBody>
@@ -4283,7 +7038,7 @@
     <p:bg>
       <p:bgPr>
         <a:solidFill xmlns:a="http://schemas.openxmlformats.org/drawingml/2006/main">
-          <a:srgbClr val="FFFFFF"/>
+          <a:srgbClr val="10151D"/>
         </a:solidFill>
       </p:bgPr>
     </p:bg>
@@ -4312,43 +7067,44 @@
         </p:nvSpPr>
         <p:spPr>
           <a:xfrm xmlns:a="http://schemas.openxmlformats.org/drawingml/2006/main">
-            <a:off x="666750" y="266700"/>
-            <a:ext cx="10668000" cy="304800"/>
-          </a:xfrm>
-          <a:prstGeom xmlns:a="http://schemas.openxmlformats.org/drawingml/2006/main" prst="rect">
-            <a:avLst/>
-          </a:prstGeom>
-          <a:noFill xmlns:a="http://schemas.openxmlformats.org/drawingml/2006/main"/>
-          <a:ln xmlns:a="http://schemas.openxmlformats.org/drawingml/2006/main" w="0">
-            <a:noFill/>
-          </a:ln>
-        </p:spPr>
-        <p:txBody>
-          <a:bodyPr xmlns:a="http://schemas.openxmlformats.org/drawingml/2006/main">
-            <a:noAutofit/>
-          </a:bodyPr>
-          <a:lstStyle xmlns:a="http://schemas.openxmlformats.org/drawingml/2006/main"/>
-          <a:p xmlns:a="http://schemas.openxmlformats.org/drawingml/2006/main">
-            <a:pPr>
+            <a:off x="609600" y="304800"/>
+            <a:ext cx="10096500" cy="285750"/>
+          </a:xfrm>
+          <a:prstGeom xmlns:a="http://schemas.openxmlformats.org/drawingml/2006/main" prst="rect">
+            <a:avLst/>
+          </a:prstGeom>
+          <a:noFill xmlns:a="http://schemas.openxmlformats.org/drawingml/2006/main"/>
+          <a:ln xmlns:a="http://schemas.openxmlformats.org/drawingml/2006/main" w="0">
+            <a:noFill/>
+          </a:ln>
+        </p:spPr>
+        <p:txBody>
+          <a:bodyPr xmlns:a="http://schemas.openxmlformats.org/drawingml/2006/main">
+            <a:noAutofit/>
+          </a:bodyPr>
+          <a:lstStyle xmlns:a="http://schemas.openxmlformats.org/drawingml/2006/main"/>
+          <a:p xmlns:a="http://schemas.openxmlformats.org/drawingml/2006/main">
+            <a:pPr>
+              <a:buNone/>
               <a:defRPr sz="1275" b="1">
                 <a:solidFill>
-                  <a:srgbClr val="555555"/>
-                </a:solidFill>
-                <a:latin typeface="Arial"/>
-                <a:ea typeface="Arial"/>
-                <a:cs typeface="Arial"/>
+                  <a:srgbClr val="E5751F"/>
+                </a:solidFill>
+                <a:latin typeface="Consolas"/>
+                <a:ea typeface="Consolas"/>
+                <a:cs typeface="Consolas"/>
               </a:defRPr>
             </a:pPr>
             <a:r>
               <a:rPr sz="1275" b="1">
                 <a:solidFill>
-                  <a:srgbClr val="555555"/>
-                </a:solidFill>
-                <a:latin typeface="Arial"/>
-                <a:ea typeface="Arial"/>
-                <a:cs typeface="Arial"/>
-              </a:rPr>
-              <a:t>4 · GENAI REFLECTION</a:t>
+                  <a:srgbClr val="E5751F"/>
+                </a:solidFill>
+                <a:latin typeface="Consolas"/>
+                <a:ea typeface="Consolas"/>
+                <a:cs typeface="Consolas"/>
+              </a:rPr>
+              <a:t>04  /  GENAI REFLECTION</a:t>
             </a:r>
           </a:p>
         </p:txBody>
@@ -4369,37 +7125,38 @@
         </p:nvSpPr>
         <p:spPr>
           <a:xfrm xmlns:a="http://schemas.openxmlformats.org/drawingml/2006/main">
-            <a:off x="666750" y="685800"/>
-            <a:ext cx="10763250" cy="714375"/>
-          </a:xfrm>
-          <a:prstGeom xmlns:a="http://schemas.openxmlformats.org/drawingml/2006/main" prst="rect">
-            <a:avLst/>
-          </a:prstGeom>
-          <a:noFill xmlns:a="http://schemas.openxmlformats.org/drawingml/2006/main"/>
-          <a:ln xmlns:a="http://schemas.openxmlformats.org/drawingml/2006/main" w="0">
-            <a:noFill/>
-          </a:ln>
-        </p:spPr>
-        <p:txBody>
-          <a:bodyPr xmlns:a="http://schemas.openxmlformats.org/drawingml/2006/main">
-            <a:noAutofit/>
-          </a:bodyPr>
-          <a:lstStyle xmlns:a="http://schemas.openxmlformats.org/drawingml/2006/main"/>
-          <a:p xmlns:a="http://schemas.openxmlformats.org/drawingml/2006/main">
-            <a:pPr>
-              <a:defRPr sz="3150" b="1">
-                <a:solidFill>
-                  <a:srgbClr val="151515"/>
-                </a:solidFill>
-                <a:latin typeface="Arial"/>
-                <a:ea typeface="Arial"/>
-                <a:cs typeface="Arial"/>
-              </a:defRPr>
-            </a:pPr>
-            <a:r>
-              <a:rPr sz="3150" b="1">
-                <a:solidFill>
-                  <a:srgbClr val="151515"/>
+            <a:off x="609600" y="781050"/>
+            <a:ext cx="10906125" cy="809625"/>
+          </a:xfrm>
+          <a:prstGeom xmlns:a="http://schemas.openxmlformats.org/drawingml/2006/main" prst="rect">
+            <a:avLst/>
+          </a:prstGeom>
+          <a:noFill xmlns:a="http://schemas.openxmlformats.org/drawingml/2006/main"/>
+          <a:ln xmlns:a="http://schemas.openxmlformats.org/drawingml/2006/main" w="0">
+            <a:noFill/>
+          </a:ln>
+        </p:spPr>
+        <p:txBody>
+          <a:bodyPr xmlns:a="http://schemas.openxmlformats.org/drawingml/2006/main">
+            <a:noAutofit/>
+          </a:bodyPr>
+          <a:lstStyle xmlns:a="http://schemas.openxmlformats.org/drawingml/2006/main"/>
+          <a:p xmlns:a="http://schemas.openxmlformats.org/drawingml/2006/main">
+            <a:pPr>
+              <a:buNone/>
+              <a:defRPr sz="3450" b="1">
+                <a:solidFill>
+                  <a:srgbClr val="F7F7F4"/>
+                </a:solidFill>
+                <a:latin typeface="Arial"/>
+                <a:ea typeface="Arial"/>
+                <a:cs typeface="Arial"/>
+              </a:defRPr>
+            </a:pPr>
+            <a:r>
+              <a:rPr sz="3450" b="1">
+                <a:solidFill>
+                  <a:srgbClr val="F7F7F4"/>
                 </a:solidFill>
                 <a:latin typeface="Arial"/>
                 <a:ea typeface="Arial"/>
@@ -4426,185 +7183,505 @@
         </p:nvSpPr>
         <p:spPr>
           <a:xfrm xmlns:a="http://schemas.openxmlformats.org/drawingml/2006/main">
-            <a:off x="11049000" y="6343650"/>
-            <a:ext cx="476250" cy="238125"/>
-          </a:xfrm>
-          <a:prstGeom xmlns:a="http://schemas.openxmlformats.org/drawingml/2006/main" prst="rect">
-            <a:avLst/>
-          </a:prstGeom>
-          <a:noFill xmlns:a="http://schemas.openxmlformats.org/drawingml/2006/main"/>
-          <a:ln xmlns:a="http://schemas.openxmlformats.org/drawingml/2006/main" w="0">
-            <a:noFill/>
-          </a:ln>
-        </p:spPr>
-        <p:txBody>
-          <a:bodyPr xmlns:a="http://schemas.openxmlformats.org/drawingml/2006/main">
-            <a:noAutofit/>
-          </a:bodyPr>
-          <a:lstStyle xmlns:a="http://schemas.openxmlformats.org/drawingml/2006/main"/>
-          <a:p xmlns:a="http://schemas.openxmlformats.org/drawingml/2006/main">
-            <a:pPr>
+            <a:off x="10610850" y="6305550"/>
+            <a:ext cx="1095375" cy="276225"/>
+          </a:xfrm>
+          <a:prstGeom xmlns:a="http://schemas.openxmlformats.org/drawingml/2006/main" prst="rect">
+            <a:avLst/>
+          </a:prstGeom>
+          <a:noFill xmlns:a="http://schemas.openxmlformats.org/drawingml/2006/main"/>
+          <a:ln xmlns:a="http://schemas.openxmlformats.org/drawingml/2006/main" w="0">
+            <a:noFill/>
+          </a:ln>
+        </p:spPr>
+        <p:txBody>
+          <a:bodyPr xmlns:a="http://schemas.openxmlformats.org/drawingml/2006/main">
+            <a:noAutofit/>
+          </a:bodyPr>
+          <a:lstStyle xmlns:a="http://schemas.openxmlformats.org/drawingml/2006/main"/>
+          <a:p xmlns:a="http://schemas.openxmlformats.org/drawingml/2006/main">
+            <a:pPr>
+              <a:buNone/>
               <a:defRPr sz="1200" b="0">
                 <a:solidFill>
-                  <a:srgbClr val="555555"/>
-                </a:solidFill>
-                <a:latin typeface="Arial"/>
-                <a:ea typeface="Arial"/>
-                <a:cs typeface="Arial"/>
+                  <a:srgbClr val="B7C1CB"/>
+                </a:solidFill>
+                <a:latin typeface="Consolas"/>
+                <a:ea typeface="Consolas"/>
+                <a:cs typeface="Consolas"/>
               </a:defRPr>
             </a:pPr>
             <a:r>
               <a:rPr sz="1200" b="0">
                 <a:solidFill>
-                  <a:srgbClr val="555555"/>
-                </a:solidFill>
-                <a:latin typeface="Arial"/>
-                <a:ea typeface="Arial"/>
-                <a:cs typeface="Arial"/>
-              </a:rPr>
-              <a:t>09</a:t>
-            </a:r>
-          </a:p>
-        </p:txBody>
-      </p:sp>
-      <p:sp>
-        <p:nvSpPr>
-          <p:cNvPr id="4" name="">
-            <a:extLst xmlns:a="http://schemas.openxmlformats.org/drawingml/2006/main">
-              <a:ext uri="{FF2B5EF4-FFF2-40B4-BE49-F238E27FC236}">
-                <a16:creationId xmlns:a16="http://schemas.microsoft.com/office/drawing/2014/main" id="{E11D4AB9-09A1-435D-9FF7-21E61775FEF1}"/>
-              </a:ext>
-            </a:extLst>
-          </p:cNvPr>
-          <p:cNvSpPr>
-            <a:spLocks xmlns:a="http://schemas.openxmlformats.org/drawingml/2006/main" noGrp="1"/>
-          </p:cNvSpPr>
-          <p:nvPr/>
-        </p:nvSpPr>
-        <p:spPr>
-          <a:xfrm xmlns:a="http://schemas.openxmlformats.org/drawingml/2006/main">
-            <a:off x="857250" y="1790700"/>
-            <a:ext cx="10477500" cy="4286250"/>
-          </a:xfrm>
-          <a:prstGeom xmlns:a="http://schemas.openxmlformats.org/drawingml/2006/main" prst="rect">
-            <a:avLst/>
-          </a:prstGeom>
-          <a:noFill xmlns:a="http://schemas.openxmlformats.org/drawingml/2006/main"/>
-          <a:ln xmlns:a="http://schemas.openxmlformats.org/drawingml/2006/main" w="0">
-            <a:noFill/>
-          </a:ln>
-        </p:spPr>
-        <p:txBody>
-          <a:bodyPr xmlns:a="http://schemas.openxmlformats.org/drawingml/2006/main">
-            <a:noAutofit/>
-          </a:bodyPr>
-          <a:lstStyle xmlns:a="http://schemas.openxmlformats.org/drawingml/2006/main"/>
-          <a:p xmlns:a="http://schemas.openxmlformats.org/drawingml/2006/main">
-            <a:pPr marL="292100" indent="-127000">
+                  <a:srgbClr val="B7C1CB"/>
+                </a:solidFill>
+                <a:latin typeface="Consolas"/>
+                <a:ea typeface="Consolas"/>
+                <a:cs typeface="Consolas"/>
+              </a:rPr>
+              <a:t>09 / 09</a:t>
+            </a:r>
+          </a:p>
+        </p:txBody>
+      </p:sp>
+      <p:sp>
+        <p:nvSpPr>
+          <p:cNvPr id="6" name="">
+            <a:extLst xmlns:a="http://schemas.openxmlformats.org/drawingml/2006/main">
+              <a:ext uri="{FF2B5EF4-FFF2-40B4-BE49-F238E27FC236}">
+                <a16:creationId xmlns:a16="http://schemas.microsoft.com/office/drawing/2014/main" id="{EA1A18BF-2116-44EF-B9C9-E88DBBC0BC5B}"/>
+              </a:ext>
+            </a:extLst>
+          </p:cNvPr>
+          <p:cNvSpPr>
+            <a:spLocks xmlns:a="http://schemas.openxmlformats.org/drawingml/2006/main" noGrp="1"/>
+          </p:cNvSpPr>
+          <p:nvPr/>
+        </p:nvSpPr>
+        <p:spPr>
+          <a:xfrm xmlns:a="http://schemas.openxmlformats.org/drawingml/2006/main">
+            <a:off x="609600" y="6305550"/>
+            <a:ext cx="5715000" cy="285750"/>
+          </a:xfrm>
+          <a:prstGeom xmlns:a="http://schemas.openxmlformats.org/drawingml/2006/main" prst="rect">
+            <a:avLst/>
+          </a:prstGeom>
+          <a:noFill xmlns:a="http://schemas.openxmlformats.org/drawingml/2006/main"/>
+          <a:ln xmlns:a="http://schemas.openxmlformats.org/drawingml/2006/main" w="0">
+            <a:noFill/>
+          </a:ln>
+        </p:spPr>
+        <p:txBody>
+          <a:bodyPr xmlns:a="http://schemas.openxmlformats.org/drawingml/2006/main">
+            <a:noAutofit/>
+          </a:bodyPr>
+          <a:lstStyle xmlns:a="http://schemas.openxmlformats.org/drawingml/2006/main"/>
+          <a:p xmlns:a="http://schemas.openxmlformats.org/drawingml/2006/main">
+            <a:pPr>
+              <a:defRPr sz="1125" b="0">
+                <a:solidFill>
+                  <a:srgbClr val="B7C1CB"/>
+                </a:solidFill>
+                <a:latin typeface="Consolas"/>
+                <a:ea typeface="Consolas"/>
+                <a:cs typeface="Consolas"/>
+              </a:defRPr>
+            </a:pPr>
+            <a:r>
+              <a:rPr sz="1125" b="0">
+                <a:solidFill>
+                  <a:srgbClr val="B7C1CB"/>
+                </a:solidFill>
+                <a:latin typeface="Consolas"/>
+                <a:ea typeface="Consolas"/>
+                <a:cs typeface="Consolas"/>
+              </a:rPr>
+              <a:t>SLAYVT  /  VIRGINIA TECH</a:t>
+            </a:r>
+          </a:p>
+        </p:txBody>
+      </p:sp>
+      <p:sp>
+        <p:nvSpPr>
+          <p:cNvPr id="7" name="">
+            <a:extLst xmlns:a="http://schemas.openxmlformats.org/drawingml/2006/main">
+              <a:ext uri="{FF2B5EF4-FFF2-40B4-BE49-F238E27FC236}">
+                <a16:creationId xmlns:a16="http://schemas.microsoft.com/office/drawing/2014/main" id="{F74B236C-26AE-4EF3-B86E-C917056D2B88}"/>
+              </a:ext>
+            </a:extLst>
+          </p:cNvPr>
+          <p:cNvSpPr>
+            <a:spLocks xmlns:a="http://schemas.openxmlformats.org/drawingml/2006/main" noGrp="1"/>
+          </p:cNvSpPr>
+          <p:nvPr/>
+        </p:nvSpPr>
+        <p:spPr>
+          <a:xfrm xmlns:a="http://schemas.openxmlformats.org/drawingml/2006/main">
+            <a:off x="666750" y="2057400"/>
+            <a:ext cx="4762500" cy="400050"/>
+          </a:xfrm>
+          <a:prstGeom xmlns:a="http://schemas.openxmlformats.org/drawingml/2006/main" prst="rect">
+            <a:avLst/>
+          </a:prstGeom>
+          <a:noFill xmlns:a="http://schemas.openxmlformats.org/drawingml/2006/main"/>
+          <a:ln xmlns:a="http://schemas.openxmlformats.org/drawingml/2006/main" w="0">
+            <a:noFill/>
+          </a:ln>
+        </p:spPr>
+        <p:txBody>
+          <a:bodyPr xmlns:a="http://schemas.openxmlformats.org/drawingml/2006/main">
+            <a:noAutofit/>
+          </a:bodyPr>
+          <a:lstStyle xmlns:a="http://schemas.openxmlformats.org/drawingml/2006/main"/>
+          <a:p xmlns:a="http://schemas.openxmlformats.org/drawingml/2006/main">
+            <a:pPr>
+              <a:defRPr sz="1650" b="1">
+                <a:solidFill>
+                  <a:srgbClr val="E5751F"/>
+                </a:solidFill>
+                <a:latin typeface="Consolas"/>
+                <a:ea typeface="Consolas"/>
+                <a:cs typeface="Consolas"/>
+              </a:defRPr>
+            </a:pPr>
+            <a:r>
+              <a:rPr sz="1650" b="1">
+                <a:solidFill>
+                  <a:srgbClr val="E5751F"/>
+                </a:solidFill>
+                <a:latin typeface="Consolas"/>
+                <a:ea typeface="Consolas"/>
+                <a:cs typeface="Consolas"/>
+              </a:rPr>
+              <a:t>USEFUL</a:t>
+            </a:r>
+          </a:p>
+        </p:txBody>
+      </p:sp>
+      <p:sp>
+        <p:nvSpPr>
+          <p:cNvPr id="8" name="">
+            <a:extLst xmlns:a="http://schemas.openxmlformats.org/drawingml/2006/main">
+              <a:ext uri="{FF2B5EF4-FFF2-40B4-BE49-F238E27FC236}">
+                <a16:creationId xmlns:a16="http://schemas.microsoft.com/office/drawing/2014/main" id="{FF0AEE48-AF88-4B7C-97D2-1AB1CA59C172}"/>
+              </a:ext>
+            </a:extLst>
+          </p:cNvPr>
+          <p:cNvSpPr>
+            <a:spLocks xmlns:a="http://schemas.openxmlformats.org/drawingml/2006/main" noGrp="1"/>
+          </p:cNvSpPr>
+          <p:nvPr/>
+        </p:nvSpPr>
+        <p:spPr>
+          <a:xfrm xmlns:a="http://schemas.openxmlformats.org/drawingml/2006/main">
+            <a:off x="666750" y="2667000"/>
+            <a:ext cx="4791075" cy="1619250"/>
+          </a:xfrm>
+          <a:prstGeom xmlns:a="http://schemas.openxmlformats.org/drawingml/2006/main" prst="rect">
+            <a:avLst/>
+          </a:prstGeom>
+          <a:noFill xmlns:a="http://schemas.openxmlformats.org/drawingml/2006/main"/>
+          <a:ln xmlns:a="http://schemas.openxmlformats.org/drawingml/2006/main" w="0">
+            <a:noFill/>
+          </a:ln>
+        </p:spPr>
+        <p:txBody>
+          <a:bodyPr xmlns:a="http://schemas.openxmlformats.org/drawingml/2006/main">
+            <a:noAutofit/>
+          </a:bodyPr>
+          <a:lstStyle xmlns:a="http://schemas.openxmlformats.org/drawingml/2006/main"/>
+          <a:p xmlns:a="http://schemas.openxmlformats.org/drawingml/2006/main">
+            <a:pPr marL="241300" indent="-114300">
               <a:spcAft>
-                <a:spcPts val="1900"/>
+                <a:spcPts val="1800"/>
               </a:spcAft>
               <a:buChar char="•"/>
-              <a:defRPr sz="2100" b="0">
-                <a:solidFill>
-                  <a:srgbClr val="151515"/>
-                </a:solidFill>
-                <a:latin typeface="Arial"/>
-                <a:ea typeface="Arial"/>
-                <a:cs typeface="Arial"/>
-              </a:defRPr>
-            </a:pPr>
-            <a:r>
-              <a:rPr sz="2100" b="0">
-                <a:solidFill>
-                  <a:srgbClr val="151515"/>
-                </a:solidFill>
-                <a:latin typeface="Arial"/>
-                <a:ea typeface="Arial"/>
-                <a:cs typeface="Arial"/>
-              </a:rPr>
-              <a:t>Worked: fast drafts, refactors, and unfamiliar-language help</a:t>
-            </a:r>
-          </a:p>
-          <a:p xmlns:a="http://schemas.openxmlformats.org/drawingml/2006/main">
-            <a:pPr marL="292100" indent="-127000">
+              <a:defRPr sz="2175" b="0">
+                <a:solidFill>
+                  <a:srgbClr val="F7F7F4"/>
+                </a:solidFill>
+                <a:latin typeface="Arial"/>
+                <a:ea typeface="Arial"/>
+                <a:cs typeface="Arial"/>
+              </a:defRPr>
+            </a:pPr>
+            <a:r>
+              <a:rPr sz="2175" b="0">
+                <a:solidFill>
+                  <a:srgbClr val="F7F7F4"/>
+                </a:solidFill>
+                <a:latin typeface="Arial"/>
+                <a:ea typeface="Arial"/>
+                <a:cs typeface="Arial"/>
+              </a:rPr>
+              <a:t>Fast drafts and refactoring</a:t>
+            </a:r>
+          </a:p>
+          <a:p xmlns:a="http://schemas.openxmlformats.org/drawingml/2006/main">
+            <a:pPr marL="241300" indent="-114300">
               <a:spcAft>
-                <a:spcPts val="1900"/>
+                <a:spcPts val="1800"/>
               </a:spcAft>
               <a:buChar char="•"/>
-              <a:defRPr sz="2100" b="0">
-                <a:solidFill>
-                  <a:srgbClr val="151515"/>
-                </a:solidFill>
-                <a:latin typeface="Arial"/>
-                <a:ea typeface="Arial"/>
-                <a:cs typeface="Arial"/>
-              </a:defRPr>
-            </a:pPr>
-            <a:r>
-              <a:rPr sz="2100" b="0">
-                <a:solidFill>
-                  <a:srgbClr val="151515"/>
-                </a:solidFill>
-                <a:latin typeface="Arial"/>
-                <a:ea typeface="Arial"/>
-                <a:cs typeface="Arial"/>
-              </a:rPr>
-              <a:t>Did not: generic visuals and unnecessary code</a:t>
-            </a:r>
-          </a:p>
-          <a:p xmlns:a="http://schemas.openxmlformats.org/drawingml/2006/main">
-            <a:pPr marL="292100" indent="-127000">
+              <a:defRPr sz="2175" b="0">
+                <a:solidFill>
+                  <a:srgbClr val="F7F7F4"/>
+                </a:solidFill>
+                <a:latin typeface="Arial"/>
+                <a:ea typeface="Arial"/>
+                <a:cs typeface="Arial"/>
+              </a:defRPr>
+            </a:pPr>
+            <a:r>
+              <a:rPr sz="2175" b="0">
+                <a:solidFill>
+                  <a:srgbClr val="F7F7F4"/>
+                </a:solidFill>
+                <a:latin typeface="Arial"/>
+                <a:ea typeface="Arial"/>
+                <a:cs typeface="Arial"/>
+              </a:rPr>
+              <a:t>Help with unfamiliar languages</a:t>
+            </a:r>
+          </a:p>
+        </p:txBody>
+      </p:sp>
+      <p:sp>
+        <p:nvSpPr>
+          <p:cNvPr id="9" name="">
+            <a:extLst xmlns:a="http://schemas.openxmlformats.org/drawingml/2006/main">
+              <a:ext uri="{FF2B5EF4-FFF2-40B4-BE49-F238E27FC236}">
+                <a16:creationId xmlns:a16="http://schemas.microsoft.com/office/drawing/2014/main" id="{6A7F2C20-71D5-4CD4-94FB-D0AED523229D}"/>
+              </a:ext>
+            </a:extLst>
+          </p:cNvPr>
+          <p:cNvSpPr>
+            <a:spLocks xmlns:a="http://schemas.openxmlformats.org/drawingml/2006/main" noGrp="1"/>
+          </p:cNvSpPr>
+          <p:nvPr/>
+        </p:nvSpPr>
+        <p:spPr>
+          <a:xfrm xmlns:a="http://schemas.openxmlformats.org/drawingml/2006/main">
+            <a:off x="6715125" y="2057400"/>
+            <a:ext cx="4572000" cy="400050"/>
+          </a:xfrm>
+          <a:prstGeom xmlns:a="http://schemas.openxmlformats.org/drawingml/2006/main" prst="rect">
+            <a:avLst/>
+          </a:prstGeom>
+          <a:noFill xmlns:a="http://schemas.openxmlformats.org/drawingml/2006/main"/>
+          <a:ln xmlns:a="http://schemas.openxmlformats.org/drawingml/2006/main" w="0">
+            <a:noFill/>
+          </a:ln>
+        </p:spPr>
+        <p:txBody>
+          <a:bodyPr xmlns:a="http://schemas.openxmlformats.org/drawingml/2006/main">
+            <a:noAutofit/>
+          </a:bodyPr>
+          <a:lstStyle xmlns:a="http://schemas.openxmlformats.org/drawingml/2006/main"/>
+          <a:p xmlns:a="http://schemas.openxmlformats.org/drawingml/2006/main">
+            <a:pPr>
+              <a:defRPr sz="1650" b="1">
+                <a:solidFill>
+                  <a:srgbClr val="E5751F"/>
+                </a:solidFill>
+                <a:latin typeface="Consolas"/>
+                <a:ea typeface="Consolas"/>
+                <a:cs typeface="Consolas"/>
+              </a:defRPr>
+            </a:pPr>
+            <a:r>
+              <a:rPr sz="1650" b="1">
+                <a:solidFill>
+                  <a:srgbClr val="E5751F"/>
+                </a:solidFill>
+                <a:latin typeface="Consolas"/>
+                <a:ea typeface="Consolas"/>
+                <a:cs typeface="Consolas"/>
+              </a:rPr>
+              <a:t>FRICTION</a:t>
+            </a:r>
+          </a:p>
+        </p:txBody>
+      </p:sp>
+      <p:sp>
+        <p:nvSpPr>
+          <p:cNvPr id="10" name="">
+            <a:extLst xmlns:a="http://schemas.openxmlformats.org/drawingml/2006/main">
+              <a:ext uri="{FF2B5EF4-FFF2-40B4-BE49-F238E27FC236}">
+                <a16:creationId xmlns:a16="http://schemas.microsoft.com/office/drawing/2014/main" id="{1811532F-000A-4AD7-B7D2-AA363AB99C34}"/>
+              </a:ext>
+            </a:extLst>
+          </p:cNvPr>
+          <p:cNvSpPr>
+            <a:spLocks xmlns:a="http://schemas.openxmlformats.org/drawingml/2006/main" noGrp="1"/>
+          </p:cNvSpPr>
+          <p:nvPr/>
+        </p:nvSpPr>
+        <p:spPr>
+          <a:xfrm xmlns:a="http://schemas.openxmlformats.org/drawingml/2006/main">
+            <a:off x="6715125" y="2667000"/>
+            <a:ext cx="4572000" cy="1619250"/>
+          </a:xfrm>
+          <a:prstGeom xmlns:a="http://schemas.openxmlformats.org/drawingml/2006/main" prst="rect">
+            <a:avLst/>
+          </a:prstGeom>
+          <a:noFill xmlns:a="http://schemas.openxmlformats.org/drawingml/2006/main"/>
+          <a:ln xmlns:a="http://schemas.openxmlformats.org/drawingml/2006/main" w="0">
+            <a:noFill/>
+          </a:ln>
+        </p:spPr>
+        <p:txBody>
+          <a:bodyPr xmlns:a="http://schemas.openxmlformats.org/drawingml/2006/main">
+            <a:noAutofit/>
+          </a:bodyPr>
+          <a:lstStyle xmlns:a="http://schemas.openxmlformats.org/drawingml/2006/main"/>
+          <a:p xmlns:a="http://schemas.openxmlformats.org/drawingml/2006/main">
+            <a:pPr marL="241300" indent="-114300">
               <a:spcAft>
-                <a:spcPts val="1900"/>
+                <a:spcPts val="1800"/>
               </a:spcAft>
               <a:buChar char="•"/>
-              <a:defRPr sz="2100" b="0">
-                <a:solidFill>
-                  <a:srgbClr val="151515"/>
-                </a:solidFill>
-                <a:latin typeface="Arial"/>
-                <a:ea typeface="Arial"/>
-                <a:cs typeface="Arial"/>
-              </a:defRPr>
-            </a:pPr>
-            <a:r>
-              <a:rPr sz="2100" b="0">
-                <a:solidFill>
-                  <a:srgbClr val="151515"/>
-                </a:solidFill>
-                <a:latin typeface="Arial"/>
-                <a:ea typeface="Arial"/>
-                <a:cs typeface="Arial"/>
-              </a:rPr>
-              <a:t>Next: use AI to cross technical gaps, then review critically</a:t>
-            </a:r>
-          </a:p>
-          <a:p xmlns:a="http://schemas.openxmlformats.org/drawingml/2006/main">
-            <a:pPr marL="292100" indent="-127000">
+              <a:defRPr sz="2175" b="0">
+                <a:solidFill>
+                  <a:srgbClr val="F7F7F4"/>
+                </a:solidFill>
+                <a:latin typeface="Arial"/>
+                <a:ea typeface="Arial"/>
+                <a:cs typeface="Arial"/>
+              </a:defRPr>
+            </a:pPr>
+            <a:r>
+              <a:rPr sz="2175" b="0">
+                <a:solidFill>
+                  <a:srgbClr val="F7F7F4"/>
+                </a:solidFill>
+                <a:latin typeface="Arial"/>
+                <a:ea typeface="Arial"/>
+                <a:cs typeface="Arial"/>
+              </a:rPr>
+              <a:t>Generic visuals and excess code</a:t>
+            </a:r>
+          </a:p>
+          <a:p xmlns:a="http://schemas.openxmlformats.org/drawingml/2006/main">
+            <a:pPr marL="241300" indent="-114300">
               <a:spcAft>
-                <a:spcPts val="1900"/>
+                <a:spcPts val="1800"/>
               </a:spcAft>
               <a:buChar char="•"/>
-              <a:defRPr sz="2100" b="0">
-                <a:solidFill>
-                  <a:srgbClr val="151515"/>
-                </a:solidFill>
-                <a:latin typeface="Arial"/>
-                <a:ea typeface="Arial"/>
-                <a:cs typeface="Arial"/>
-              </a:defRPr>
-            </a:pPr>
-            <a:r>
-              <a:rPr sz="2100" b="0">
-                <a:solidFill>
-                  <a:srgbClr val="151515"/>
-                </a:solidFill>
-                <a:latin typeface="Arial"/>
-                <a:ea typeface="Arial"/>
-                <a:cs typeface="Arial"/>
-              </a:rPr>
-              <a:t>Separate experiment: a playable C# mod prototype</a:t>
+              <a:defRPr sz="2175" b="0">
+                <a:solidFill>
+                  <a:srgbClr val="F7F7F4"/>
+                </a:solidFill>
+                <a:latin typeface="Arial"/>
+                <a:ea typeface="Arial"/>
+                <a:cs typeface="Arial"/>
+              </a:defRPr>
+            </a:pPr>
+            <a:r>
+              <a:rPr sz="2175" b="0">
+                <a:solidFill>
+                  <a:srgbClr val="F7F7F4"/>
+                </a:solidFill>
+                <a:latin typeface="Arial"/>
+                <a:ea typeface="Arial"/>
+                <a:cs typeface="Arial"/>
+              </a:rPr>
+              <a:t>Time and token cost</a:t>
+            </a:r>
+          </a:p>
+        </p:txBody>
+      </p:sp>
+      <p:sp>
+        <p:nvSpPr>
+          <p:cNvPr id="11" name="">
+            <a:extLst xmlns:a="http://schemas.openxmlformats.org/drawingml/2006/main">
+              <a:ext uri="{FF2B5EF4-FFF2-40B4-BE49-F238E27FC236}">
+                <a16:creationId xmlns:a16="http://schemas.microsoft.com/office/drawing/2014/main" id="{893109A6-0101-4B6D-B7E4-8AEC6345BDF3}"/>
+              </a:ext>
+            </a:extLst>
+          </p:cNvPr>
+          <p:cNvSpPr>
+            <a:spLocks xmlns:a="http://schemas.openxmlformats.org/drawingml/2006/main" noGrp="1"/>
+          </p:cNvSpPr>
+          <p:nvPr/>
+        </p:nvSpPr>
+        <p:spPr>
+          <a:xfrm xmlns:a="http://schemas.openxmlformats.org/drawingml/2006/main">
+            <a:off x="676275" y="4648200"/>
+            <a:ext cx="10572750" cy="666750"/>
+          </a:xfrm>
+          <a:prstGeom xmlns:a="http://schemas.openxmlformats.org/drawingml/2006/main" prst="rect">
+            <a:avLst/>
+          </a:prstGeom>
+          <a:noFill xmlns:a="http://schemas.openxmlformats.org/drawingml/2006/main"/>
+          <a:ln xmlns:a="http://schemas.openxmlformats.org/drawingml/2006/main" w="0">
+            <a:noFill/>
+          </a:ln>
+        </p:spPr>
+        <p:txBody>
+          <a:bodyPr xmlns:a="http://schemas.openxmlformats.org/drawingml/2006/main">
+            <a:noAutofit/>
+          </a:bodyPr>
+          <a:lstStyle xmlns:a="http://schemas.openxmlformats.org/drawingml/2006/main"/>
+          <a:p xmlns:a="http://schemas.openxmlformats.org/drawingml/2006/main">
+            <a:pPr>
+              <a:defRPr sz="2850" b="1">
+                <a:solidFill>
+                  <a:srgbClr val="F7F7F4"/>
+                </a:solidFill>
+                <a:latin typeface="Arial"/>
+                <a:ea typeface="Arial"/>
+                <a:cs typeface="Arial"/>
+              </a:defRPr>
+            </a:pPr>
+            <a:r>
+              <a:rPr sz="2850" b="1">
+                <a:solidFill>
+                  <a:srgbClr val="F7F7F4"/>
+                </a:solidFill>
+                <a:latin typeface="Arial"/>
+                <a:ea typeface="Arial"/>
+                <a:cs typeface="Arial"/>
+              </a:rPr>
+              <a:t>Next: our C# mod experiment</a:t>
+            </a:r>
+          </a:p>
+        </p:txBody>
+      </p:sp>
+      <p:sp>
+        <p:nvSpPr>
+          <p:cNvPr id="12" name="">
+            <a:extLst xmlns:a="http://schemas.openxmlformats.org/drawingml/2006/main">
+              <a:ext uri="{FF2B5EF4-FFF2-40B4-BE49-F238E27FC236}">
+                <a16:creationId xmlns:a16="http://schemas.microsoft.com/office/drawing/2014/main" id="{60F17D40-42D7-4FF2-975F-BF5D114039B1}"/>
+              </a:ext>
+            </a:extLst>
+          </p:cNvPr>
+          <p:cNvSpPr>
+            <a:spLocks xmlns:a="http://schemas.openxmlformats.org/drawingml/2006/main" noGrp="1"/>
+          </p:cNvSpPr>
+          <p:nvPr/>
+        </p:nvSpPr>
+        <p:spPr>
+          <a:xfrm xmlns:a="http://schemas.openxmlformats.org/drawingml/2006/main">
+            <a:off x="695325" y="5391150"/>
+            <a:ext cx="10382250" cy="619125"/>
+          </a:xfrm>
+          <a:prstGeom xmlns:a="http://schemas.openxmlformats.org/drawingml/2006/main" prst="rect">
+            <a:avLst/>
+          </a:prstGeom>
+          <a:noFill xmlns:a="http://schemas.openxmlformats.org/drawingml/2006/main"/>
+          <a:ln xmlns:a="http://schemas.openxmlformats.org/drawingml/2006/main" w="0">
+            <a:noFill/>
+          </a:ln>
+        </p:spPr>
+        <p:txBody>
+          <a:bodyPr xmlns:a="http://schemas.openxmlformats.org/drawingml/2006/main">
+            <a:noAutofit/>
+          </a:bodyPr>
+          <a:lstStyle xmlns:a="http://schemas.openxmlformats.org/drawingml/2006/main"/>
+          <a:p xmlns:a="http://schemas.openxmlformats.org/drawingml/2006/main">
+            <a:pPr>
+              <a:defRPr sz="1950" b="0">
+                <a:solidFill>
+                  <a:srgbClr val="B7C1CB"/>
+                </a:solidFill>
+                <a:latin typeface="Arial"/>
+                <a:ea typeface="Arial"/>
+                <a:cs typeface="Arial"/>
+              </a:defRPr>
+            </a:pPr>
+            <a:r>
+              <a:rPr sz="1950" b="0">
+                <a:solidFill>
+                  <a:srgbClr val="B7C1CB"/>
+                </a:solidFill>
+                <a:latin typeface="Arial"/>
+                <a:ea typeface="Arial"/>
+                <a:cs typeface="Arial"/>
+              </a:rPr>
+              <a:t>A playable prototype helped us explore beyond the languages we knew.</a:t>
             </a:r>
           </a:p>
         </p:txBody>
